--- a/output/wordlabs-mega-prefix-3day.pptx
+++ b/output/wordlabs-mega-prefix-3day.pptx
@@ -6040,7 +6040,7 @@
                 <a:ea typeface="Calibri" pitchFamily="34" charset="-122"/>
                 <a:cs typeface="Calibri" pitchFamily="34" charset="-120"/>
               </a:rPr>
-              <a:t>The excited crowd cheered when the </a:t>
+              <a:t>The pop star was a true </a:t>
             </a:r>
             <a:pPr algn="l" indent="0" marL="0">
               <a:buNone/>
@@ -6071,7 +6071,7 @@
                 <a:ea typeface="Calibri" pitchFamily="34" charset="-122"/>
                 <a:cs typeface="Calibri" pitchFamily="34" charset="-120"/>
               </a:rPr>
-              <a:t> picked up the </a:t>
+              <a:t>, and her </a:t>
             </a:r>
             <a:pPr algn="l" indent="0" marL="0">
               <a:buNone/>
@@ -6102,7 +6102,7 @@
                 <a:ea typeface="Calibri" pitchFamily="34" charset="-122"/>
                 <a:cs typeface="Calibri" pitchFamily="34" charset="-120"/>
               </a:rPr>
-              <a:t> to speak.</a:t>
+              <a:t> filled the entire stadium with sound.</a:t>
             </a:r>
             <a:endParaRPr lang="en-US" sz="1800" dirty="0"/>
           </a:p>
@@ -9116,7 +9116,7 @@
                 <a:ea typeface="Trebuchet MS" pitchFamily="34" charset="-122"/>
                 <a:cs typeface="Trebuchet MS" pitchFamily="34" charset="-120"/>
               </a:rPr>
-              <a:t>meg</a:t>
+              <a:t>me</a:t>
             </a:r>
             <a:endParaRPr lang="en-US" sz="1400" dirty="0"/>
           </a:p>
@@ -9221,7 +9221,7 @@
                 <a:ea typeface="Trebuchet MS" pitchFamily="34" charset="-122"/>
                 <a:cs typeface="Trebuchet MS" pitchFamily="34" charset="-120"/>
               </a:rPr>
-              <a:t>a</a:t>
+              <a:t>ga</a:t>
             </a:r>
             <a:endParaRPr lang="en-US" sz="1400" dirty="0"/>
           </a:p>
@@ -10338,7 +10338,7 @@
                 <a:ea typeface="Trebuchet MS" pitchFamily="34" charset="-122"/>
                 <a:cs typeface="Trebuchet MS" pitchFamily="34" charset="-120"/>
               </a:rPr>
-              <a:t>meg</a:t>
+              <a:t>me</a:t>
             </a:r>
             <a:endParaRPr lang="en-US" sz="1400" dirty="0"/>
           </a:p>
@@ -10443,7 +10443,7 @@
                 <a:ea typeface="Trebuchet MS" pitchFamily="34" charset="-122"/>
                 <a:cs typeface="Trebuchet MS" pitchFamily="34" charset="-120"/>
               </a:rPr>
-              <a:t>a</a:t>
+              <a:t>ga</a:t>
             </a:r>
             <a:endParaRPr lang="en-US" sz="1400" dirty="0"/>
           </a:p>
@@ -13795,7 +13795,7 @@
                 <a:ea typeface="Trebuchet MS" pitchFamily="34" charset="-122"/>
                 <a:cs typeface="Trebuchet MS" pitchFamily="34" charset="-120"/>
               </a:rPr>
-              <a:t>meg</a:t>
+              <a:t>me</a:t>
             </a:r>
             <a:endParaRPr lang="en-US" sz="1400" dirty="0"/>
           </a:p>
@@ -13900,7 +13900,7 @@
                 <a:ea typeface="Trebuchet MS" pitchFamily="34" charset="-122"/>
                 <a:cs typeface="Trebuchet MS" pitchFamily="34" charset="-120"/>
               </a:rPr>
-              <a:t>a</a:t>
+              <a:t>ga</a:t>
             </a:r>
             <a:endParaRPr lang="en-US" sz="1400" dirty="0"/>
           </a:p>
@@ -15282,7 +15282,7 @@
                 <a:ea typeface="Trebuchet MS" pitchFamily="34" charset="-122"/>
                 <a:cs typeface="Trebuchet MS" pitchFamily="34" charset="-120"/>
               </a:rPr>
-              <a:t>meg</a:t>
+              <a:t>me</a:t>
             </a:r>
             <a:endParaRPr lang="en-US" sz="1400" dirty="0"/>
           </a:p>
@@ -15387,7 +15387,7 @@
                 <a:ea typeface="Trebuchet MS" pitchFamily="34" charset="-122"/>
                 <a:cs typeface="Trebuchet MS" pitchFamily="34" charset="-120"/>
               </a:rPr>
-              <a:t>a</a:t>
+              <a:t>ga</a:t>
             </a:r>
             <a:endParaRPr lang="en-US" sz="1400" dirty="0"/>
           </a:p>
@@ -17412,7 +17412,7 @@
                 <a:ea typeface="Calibri" pitchFamily="34" charset="-122"/>
                 <a:cs typeface="Calibri" pitchFamily="34" charset="-120"/>
               </a:rPr>
-              <a:t>The </a:t>
+              <a:t>Our teacher explained that a </a:t>
             </a:r>
             <a:pPr algn="l" indent="0" marL="0">
               <a:buNone/>
@@ -17429,7 +17429,7 @@
                 <a:ea typeface="Calibri" pitchFamily="34" charset="-122"/>
                 <a:cs typeface="Calibri" pitchFamily="34" charset="-120"/>
               </a:rPr>
-              <a:t>megacity</a:t>
+              <a:t>megalith</a:t>
             </a:r>
             <a:pPr algn="l" indent="0" marL="0">
               <a:buNone/>
@@ -17443,7 +17443,7 @@
                 <a:ea typeface="Calibri" pitchFamily="34" charset="-122"/>
                 <a:cs typeface="Calibri" pitchFamily="34" charset="-120"/>
               </a:rPr>
-              <a:t> was so enormous that a </a:t>
+              <a:t> is a massive ancient stone, that </a:t>
             </a:r>
             <a:pPr algn="l" indent="0" marL="0">
               <a:buNone/>
@@ -17460,7 +17460,7 @@
                 <a:ea typeface="Calibri" pitchFamily="34" charset="-122"/>
                 <a:cs typeface="Calibri" pitchFamily="34" charset="-120"/>
               </a:rPr>
-              <a:t>megastar</a:t>
+              <a:t>megabytes</a:t>
             </a:r>
             <a:pPr algn="l" indent="0" marL="0">
               <a:buNone/>
@@ -17474,7 +17474,7 @@
                 <a:ea typeface="Calibri" pitchFamily="34" charset="-122"/>
                 <a:cs typeface="Calibri" pitchFamily="34" charset="-120"/>
               </a:rPr>
-              <a:t> could perform a </a:t>
+              <a:t> measure computer data, and that </a:t>
             </a:r>
             <a:pPr algn="l" indent="0" marL="0">
               <a:buNone/>
@@ -17491,7 +17491,7 @@
                 <a:ea typeface="Calibri" pitchFamily="34" charset="-122"/>
                 <a:cs typeface="Calibri" pitchFamily="34" charset="-120"/>
               </a:rPr>
-              <a:t>megaconcert</a:t>
+              <a:t>megacities</a:t>
             </a:r>
             <a:pPr algn="l" indent="0" marL="0">
               <a:buNone/>
@@ -17505,7 +17505,7 @@
                 <a:ea typeface="Calibri" pitchFamily="34" charset="-122"/>
                 <a:cs typeface="Calibri" pitchFamily="34" charset="-120"/>
               </a:rPr>
-              <a:t> for millions of fans.</a:t>
+              <a:t> are home to millions of people.</a:t>
             </a:r>
             <a:endParaRPr lang="en-US" sz="1800" dirty="0"/>
           </a:p>
@@ -17660,7 +17660,7 @@
                 <a:ea typeface="Trebuchet MS" pitchFamily="34" charset="-122"/>
                 <a:cs typeface="Trebuchet MS" pitchFamily="34" charset="-120"/>
               </a:rPr>
-              <a:t>megacity</a:t>
+              <a:t>megalith</a:t>
             </a:r>
             <a:endParaRPr lang="en-US" sz="1400" dirty="0"/>
           </a:p>
@@ -17788,7 +17788,7 @@
                 <a:ea typeface="Trebuchet MS" pitchFamily="34" charset="-122"/>
                 <a:cs typeface="Trebuchet MS" pitchFamily="34" charset="-120"/>
               </a:rPr>
-              <a:t>megastar</a:t>
+              <a:t>megabytes</a:t>
             </a:r>
             <a:endParaRPr lang="en-US" sz="1400" dirty="0"/>
           </a:p>
@@ -17916,7 +17916,7 @@
                 <a:ea typeface="Trebuchet MS" pitchFamily="34" charset="-122"/>
                 <a:cs typeface="Trebuchet MS" pitchFamily="34" charset="-120"/>
               </a:rPr>
-              <a:t>megaconcert</a:t>
+              <a:t>megacities</a:t>
             </a:r>
             <a:endParaRPr lang="en-US" sz="1400" dirty="0"/>
           </a:p>
@@ -18386,7 +18386,7 @@
                 <a:ea typeface="Trebuchet MS" pitchFamily="34" charset="-122"/>
                 <a:cs typeface="Trebuchet MS" pitchFamily="34" charset="-120"/>
               </a:rPr>
-              <a:t>megacity</a:t>
+              <a:t>megalith</a:t>
             </a:r>
             <a:endParaRPr lang="en-US" sz="2800" dirty="0"/>
           </a:p>
@@ -19213,7 +19213,7 @@
                 <a:ea typeface="Trebuchet MS" pitchFamily="34" charset="-122"/>
                 <a:cs typeface="Trebuchet MS" pitchFamily="34" charset="-120"/>
               </a:rPr>
-              <a:t>megacity</a:t>
+              <a:t>megalith</a:t>
             </a:r>
             <a:endParaRPr lang="en-US" sz="2800" dirty="0"/>
           </a:p>
@@ -19464,7 +19464,7 @@
                 <a:ea typeface="Trebuchet MS" pitchFamily="34" charset="-122"/>
                 <a:cs typeface="Trebuchet MS" pitchFamily="34" charset="-120"/>
               </a:rPr>
-              <a:t>city</a:t>
+              <a:t>lith</a:t>
             </a:r>
             <a:endParaRPr lang="en-US" sz="1300" dirty="0"/>
           </a:p>
@@ -19503,7 +19503,7 @@
                 <a:ea typeface="Calibri" pitchFamily="34" charset="-122"/>
                 <a:cs typeface="Calibri" pitchFamily="34" charset="-120"/>
               </a:rPr>
-              <a:t>a large town</a:t>
+              <a:t>stone</a:t>
             </a:r>
             <a:endParaRPr lang="en-US" sz="850" dirty="0"/>
           </a:p>
@@ -20198,7 +20198,7 @@
                 <a:ea typeface="Trebuchet MS" pitchFamily="34" charset="-122"/>
                 <a:cs typeface="Trebuchet MS" pitchFamily="34" charset="-120"/>
               </a:rPr>
-              <a:t>megacity</a:t>
+              <a:t>megalith</a:t>
             </a:r>
             <a:endParaRPr lang="en-US" sz="2800" dirty="0"/>
           </a:p>
@@ -20449,7 +20449,7 @@
                 <a:ea typeface="Trebuchet MS" pitchFamily="34" charset="-122"/>
                 <a:cs typeface="Trebuchet MS" pitchFamily="34" charset="-120"/>
               </a:rPr>
-              <a:t>city</a:t>
+              <a:t>lith</a:t>
             </a:r>
             <a:endParaRPr lang="en-US" sz="1300" dirty="0"/>
           </a:p>
@@ -20488,7 +20488,7 @@
                 <a:ea typeface="Calibri" pitchFamily="34" charset="-122"/>
                 <a:cs typeface="Calibri" pitchFamily="34" charset="-120"/>
               </a:rPr>
-              <a:t>a large town</a:t>
+              <a:t>stone</a:t>
             </a:r>
             <a:endParaRPr lang="en-US" sz="850" dirty="0"/>
           </a:p>
@@ -20595,8 +20595,8 @@
         </p:nvSpPr>
         <p:spPr>
           <a:xfrm>
-            <a:off x="1975104" y="3364992"/>
-            <a:ext cx="1554480" cy="475488"/>
+            <a:off x="2313432" y="3364992"/>
+            <a:ext cx="1645920" cy="475488"/>
           </a:xfrm>
           <a:prstGeom prst="rect">
             <a:avLst>
@@ -20622,8 +20622,8 @@
         </p:nvSpPr>
         <p:spPr>
           <a:xfrm>
-            <a:off x="1975104" y="3364992"/>
-            <a:ext cx="1554480" cy="475488"/>
+            <a:off x="2313432" y="3364992"/>
+            <a:ext cx="1645920" cy="475488"/>
           </a:xfrm>
           <a:prstGeom prst="rect">
             <a:avLst/>
@@ -20647,7 +20647,7 @@
                 <a:ea typeface="Trebuchet MS" pitchFamily="34" charset="-122"/>
                 <a:cs typeface="Trebuchet MS" pitchFamily="34" charset="-120"/>
               </a:rPr>
-              <a:t>meg</a:t>
+              <a:t>me</a:t>
             </a:r>
             <a:endParaRPr lang="en-US" sz="1400" dirty="0"/>
           </a:p>
@@ -20661,8 +20661,8 @@
         </p:nvSpPr>
         <p:spPr>
           <a:xfrm>
-            <a:off x="3529584" y="3364992"/>
-            <a:ext cx="73152" cy="475488"/>
+            <a:off x="3959352" y="3364992"/>
+            <a:ext cx="411480" cy="475488"/>
           </a:xfrm>
           <a:prstGeom prst="rect">
             <a:avLst/>
@@ -20700,8 +20700,8 @@
         </p:nvSpPr>
         <p:spPr>
           <a:xfrm>
-            <a:off x="3602736" y="3364992"/>
-            <a:ext cx="1554480" cy="475488"/>
+            <a:off x="4370832" y="3364992"/>
+            <a:ext cx="1645920" cy="475488"/>
           </a:xfrm>
           <a:prstGeom prst="rect">
             <a:avLst>
@@ -20727,8 +20727,8 @@
         </p:nvSpPr>
         <p:spPr>
           <a:xfrm>
-            <a:off x="3602736" y="3364992"/>
-            <a:ext cx="1554480" cy="475488"/>
+            <a:off x="4370832" y="3364992"/>
+            <a:ext cx="1645920" cy="475488"/>
           </a:xfrm>
           <a:prstGeom prst="rect">
             <a:avLst/>
@@ -20752,7 +20752,7 @@
                 <a:ea typeface="Trebuchet MS" pitchFamily="34" charset="-122"/>
                 <a:cs typeface="Trebuchet MS" pitchFamily="34" charset="-120"/>
               </a:rPr>
-              <a:t>a</a:t>
+              <a:t>ga</a:t>
             </a:r>
             <a:endParaRPr lang="en-US" sz="1400" dirty="0"/>
           </a:p>
@@ -20766,8 +20766,8 @@
         </p:nvSpPr>
         <p:spPr>
           <a:xfrm>
-            <a:off x="5157216" y="3364992"/>
-            <a:ext cx="73152" cy="475488"/>
+            <a:off x="6016752" y="3364992"/>
+            <a:ext cx="411480" cy="475488"/>
           </a:xfrm>
           <a:prstGeom prst="rect">
             <a:avLst/>
@@ -20805,8 +20805,8 @@
         </p:nvSpPr>
         <p:spPr>
           <a:xfrm>
-            <a:off x="5230368" y="3364992"/>
-            <a:ext cx="1554480" cy="475488"/>
+            <a:off x="6428232" y="3364992"/>
+            <a:ext cx="1645920" cy="475488"/>
           </a:xfrm>
           <a:prstGeom prst="rect">
             <a:avLst>
@@ -20832,8 +20832,8 @@
         </p:nvSpPr>
         <p:spPr>
           <a:xfrm>
-            <a:off x="5230368" y="3364992"/>
-            <a:ext cx="1554480" cy="475488"/>
+            <a:off x="6428232" y="3364992"/>
+            <a:ext cx="1645920" cy="475488"/>
           </a:xfrm>
           <a:prstGeom prst="rect">
             <a:avLst/>
@@ -20857,7 +20857,7 @@
                 <a:ea typeface="Trebuchet MS" pitchFamily="34" charset="-122"/>
                 <a:cs typeface="Trebuchet MS" pitchFamily="34" charset="-120"/>
               </a:rPr>
-              <a:t>cit</a:t>
+              <a:t>lith</a:t>
             </a:r>
             <a:endParaRPr lang="en-US" sz="1400" dirty="0"/>
           </a:p>
@@ -20865,119 +20865,80 @@
       </p:sp>
       <p:sp>
         <p:nvSpPr>
-          <p:cNvPr id="33" name="Text 31"/>
-          <p:cNvSpPr/>
-          <p:nvPr/>
-        </p:nvSpPr>
-        <p:spPr>
-          <a:xfrm>
-            <a:off x="6784848" y="3364992"/>
-            <a:ext cx="73152" cy="475488"/>
-          </a:xfrm>
-          <a:prstGeom prst="rect">
-            <a:avLst/>
-          </a:prstGeom>
-          <a:noFill/>
-          <a:ln/>
-        </p:spPr>
-        <p:txBody>
-          <a:bodyPr wrap="square" lIns="0" tIns="0" rIns="0" bIns="0" rtlCol="0" anchor="ctr"/>
-          <a:lstStyle/>
-          <a:p>
-            <a:pPr algn="ctr" indent="0" marL="0">
-              <a:buNone/>
-            </a:pPr>
-            <a:r>
-              <a:rPr lang="en-US" sz="1600" b="1" dirty="0">
-                <a:solidFill>
-                  <a:srgbClr val="0D9488"/>
+          <p:cNvPr id="33" name="Shape 31"/>
+          <p:cNvSpPr/>
+          <p:nvPr/>
+        </p:nvSpPr>
+        <p:spPr>
+          <a:xfrm>
+            <a:off x="365760" y="4096512"/>
+            <a:ext cx="1371600" cy="804672"/>
+          </a:xfrm>
+          <a:prstGeom prst="rect">
+            <a:avLst>
+              <a:gd name="adj" fmla="val 6818"/>
+            </a:avLst>
+          </a:prstGeom>
+          <a:solidFill>
+            <a:srgbClr val="E2E8F0"/>
+          </a:solidFill>
+          <a:ln w="12700">
+            <a:solidFill>
+              <a:srgbClr val="E2E8F0"/>
+            </a:solidFill>
+            <a:prstDash val="solid"/>
+          </a:ln>
+        </p:spPr>
+      </p:sp>
+      <p:sp>
+        <p:nvSpPr>
+          <p:cNvPr id="34" name="Text 32"/>
+          <p:cNvSpPr/>
+          <p:nvPr/>
+        </p:nvSpPr>
+        <p:spPr>
+          <a:xfrm>
+            <a:off x="365760" y="4096512"/>
+            <a:ext cx="1371600" cy="804672"/>
+          </a:xfrm>
+          <a:prstGeom prst="rect">
+            <a:avLst/>
+          </a:prstGeom>
+          <a:noFill/>
+          <a:ln/>
+        </p:spPr>
+        <p:txBody>
+          <a:bodyPr wrap="square" lIns="0" tIns="0" rIns="0" bIns="0" rtlCol="0" anchor="ctr"/>
+          <a:lstStyle/>
+          <a:p>
+            <a:pPr algn="ctr" indent="0" marL="0">
+              <a:buNone/>
+            </a:pPr>
+            <a:r>
+              <a:rPr lang="en-US" sz="1100" b="1" dirty="0">
+                <a:solidFill>
+                  <a:srgbClr val="475569"/>
                 </a:solidFill>
                 <a:latin typeface="Trebuchet MS" pitchFamily="34" charset="0"/>
                 <a:ea typeface="Trebuchet MS" pitchFamily="34" charset="-122"/>
                 <a:cs typeface="Trebuchet MS" pitchFamily="34" charset="-120"/>
               </a:rPr>
-              <a:t>·</a:t>
-            </a:r>
-            <a:endParaRPr lang="en-US" sz="1600" dirty="0"/>
-          </a:p>
-        </p:txBody>
-      </p:sp>
-      <p:sp>
-        <p:nvSpPr>
-          <p:cNvPr id="34" name="Shape 32"/>
-          <p:cNvSpPr/>
-          <p:nvPr/>
-        </p:nvSpPr>
-        <p:spPr>
-          <a:xfrm>
-            <a:off x="6858000" y="3364992"/>
-            <a:ext cx="1554480" cy="475488"/>
-          </a:xfrm>
-          <a:prstGeom prst="rect">
-            <a:avLst>
-              <a:gd name="adj" fmla="val 9615"/>
-            </a:avLst>
-          </a:prstGeom>
-          <a:solidFill>
-            <a:srgbClr val="FFFFFF"/>
-          </a:solidFill>
-          <a:ln w="12700">
-            <a:solidFill>
-              <a:srgbClr val="0D9488"/>
-            </a:solidFill>
-            <a:prstDash val="solid"/>
-          </a:ln>
-        </p:spPr>
-      </p:sp>
-      <p:sp>
-        <p:nvSpPr>
-          <p:cNvPr id="35" name="Text 33"/>
-          <p:cNvSpPr/>
-          <p:nvPr/>
-        </p:nvSpPr>
-        <p:spPr>
-          <a:xfrm>
-            <a:off x="6858000" y="3364992"/>
-            <a:ext cx="1554480" cy="475488"/>
-          </a:xfrm>
-          <a:prstGeom prst="rect">
-            <a:avLst/>
-          </a:prstGeom>
-          <a:noFill/>
-          <a:ln/>
-        </p:spPr>
-        <p:txBody>
-          <a:bodyPr wrap="square" lIns="0" tIns="0" rIns="0" bIns="0" rtlCol="0" anchor="ctr"/>
-          <a:lstStyle/>
-          <a:p>
-            <a:pPr algn="ctr" indent="0" marL="0">
-              <a:buNone/>
-            </a:pPr>
-            <a:r>
-              <a:rPr lang="en-US" sz="1400" b="1" dirty="0">
-                <a:solidFill>
-                  <a:srgbClr val="0D9488"/>
-                </a:solidFill>
-                <a:latin typeface="Trebuchet MS" pitchFamily="34" charset="0"/>
-                <a:ea typeface="Trebuchet MS" pitchFamily="34" charset="-122"/>
-                <a:cs typeface="Trebuchet MS" pitchFamily="34" charset="-120"/>
-              </a:rPr>
-              <a:t>y</a:t>
-            </a:r>
-            <a:endParaRPr lang="en-US" sz="1400" dirty="0"/>
-          </a:p>
-        </p:txBody>
-      </p:sp>
-      <p:sp>
-        <p:nvSpPr>
-          <p:cNvPr id="36" name="Shape 34"/>
-          <p:cNvSpPr/>
-          <p:nvPr/>
-        </p:nvSpPr>
-        <p:spPr>
-          <a:xfrm>
-            <a:off x="365760" y="4096512"/>
-            <a:ext cx="1371600" cy="804672"/>
+              <a:t>Phonemes</a:t>
+            </a:r>
+            <a:endParaRPr lang="en-US" sz="1100" dirty="0"/>
+          </a:p>
+        </p:txBody>
+      </p:sp>
+      <p:sp>
+        <p:nvSpPr>
+          <p:cNvPr id="35" name="Shape 33"/>
+          <p:cNvSpPr/>
+          <p:nvPr/>
+        </p:nvSpPr>
+        <p:spPr>
+          <a:xfrm>
+            <a:off x="1874520" y="4096512"/>
+            <a:ext cx="6903720" cy="804672"/>
           </a:xfrm>
           <a:prstGeom prst="rect">
             <a:avLst>
@@ -20985,85 +20946,19 @@
             </a:avLst>
           </a:prstGeom>
           <a:solidFill>
-            <a:srgbClr val="E2E8F0"/>
+            <a:srgbClr val="F8FAFC"/>
           </a:solidFill>
           <a:ln w="12700">
             <a:solidFill>
               <a:srgbClr val="E2E8F0"/>
             </a:solidFill>
-            <a:prstDash val="solid"/>
-          </a:ln>
-        </p:spPr>
-      </p:sp>
-      <p:sp>
-        <p:nvSpPr>
-          <p:cNvPr id="37" name="Text 35"/>
-          <p:cNvSpPr/>
-          <p:nvPr/>
-        </p:nvSpPr>
-        <p:spPr>
-          <a:xfrm>
-            <a:off x="365760" y="4096512"/>
-            <a:ext cx="1371600" cy="804672"/>
-          </a:xfrm>
-          <a:prstGeom prst="rect">
-            <a:avLst/>
-          </a:prstGeom>
-          <a:noFill/>
-          <a:ln/>
-        </p:spPr>
-        <p:txBody>
-          <a:bodyPr wrap="square" lIns="0" tIns="0" rIns="0" bIns="0" rtlCol="0" anchor="ctr"/>
-          <a:lstStyle/>
-          <a:p>
-            <a:pPr algn="ctr" indent="0" marL="0">
-              <a:buNone/>
-            </a:pPr>
-            <a:r>
-              <a:rPr lang="en-US" sz="1100" b="1" dirty="0">
-                <a:solidFill>
-                  <a:srgbClr val="475569"/>
-                </a:solidFill>
-                <a:latin typeface="Trebuchet MS" pitchFamily="34" charset="0"/>
-                <a:ea typeface="Trebuchet MS" pitchFamily="34" charset="-122"/>
-                <a:cs typeface="Trebuchet MS" pitchFamily="34" charset="-120"/>
-              </a:rPr>
-              <a:t>Phonemes</a:t>
-            </a:r>
-            <a:endParaRPr lang="en-US" sz="1100" dirty="0"/>
-          </a:p>
-        </p:txBody>
-      </p:sp>
-      <p:sp>
-        <p:nvSpPr>
-          <p:cNvPr id="38" name="Shape 36"/>
-          <p:cNvSpPr/>
-          <p:nvPr/>
-        </p:nvSpPr>
-        <p:spPr>
-          <a:xfrm>
-            <a:off x="1874520" y="4096512"/>
-            <a:ext cx="6903720" cy="804672"/>
-          </a:xfrm>
-          <a:prstGeom prst="rect">
-            <a:avLst>
-              <a:gd name="adj" fmla="val 6818"/>
-            </a:avLst>
-          </a:prstGeom>
-          <a:solidFill>
-            <a:srgbClr val="F8FAFC"/>
-          </a:solidFill>
-          <a:ln w="12700">
-            <a:solidFill>
-              <a:srgbClr val="E2E8F0"/>
-            </a:solidFill>
             <a:prstDash val="dash"/>
           </a:ln>
         </p:spPr>
       </p:sp>
       <p:sp>
         <p:nvSpPr>
-          <p:cNvPr id="39" name="Text 37"/>
+          <p:cNvPr id="36" name="Text 34"/>
           <p:cNvSpPr/>
           <p:nvPr/>
         </p:nvSpPr>
@@ -21525,7 +21420,7 @@
                 <a:ea typeface="Trebuchet MS" pitchFamily="34" charset="-122"/>
                 <a:cs typeface="Trebuchet MS" pitchFamily="34" charset="-120"/>
               </a:rPr>
-              <a:t>megacity</a:t>
+              <a:t>megalith</a:t>
             </a:r>
             <a:endParaRPr lang="en-US" sz="2800" dirty="0"/>
           </a:p>
@@ -21776,7 +21671,7 @@
                 <a:ea typeface="Trebuchet MS" pitchFamily="34" charset="-122"/>
                 <a:cs typeface="Trebuchet MS" pitchFamily="34" charset="-120"/>
               </a:rPr>
-              <a:t>city</a:t>
+              <a:t>lith</a:t>
             </a:r>
             <a:endParaRPr lang="en-US" sz="1300" dirty="0"/>
           </a:p>
@@ -21815,7 +21710,7 @@
                 <a:ea typeface="Calibri" pitchFamily="34" charset="-122"/>
                 <a:cs typeface="Calibri" pitchFamily="34" charset="-120"/>
               </a:rPr>
-              <a:t>a large town</a:t>
+              <a:t>stone</a:t>
             </a:r>
             <a:endParaRPr lang="en-US" sz="850" dirty="0"/>
           </a:p>
@@ -21922,8 +21817,8 @@
         </p:nvSpPr>
         <p:spPr>
           <a:xfrm>
-            <a:off x="1975104" y="3364992"/>
-            <a:ext cx="1554480" cy="475488"/>
+            <a:off x="2313432" y="3364992"/>
+            <a:ext cx="1645920" cy="475488"/>
           </a:xfrm>
           <a:prstGeom prst="rect">
             <a:avLst>
@@ -21949,8 +21844,8 @@
         </p:nvSpPr>
         <p:spPr>
           <a:xfrm>
-            <a:off x="1975104" y="3364992"/>
-            <a:ext cx="1554480" cy="475488"/>
+            <a:off x="2313432" y="3364992"/>
+            <a:ext cx="1645920" cy="475488"/>
           </a:xfrm>
           <a:prstGeom prst="rect">
             <a:avLst/>
@@ -21974,7 +21869,7 @@
                 <a:ea typeface="Trebuchet MS" pitchFamily="34" charset="-122"/>
                 <a:cs typeface="Trebuchet MS" pitchFamily="34" charset="-120"/>
               </a:rPr>
-              <a:t>meg</a:t>
+              <a:t>me</a:t>
             </a:r>
             <a:endParaRPr lang="en-US" sz="1400" dirty="0"/>
           </a:p>
@@ -21988,8 +21883,8 @@
         </p:nvSpPr>
         <p:spPr>
           <a:xfrm>
-            <a:off x="3529584" y="3364992"/>
-            <a:ext cx="73152" cy="475488"/>
+            <a:off x="3959352" y="3364992"/>
+            <a:ext cx="411480" cy="475488"/>
           </a:xfrm>
           <a:prstGeom prst="rect">
             <a:avLst/>
@@ -22027,8 +21922,8 @@
         </p:nvSpPr>
         <p:spPr>
           <a:xfrm>
-            <a:off x="3602736" y="3364992"/>
-            <a:ext cx="1554480" cy="475488"/>
+            <a:off x="4370832" y="3364992"/>
+            <a:ext cx="1645920" cy="475488"/>
           </a:xfrm>
           <a:prstGeom prst="rect">
             <a:avLst>
@@ -22054,8 +21949,8 @@
         </p:nvSpPr>
         <p:spPr>
           <a:xfrm>
-            <a:off x="3602736" y="3364992"/>
-            <a:ext cx="1554480" cy="475488"/>
+            <a:off x="4370832" y="3364992"/>
+            <a:ext cx="1645920" cy="475488"/>
           </a:xfrm>
           <a:prstGeom prst="rect">
             <a:avLst/>
@@ -22079,7 +21974,7 @@
                 <a:ea typeface="Trebuchet MS" pitchFamily="34" charset="-122"/>
                 <a:cs typeface="Trebuchet MS" pitchFamily="34" charset="-120"/>
               </a:rPr>
-              <a:t>a</a:t>
+              <a:t>ga</a:t>
             </a:r>
             <a:endParaRPr lang="en-US" sz="1400" dirty="0"/>
           </a:p>
@@ -22093,8 +21988,8 @@
         </p:nvSpPr>
         <p:spPr>
           <a:xfrm>
-            <a:off x="5157216" y="3364992"/>
-            <a:ext cx="73152" cy="475488"/>
+            <a:off x="6016752" y="3364992"/>
+            <a:ext cx="411480" cy="475488"/>
           </a:xfrm>
           <a:prstGeom prst="rect">
             <a:avLst/>
@@ -22132,8 +22027,8 @@
         </p:nvSpPr>
         <p:spPr>
           <a:xfrm>
-            <a:off x="5230368" y="3364992"/>
-            <a:ext cx="1554480" cy="475488"/>
+            <a:off x="6428232" y="3364992"/>
+            <a:ext cx="1645920" cy="475488"/>
           </a:xfrm>
           <a:prstGeom prst="rect">
             <a:avLst>
@@ -22159,8 +22054,8 @@
         </p:nvSpPr>
         <p:spPr>
           <a:xfrm>
-            <a:off x="5230368" y="3364992"/>
-            <a:ext cx="1554480" cy="475488"/>
+            <a:off x="6428232" y="3364992"/>
+            <a:ext cx="1645920" cy="475488"/>
           </a:xfrm>
           <a:prstGeom prst="rect">
             <a:avLst/>
@@ -22184,7 +22079,7 @@
                 <a:ea typeface="Trebuchet MS" pitchFamily="34" charset="-122"/>
                 <a:cs typeface="Trebuchet MS" pitchFamily="34" charset="-120"/>
               </a:rPr>
-              <a:t>cit</a:t>
+              <a:t>lith</a:t>
             </a:r>
             <a:endParaRPr lang="en-US" sz="1400" dirty="0"/>
           </a:p>
@@ -22192,193 +22087,247 @@
       </p:sp>
       <p:sp>
         <p:nvSpPr>
-          <p:cNvPr id="33" name="Text 31"/>
-          <p:cNvSpPr/>
-          <p:nvPr/>
-        </p:nvSpPr>
-        <p:spPr>
-          <a:xfrm>
-            <a:off x="6784848" y="3364992"/>
-            <a:ext cx="73152" cy="475488"/>
-          </a:xfrm>
-          <a:prstGeom prst="rect">
-            <a:avLst/>
-          </a:prstGeom>
-          <a:noFill/>
-          <a:ln/>
-        </p:spPr>
-        <p:txBody>
-          <a:bodyPr wrap="square" lIns="0" tIns="0" rIns="0" bIns="0" rtlCol="0" anchor="ctr"/>
-          <a:lstStyle/>
-          <a:p>
-            <a:pPr algn="ctr" indent="0" marL="0">
-              <a:buNone/>
-            </a:pPr>
-            <a:r>
-              <a:rPr lang="en-US" sz="1600" b="1" dirty="0">
-                <a:solidFill>
-                  <a:srgbClr val="0D9488"/>
+          <p:cNvPr id="33" name="Shape 31"/>
+          <p:cNvSpPr/>
+          <p:nvPr/>
+        </p:nvSpPr>
+        <p:spPr>
+          <a:xfrm>
+            <a:off x="365760" y="4096512"/>
+            <a:ext cx="1371600" cy="804672"/>
+          </a:xfrm>
+          <a:prstGeom prst="rect">
+            <a:avLst>
+              <a:gd name="adj" fmla="val 6818"/>
+            </a:avLst>
+          </a:prstGeom>
+          <a:solidFill>
+            <a:srgbClr val="E2E8F0"/>
+          </a:solidFill>
+          <a:ln w="12700">
+            <a:solidFill>
+              <a:srgbClr val="E2E8F0"/>
+            </a:solidFill>
+            <a:prstDash val="solid"/>
+          </a:ln>
+        </p:spPr>
+      </p:sp>
+      <p:sp>
+        <p:nvSpPr>
+          <p:cNvPr id="34" name="Text 32"/>
+          <p:cNvSpPr/>
+          <p:nvPr/>
+        </p:nvSpPr>
+        <p:spPr>
+          <a:xfrm>
+            <a:off x="365760" y="4096512"/>
+            <a:ext cx="1371600" cy="804672"/>
+          </a:xfrm>
+          <a:prstGeom prst="rect">
+            <a:avLst/>
+          </a:prstGeom>
+          <a:noFill/>
+          <a:ln/>
+        </p:spPr>
+        <p:txBody>
+          <a:bodyPr wrap="square" lIns="0" tIns="0" rIns="0" bIns="0" rtlCol="0" anchor="ctr"/>
+          <a:lstStyle/>
+          <a:p>
+            <a:pPr algn="ctr" indent="0" marL="0">
+              <a:buNone/>
+            </a:pPr>
+            <a:r>
+              <a:rPr lang="en-US" sz="1100" b="1" dirty="0">
+                <a:solidFill>
+                  <a:srgbClr val="475569"/>
                 </a:solidFill>
                 <a:latin typeface="Trebuchet MS" pitchFamily="34" charset="0"/>
                 <a:ea typeface="Trebuchet MS" pitchFamily="34" charset="-122"/>
                 <a:cs typeface="Trebuchet MS" pitchFamily="34" charset="-120"/>
               </a:rPr>
-              <a:t>·</a:t>
-            </a:r>
-            <a:endParaRPr lang="en-US" sz="1600" dirty="0"/>
-          </a:p>
-        </p:txBody>
-      </p:sp>
-      <p:sp>
-        <p:nvSpPr>
-          <p:cNvPr id="34" name="Shape 32"/>
-          <p:cNvSpPr/>
-          <p:nvPr/>
-        </p:nvSpPr>
-        <p:spPr>
-          <a:xfrm>
-            <a:off x="6858000" y="3364992"/>
-            <a:ext cx="1554480" cy="475488"/>
+              <a:t>Phonemes</a:t>
+            </a:r>
+            <a:endParaRPr lang="en-US" sz="1100" dirty="0"/>
+          </a:p>
+        </p:txBody>
+      </p:sp>
+      <p:sp>
+        <p:nvSpPr>
+          <p:cNvPr id="35" name="Shape 33"/>
+          <p:cNvSpPr/>
+          <p:nvPr/>
+        </p:nvSpPr>
+        <p:spPr>
+          <a:xfrm>
+            <a:off x="1874520" y="4096512"/>
+            <a:ext cx="6903720" cy="658368"/>
           </a:xfrm>
           <a:prstGeom prst="rect">
             <a:avLst>
-              <a:gd name="adj" fmla="val 9615"/>
+              <a:gd name="adj" fmla="val 8333"/>
             </a:avLst>
           </a:prstGeom>
           <a:solidFill>
+            <a:srgbClr val="FCE7F3"/>
+          </a:solidFill>
+          <a:ln w="12700">
+            <a:solidFill>
+              <a:srgbClr val="DB2777"/>
+            </a:solidFill>
+            <a:prstDash val="solid"/>
+          </a:ln>
+        </p:spPr>
+      </p:sp>
+      <p:sp>
+        <p:nvSpPr>
+          <p:cNvPr id="36" name="Shape 34"/>
+          <p:cNvSpPr/>
+          <p:nvPr/>
+        </p:nvSpPr>
+        <p:spPr>
+          <a:xfrm>
+            <a:off x="2124837" y="4169664"/>
+            <a:ext cx="685800" cy="475488"/>
+          </a:xfrm>
+          <a:prstGeom prst="rect">
+            <a:avLst>
+              <a:gd name="adj" fmla="val 7692"/>
+            </a:avLst>
+          </a:prstGeom>
+          <a:solidFill>
             <a:srgbClr val="FFFFFF"/>
           </a:solidFill>
           <a:ln w="12700">
             <a:solidFill>
-              <a:srgbClr val="0D9488"/>
-            </a:solidFill>
-            <a:prstDash val="solid"/>
-          </a:ln>
-        </p:spPr>
-      </p:sp>
-      <p:sp>
-        <p:nvSpPr>
-          <p:cNvPr id="35" name="Text 33"/>
-          <p:cNvSpPr/>
-          <p:nvPr/>
-        </p:nvSpPr>
-        <p:spPr>
-          <a:xfrm>
-            <a:off x="6858000" y="3364992"/>
-            <a:ext cx="1554480" cy="475488"/>
-          </a:xfrm>
-          <a:prstGeom prst="rect">
-            <a:avLst/>
-          </a:prstGeom>
-          <a:noFill/>
-          <a:ln/>
-        </p:spPr>
-        <p:txBody>
-          <a:bodyPr wrap="square" lIns="0" tIns="0" rIns="0" bIns="0" rtlCol="0" anchor="ctr"/>
-          <a:lstStyle/>
-          <a:p>
-            <a:pPr algn="ctr" indent="0" marL="0">
-              <a:buNone/>
-            </a:pPr>
-            <a:r>
-              <a:rPr lang="en-US" sz="1400" b="1" dirty="0">
-                <a:solidFill>
-                  <a:srgbClr val="0D9488"/>
+              <a:srgbClr val="DB2777"/>
+            </a:solidFill>
+            <a:prstDash val="solid"/>
+          </a:ln>
+        </p:spPr>
+      </p:sp>
+      <p:sp>
+        <p:nvSpPr>
+          <p:cNvPr id="37" name="Text 35"/>
+          <p:cNvSpPr/>
+          <p:nvPr/>
+        </p:nvSpPr>
+        <p:spPr>
+          <a:xfrm>
+            <a:off x="2124837" y="4169664"/>
+            <a:ext cx="685800" cy="475488"/>
+          </a:xfrm>
+          <a:prstGeom prst="rect">
+            <a:avLst/>
+          </a:prstGeom>
+          <a:noFill/>
+          <a:ln/>
+        </p:spPr>
+        <p:txBody>
+          <a:bodyPr wrap="square" lIns="0" tIns="0" rIns="0" bIns="0" rtlCol="0" anchor="ctr"/>
+          <a:lstStyle/>
+          <a:p>
+            <a:pPr algn="ctr" indent="0" marL="0">
+              <a:buNone/>
+            </a:pPr>
+            <a:r>
+              <a:rPr lang="en-US" sz="900" b="1" dirty="0">
+                <a:solidFill>
+                  <a:srgbClr val="9D174D"/>
                 </a:solidFill>
                 <a:latin typeface="Trebuchet MS" pitchFamily="34" charset="0"/>
                 <a:ea typeface="Trebuchet MS" pitchFamily="34" charset="-122"/>
                 <a:cs typeface="Trebuchet MS" pitchFamily="34" charset="-120"/>
               </a:rPr>
-              <a:t>y</a:t>
-            </a:r>
-            <a:endParaRPr lang="en-US" sz="1400" dirty="0"/>
-          </a:p>
-        </p:txBody>
-      </p:sp>
-      <p:sp>
-        <p:nvSpPr>
-          <p:cNvPr id="36" name="Shape 34"/>
-          <p:cNvSpPr/>
-          <p:nvPr/>
-        </p:nvSpPr>
-        <p:spPr>
-          <a:xfrm>
-            <a:off x="365760" y="4096512"/>
-            <a:ext cx="1371600" cy="804672"/>
+              <a:t>m</a:t>
+            </a:r>
+            <a:endParaRPr lang="en-US" sz="900" dirty="0"/>
+          </a:p>
+        </p:txBody>
+      </p:sp>
+      <p:sp>
+        <p:nvSpPr>
+          <p:cNvPr id="38" name="Shape 36"/>
+          <p:cNvSpPr/>
+          <p:nvPr/>
+        </p:nvSpPr>
+        <p:spPr>
+          <a:xfrm>
+            <a:off x="3033522" y="4169664"/>
+            <a:ext cx="685800" cy="475488"/>
           </a:xfrm>
           <a:prstGeom prst="rect">
             <a:avLst>
-              <a:gd name="adj" fmla="val 6818"/>
+              <a:gd name="adj" fmla="val 7692"/>
             </a:avLst>
           </a:prstGeom>
           <a:solidFill>
-            <a:srgbClr val="E2E8F0"/>
-          </a:solidFill>
-          <a:ln w="12700">
-            <a:solidFill>
-              <a:srgbClr val="E2E8F0"/>
-            </a:solidFill>
-            <a:prstDash val="solid"/>
-          </a:ln>
-        </p:spPr>
-      </p:sp>
-      <p:sp>
-        <p:nvSpPr>
-          <p:cNvPr id="37" name="Text 35"/>
-          <p:cNvSpPr/>
-          <p:nvPr/>
-        </p:nvSpPr>
-        <p:spPr>
-          <a:xfrm>
-            <a:off x="365760" y="4096512"/>
-            <a:ext cx="1371600" cy="804672"/>
-          </a:xfrm>
-          <a:prstGeom prst="rect">
-            <a:avLst/>
-          </a:prstGeom>
-          <a:noFill/>
-          <a:ln/>
-        </p:spPr>
-        <p:txBody>
-          <a:bodyPr wrap="square" lIns="0" tIns="0" rIns="0" bIns="0" rtlCol="0" anchor="ctr"/>
-          <a:lstStyle/>
-          <a:p>
-            <a:pPr algn="ctr" indent="0" marL="0">
-              <a:buNone/>
-            </a:pPr>
-            <a:r>
-              <a:rPr lang="en-US" sz="1100" b="1" dirty="0">
-                <a:solidFill>
-                  <a:srgbClr val="475569"/>
+            <a:srgbClr val="FFFFFF"/>
+          </a:solidFill>
+          <a:ln w="12700">
+            <a:solidFill>
+              <a:srgbClr val="DB2777"/>
+            </a:solidFill>
+            <a:prstDash val="solid"/>
+          </a:ln>
+        </p:spPr>
+      </p:sp>
+      <p:sp>
+        <p:nvSpPr>
+          <p:cNvPr id="39" name="Text 37"/>
+          <p:cNvSpPr/>
+          <p:nvPr/>
+        </p:nvSpPr>
+        <p:spPr>
+          <a:xfrm>
+            <a:off x="3033522" y="4169664"/>
+            <a:ext cx="685800" cy="475488"/>
+          </a:xfrm>
+          <a:prstGeom prst="rect">
+            <a:avLst/>
+          </a:prstGeom>
+          <a:noFill/>
+          <a:ln/>
+        </p:spPr>
+        <p:txBody>
+          <a:bodyPr wrap="square" lIns="0" tIns="0" rIns="0" bIns="0" rtlCol="0" anchor="ctr"/>
+          <a:lstStyle/>
+          <a:p>
+            <a:pPr algn="ctr" indent="0" marL="0">
+              <a:buNone/>
+            </a:pPr>
+            <a:r>
+              <a:rPr lang="en-US" sz="900" b="1" dirty="0">
+                <a:solidFill>
+                  <a:srgbClr val="9D174D"/>
                 </a:solidFill>
                 <a:latin typeface="Trebuchet MS" pitchFamily="34" charset="0"/>
                 <a:ea typeface="Trebuchet MS" pitchFamily="34" charset="-122"/>
                 <a:cs typeface="Trebuchet MS" pitchFamily="34" charset="-120"/>
               </a:rPr>
-              <a:t>Phonemes</a:t>
-            </a:r>
-            <a:endParaRPr lang="en-US" sz="1100" dirty="0"/>
-          </a:p>
-        </p:txBody>
-      </p:sp>
-      <p:sp>
-        <p:nvSpPr>
-          <p:cNvPr id="38" name="Shape 36"/>
-          <p:cNvSpPr/>
-          <p:nvPr/>
-        </p:nvSpPr>
-        <p:spPr>
-          <a:xfrm>
-            <a:off x="1874520" y="4096512"/>
-            <a:ext cx="6903720" cy="804672"/>
+              <a:t>e</a:t>
+            </a:r>
+            <a:endParaRPr lang="en-US" sz="900" dirty="0"/>
+          </a:p>
+        </p:txBody>
+      </p:sp>
+      <p:sp>
+        <p:nvSpPr>
+          <p:cNvPr id="40" name="Shape 38"/>
+          <p:cNvSpPr/>
+          <p:nvPr/>
+        </p:nvSpPr>
+        <p:spPr>
+          <a:xfrm>
+            <a:off x="3942207" y="4169664"/>
+            <a:ext cx="685800" cy="475488"/>
           </a:xfrm>
           <a:prstGeom prst="rect">
             <a:avLst>
-              <a:gd name="adj" fmla="val 6818"/>
+              <a:gd name="adj" fmla="val 7692"/>
             </a:avLst>
           </a:prstGeom>
           <a:solidFill>
-            <a:srgbClr val="FCE7F3"/>
+            <a:srgbClr val="FFFFFF"/>
           </a:solidFill>
           <a:ln w="12700">
             <a:solidFill>
@@ -22390,41 +22339,14 @@
       </p:sp>
       <p:sp>
         <p:nvSpPr>
-          <p:cNvPr id="39" name="Shape 37"/>
-          <p:cNvSpPr/>
-          <p:nvPr/>
-        </p:nvSpPr>
-        <p:spPr>
-          <a:xfrm>
-            <a:off x="2023872" y="4169664"/>
-            <a:ext cx="685800" cy="384048"/>
-          </a:xfrm>
-          <a:prstGeom prst="rect">
-            <a:avLst>
-              <a:gd name="adj" fmla="val 9524"/>
-            </a:avLst>
-          </a:prstGeom>
-          <a:solidFill>
-            <a:srgbClr val="FFFFFF"/>
-          </a:solidFill>
-          <a:ln w="12700">
-            <a:solidFill>
-              <a:srgbClr val="DB2777"/>
-            </a:solidFill>
-            <a:prstDash val="solid"/>
-          </a:ln>
-        </p:spPr>
-      </p:sp>
-      <p:sp>
-        <p:nvSpPr>
-          <p:cNvPr id="40" name="Text 38"/>
-          <p:cNvSpPr/>
-          <p:nvPr/>
-        </p:nvSpPr>
-        <p:spPr>
-          <a:xfrm>
-            <a:off x="2023872" y="4169664"/>
-            <a:ext cx="685800" cy="384048"/>
+          <p:cNvPr id="41" name="Text 39"/>
+          <p:cNvSpPr/>
+          <p:nvPr/>
+        </p:nvSpPr>
+        <p:spPr>
+          <a:xfrm>
+            <a:off x="3942207" y="4169664"/>
+            <a:ext cx="685800" cy="475488"/>
           </a:xfrm>
           <a:prstGeom prst="rect">
             <a:avLst/>
@@ -22448,7 +22370,7 @@
                 <a:ea typeface="Trebuchet MS" pitchFamily="34" charset="-122"/>
                 <a:cs typeface="Trebuchet MS" pitchFamily="34" charset="-120"/>
               </a:rPr>
-              <a:t>m</a:t>
+              <a:t>g</a:t>
             </a:r>
             <a:endParaRPr lang="en-US" sz="900" dirty="0"/>
           </a:p>
@@ -22456,18 +22378,18 @@
       </p:sp>
       <p:sp>
         <p:nvSpPr>
-          <p:cNvPr id="41" name="Shape 39"/>
-          <p:cNvSpPr/>
-          <p:nvPr/>
-        </p:nvSpPr>
-        <p:spPr>
-          <a:xfrm>
-            <a:off x="2831592" y="4169664"/>
-            <a:ext cx="685800" cy="384048"/>
+          <p:cNvPr id="42" name="Shape 40"/>
+          <p:cNvSpPr/>
+          <p:nvPr/>
+        </p:nvSpPr>
+        <p:spPr>
+          <a:xfrm>
+            <a:off x="4850892" y="4169664"/>
+            <a:ext cx="685800" cy="475488"/>
           </a:xfrm>
           <a:prstGeom prst="rect">
             <a:avLst>
-              <a:gd name="adj" fmla="val 9524"/>
+              <a:gd name="adj" fmla="val 7692"/>
             </a:avLst>
           </a:prstGeom>
           <a:solidFill>
@@ -22483,14 +22405,14 @@
       </p:sp>
       <p:sp>
         <p:nvSpPr>
-          <p:cNvPr id="42" name="Text 40"/>
-          <p:cNvSpPr/>
-          <p:nvPr/>
-        </p:nvSpPr>
-        <p:spPr>
-          <a:xfrm>
-            <a:off x="2831592" y="4169664"/>
-            <a:ext cx="685800" cy="384048"/>
+          <p:cNvPr id="43" name="Text 41"/>
+          <p:cNvSpPr/>
+          <p:nvPr/>
+        </p:nvSpPr>
+        <p:spPr>
+          <a:xfrm>
+            <a:off x="4850892" y="4169664"/>
+            <a:ext cx="685800" cy="475488"/>
           </a:xfrm>
           <a:prstGeom prst="rect">
             <a:avLst/>
@@ -22514,7 +22436,7 @@
                 <a:ea typeface="Trebuchet MS" pitchFamily="34" charset="-122"/>
                 <a:cs typeface="Trebuchet MS" pitchFamily="34" charset="-120"/>
               </a:rPr>
-              <a:t>e</a:t>
+              <a:t>a</a:t>
             </a:r>
             <a:endParaRPr lang="en-US" sz="900" dirty="0"/>
           </a:p>
@@ -22522,18 +22444,18 @@
       </p:sp>
       <p:sp>
         <p:nvSpPr>
-          <p:cNvPr id="43" name="Shape 41"/>
-          <p:cNvSpPr/>
-          <p:nvPr/>
-        </p:nvSpPr>
-        <p:spPr>
-          <a:xfrm>
-            <a:off x="3639312" y="4169664"/>
-            <a:ext cx="685800" cy="384048"/>
+          <p:cNvPr id="44" name="Shape 42"/>
+          <p:cNvSpPr/>
+          <p:nvPr/>
+        </p:nvSpPr>
+        <p:spPr>
+          <a:xfrm>
+            <a:off x="5759577" y="4169664"/>
+            <a:ext cx="685800" cy="475488"/>
           </a:xfrm>
           <a:prstGeom prst="rect">
             <a:avLst>
-              <a:gd name="adj" fmla="val 9524"/>
+              <a:gd name="adj" fmla="val 7692"/>
             </a:avLst>
           </a:prstGeom>
           <a:solidFill>
@@ -22549,14 +22471,14 @@
       </p:sp>
       <p:sp>
         <p:nvSpPr>
-          <p:cNvPr id="44" name="Text 42"/>
-          <p:cNvSpPr/>
-          <p:nvPr/>
-        </p:nvSpPr>
-        <p:spPr>
-          <a:xfrm>
-            <a:off x="3639312" y="4169664"/>
-            <a:ext cx="685800" cy="384048"/>
+          <p:cNvPr id="45" name="Text 43"/>
+          <p:cNvSpPr/>
+          <p:nvPr/>
+        </p:nvSpPr>
+        <p:spPr>
+          <a:xfrm>
+            <a:off x="5759577" y="4169664"/>
+            <a:ext cx="685800" cy="475488"/>
           </a:xfrm>
           <a:prstGeom prst="rect">
             <a:avLst/>
@@ -22580,7 +22502,7 @@
                 <a:ea typeface="Trebuchet MS" pitchFamily="34" charset="-122"/>
                 <a:cs typeface="Trebuchet MS" pitchFamily="34" charset="-120"/>
               </a:rPr>
-              <a:t>g</a:t>
+              <a:t>l</a:t>
             </a:r>
             <a:endParaRPr lang="en-US" sz="900" dirty="0"/>
           </a:p>
@@ -22588,18 +22510,18 @@
       </p:sp>
       <p:sp>
         <p:nvSpPr>
-          <p:cNvPr id="45" name="Shape 43"/>
-          <p:cNvSpPr/>
-          <p:nvPr/>
-        </p:nvSpPr>
-        <p:spPr>
-          <a:xfrm>
-            <a:off x="4447032" y="4169664"/>
-            <a:ext cx="685800" cy="384048"/>
+          <p:cNvPr id="46" name="Shape 44"/>
+          <p:cNvSpPr/>
+          <p:nvPr/>
+        </p:nvSpPr>
+        <p:spPr>
+          <a:xfrm>
+            <a:off x="6668262" y="4169664"/>
+            <a:ext cx="685800" cy="475488"/>
           </a:xfrm>
           <a:prstGeom prst="rect">
             <a:avLst>
-              <a:gd name="adj" fmla="val 9524"/>
+              <a:gd name="adj" fmla="val 7692"/>
             </a:avLst>
           </a:prstGeom>
           <a:solidFill>
@@ -22615,14 +22537,14 @@
       </p:sp>
       <p:sp>
         <p:nvSpPr>
-          <p:cNvPr id="46" name="Text 44"/>
-          <p:cNvSpPr/>
-          <p:nvPr/>
-        </p:nvSpPr>
-        <p:spPr>
-          <a:xfrm>
-            <a:off x="4447032" y="4169664"/>
-            <a:ext cx="685800" cy="384048"/>
+          <p:cNvPr id="47" name="Text 45"/>
+          <p:cNvSpPr/>
+          <p:nvPr/>
+        </p:nvSpPr>
+        <p:spPr>
+          <a:xfrm>
+            <a:off x="6668262" y="4169664"/>
+            <a:ext cx="685800" cy="475488"/>
           </a:xfrm>
           <a:prstGeom prst="rect">
             <a:avLst/>
@@ -22646,7 +22568,7 @@
                 <a:ea typeface="Trebuchet MS" pitchFamily="34" charset="-122"/>
                 <a:cs typeface="Trebuchet MS" pitchFamily="34" charset="-120"/>
               </a:rPr>
-              <a:t>a</a:t>
+              <a:t>i</a:t>
             </a:r>
             <a:endParaRPr lang="en-US" sz="900" dirty="0"/>
           </a:p>
@@ -22654,18 +22576,18 @@
       </p:sp>
       <p:sp>
         <p:nvSpPr>
-          <p:cNvPr id="47" name="Shape 45"/>
-          <p:cNvSpPr/>
-          <p:nvPr/>
-        </p:nvSpPr>
-        <p:spPr>
-          <a:xfrm>
-            <a:off x="5254752" y="4169664"/>
-            <a:ext cx="685800" cy="384048"/>
+          <p:cNvPr id="48" name="Shape 46"/>
+          <p:cNvSpPr/>
+          <p:nvPr/>
+        </p:nvSpPr>
+        <p:spPr>
+          <a:xfrm>
+            <a:off x="7576947" y="4169664"/>
+            <a:ext cx="685800" cy="475488"/>
           </a:xfrm>
           <a:prstGeom prst="rect">
             <a:avLst>
-              <a:gd name="adj" fmla="val 9524"/>
+              <a:gd name="adj" fmla="val 7692"/>
             </a:avLst>
           </a:prstGeom>
           <a:solidFill>
@@ -22681,14 +22603,14 @@
       </p:sp>
       <p:sp>
         <p:nvSpPr>
-          <p:cNvPr id="48" name="Text 46"/>
-          <p:cNvSpPr/>
-          <p:nvPr/>
-        </p:nvSpPr>
-        <p:spPr>
-          <a:xfrm>
-            <a:off x="5254752" y="4169664"/>
-            <a:ext cx="685800" cy="384048"/>
+          <p:cNvPr id="49" name="Text 47"/>
+          <p:cNvSpPr/>
+          <p:nvPr/>
+        </p:nvSpPr>
+        <p:spPr>
+          <a:xfrm>
+            <a:off x="7576947" y="4169664"/>
+            <a:ext cx="685800" cy="475488"/>
           </a:xfrm>
           <a:prstGeom prst="rect">
             <a:avLst/>
@@ -22712,285 +22634,9 @@
                 <a:ea typeface="Trebuchet MS" pitchFamily="34" charset="-122"/>
                 <a:cs typeface="Trebuchet MS" pitchFamily="34" charset="-120"/>
               </a:rPr>
-              <a:t>c</a:t>
+              <a:t>th</a:t>
             </a:r>
             <a:endParaRPr lang="en-US" sz="900" dirty="0"/>
-          </a:p>
-        </p:txBody>
-      </p:sp>
-      <p:sp>
-        <p:nvSpPr>
-          <p:cNvPr id="49" name="Text 47"/>
-          <p:cNvSpPr/>
-          <p:nvPr/>
-        </p:nvSpPr>
-        <p:spPr>
-          <a:xfrm>
-            <a:off x="5254752" y="4572000"/>
-            <a:ext cx="685800" cy="219456"/>
-          </a:xfrm>
-          <a:prstGeom prst="rect">
-            <a:avLst/>
-          </a:prstGeom>
-          <a:noFill/>
-          <a:ln/>
-        </p:spPr>
-        <p:txBody>
-          <a:bodyPr wrap="square" lIns="0" tIns="0" rIns="0" bIns="0" rtlCol="0" anchor="t"/>
-          <a:lstStyle/>
-          <a:p>
-            <a:pPr algn="ctr" indent="0" marL="0">
-              <a:buNone/>
-            </a:pPr>
-            <a:r>
-              <a:rPr lang="en-US" sz="750" i="1" dirty="0">
-                <a:solidFill>
-                  <a:srgbClr val="94A3B8"/>
-                </a:solidFill>
-                <a:latin typeface="Calibri" pitchFamily="34" charset="0"/>
-                <a:ea typeface="Calibri" pitchFamily="34" charset="-122"/>
-                <a:cs typeface="Calibri" pitchFamily="34" charset="-120"/>
-              </a:rPr>
-              <a:t>/s/</a:t>
-            </a:r>
-            <a:endParaRPr lang="en-US" sz="750" dirty="0"/>
-          </a:p>
-        </p:txBody>
-      </p:sp>
-      <p:sp>
-        <p:nvSpPr>
-          <p:cNvPr id="50" name="Shape 48"/>
-          <p:cNvSpPr/>
-          <p:nvPr/>
-        </p:nvSpPr>
-        <p:spPr>
-          <a:xfrm>
-            <a:off x="6062472" y="4169664"/>
-            <a:ext cx="685800" cy="384048"/>
-          </a:xfrm>
-          <a:prstGeom prst="rect">
-            <a:avLst>
-              <a:gd name="adj" fmla="val 9524"/>
-            </a:avLst>
-          </a:prstGeom>
-          <a:solidFill>
-            <a:srgbClr val="FFFFFF"/>
-          </a:solidFill>
-          <a:ln w="12700">
-            <a:solidFill>
-              <a:srgbClr val="DB2777"/>
-            </a:solidFill>
-            <a:prstDash val="solid"/>
-          </a:ln>
-        </p:spPr>
-      </p:sp>
-      <p:sp>
-        <p:nvSpPr>
-          <p:cNvPr id="51" name="Text 49"/>
-          <p:cNvSpPr/>
-          <p:nvPr/>
-        </p:nvSpPr>
-        <p:spPr>
-          <a:xfrm>
-            <a:off x="6062472" y="4169664"/>
-            <a:ext cx="685800" cy="384048"/>
-          </a:xfrm>
-          <a:prstGeom prst="rect">
-            <a:avLst/>
-          </a:prstGeom>
-          <a:noFill/>
-          <a:ln/>
-        </p:spPr>
-        <p:txBody>
-          <a:bodyPr wrap="square" lIns="0" tIns="0" rIns="0" bIns="0" rtlCol="0" anchor="ctr"/>
-          <a:lstStyle/>
-          <a:p>
-            <a:pPr algn="ctr" indent="0" marL="0">
-              <a:buNone/>
-            </a:pPr>
-            <a:r>
-              <a:rPr lang="en-US" sz="900" b="1" dirty="0">
-                <a:solidFill>
-                  <a:srgbClr val="9D174D"/>
-                </a:solidFill>
-                <a:latin typeface="Trebuchet MS" pitchFamily="34" charset="0"/>
-                <a:ea typeface="Trebuchet MS" pitchFamily="34" charset="-122"/>
-                <a:cs typeface="Trebuchet MS" pitchFamily="34" charset="-120"/>
-              </a:rPr>
-              <a:t>i</a:t>
-            </a:r>
-            <a:endParaRPr lang="en-US" sz="900" dirty="0"/>
-          </a:p>
-        </p:txBody>
-      </p:sp>
-      <p:sp>
-        <p:nvSpPr>
-          <p:cNvPr id="52" name="Shape 50"/>
-          <p:cNvSpPr/>
-          <p:nvPr/>
-        </p:nvSpPr>
-        <p:spPr>
-          <a:xfrm>
-            <a:off x="6870192" y="4169664"/>
-            <a:ext cx="685800" cy="384048"/>
-          </a:xfrm>
-          <a:prstGeom prst="rect">
-            <a:avLst>
-              <a:gd name="adj" fmla="val 9524"/>
-            </a:avLst>
-          </a:prstGeom>
-          <a:solidFill>
-            <a:srgbClr val="FFFFFF"/>
-          </a:solidFill>
-          <a:ln w="12700">
-            <a:solidFill>
-              <a:srgbClr val="DB2777"/>
-            </a:solidFill>
-            <a:prstDash val="solid"/>
-          </a:ln>
-        </p:spPr>
-      </p:sp>
-      <p:sp>
-        <p:nvSpPr>
-          <p:cNvPr id="53" name="Text 51"/>
-          <p:cNvSpPr/>
-          <p:nvPr/>
-        </p:nvSpPr>
-        <p:spPr>
-          <a:xfrm>
-            <a:off x="6870192" y="4169664"/>
-            <a:ext cx="685800" cy="384048"/>
-          </a:xfrm>
-          <a:prstGeom prst="rect">
-            <a:avLst/>
-          </a:prstGeom>
-          <a:noFill/>
-          <a:ln/>
-        </p:spPr>
-        <p:txBody>
-          <a:bodyPr wrap="square" lIns="0" tIns="0" rIns="0" bIns="0" rtlCol="0" anchor="ctr"/>
-          <a:lstStyle/>
-          <a:p>
-            <a:pPr algn="ctr" indent="0" marL="0">
-              <a:buNone/>
-            </a:pPr>
-            <a:r>
-              <a:rPr lang="en-US" sz="900" b="1" dirty="0">
-                <a:solidFill>
-                  <a:srgbClr val="9D174D"/>
-                </a:solidFill>
-                <a:latin typeface="Trebuchet MS" pitchFamily="34" charset="0"/>
-                <a:ea typeface="Trebuchet MS" pitchFamily="34" charset="-122"/>
-                <a:cs typeface="Trebuchet MS" pitchFamily="34" charset="-120"/>
-              </a:rPr>
-              <a:t>t</a:t>
-            </a:r>
-            <a:endParaRPr lang="en-US" sz="900" dirty="0"/>
-          </a:p>
-        </p:txBody>
-      </p:sp>
-      <p:sp>
-        <p:nvSpPr>
-          <p:cNvPr id="54" name="Shape 52"/>
-          <p:cNvSpPr/>
-          <p:nvPr/>
-        </p:nvSpPr>
-        <p:spPr>
-          <a:xfrm>
-            <a:off x="7677912" y="4169664"/>
-            <a:ext cx="685800" cy="384048"/>
-          </a:xfrm>
-          <a:prstGeom prst="rect">
-            <a:avLst>
-              <a:gd name="adj" fmla="val 9524"/>
-            </a:avLst>
-          </a:prstGeom>
-          <a:solidFill>
-            <a:srgbClr val="FFFFFF"/>
-          </a:solidFill>
-          <a:ln w="12700">
-            <a:solidFill>
-              <a:srgbClr val="DB2777"/>
-            </a:solidFill>
-            <a:prstDash val="solid"/>
-          </a:ln>
-        </p:spPr>
-      </p:sp>
-      <p:sp>
-        <p:nvSpPr>
-          <p:cNvPr id="55" name="Text 53"/>
-          <p:cNvSpPr/>
-          <p:nvPr/>
-        </p:nvSpPr>
-        <p:spPr>
-          <a:xfrm>
-            <a:off x="7677912" y="4169664"/>
-            <a:ext cx="685800" cy="384048"/>
-          </a:xfrm>
-          <a:prstGeom prst="rect">
-            <a:avLst/>
-          </a:prstGeom>
-          <a:noFill/>
-          <a:ln/>
-        </p:spPr>
-        <p:txBody>
-          <a:bodyPr wrap="square" lIns="0" tIns="0" rIns="0" bIns="0" rtlCol="0" anchor="ctr"/>
-          <a:lstStyle/>
-          <a:p>
-            <a:pPr algn="ctr" indent="0" marL="0">
-              <a:buNone/>
-            </a:pPr>
-            <a:r>
-              <a:rPr lang="en-US" sz="900" b="1" dirty="0">
-                <a:solidFill>
-                  <a:srgbClr val="9D174D"/>
-                </a:solidFill>
-                <a:latin typeface="Trebuchet MS" pitchFamily="34" charset="0"/>
-                <a:ea typeface="Trebuchet MS" pitchFamily="34" charset="-122"/>
-                <a:cs typeface="Trebuchet MS" pitchFamily="34" charset="-120"/>
-              </a:rPr>
-              <a:t>y</a:t>
-            </a:r>
-            <a:endParaRPr lang="en-US" sz="900" dirty="0"/>
-          </a:p>
-        </p:txBody>
-      </p:sp>
-      <p:sp>
-        <p:nvSpPr>
-          <p:cNvPr id="56" name="Text 54"/>
-          <p:cNvSpPr/>
-          <p:nvPr/>
-        </p:nvSpPr>
-        <p:spPr>
-          <a:xfrm>
-            <a:off x="7677912" y="4572000"/>
-            <a:ext cx="685800" cy="219456"/>
-          </a:xfrm>
-          <a:prstGeom prst="rect">
-            <a:avLst/>
-          </a:prstGeom>
-          <a:noFill/>
-          <a:ln/>
-        </p:spPr>
-        <p:txBody>
-          <a:bodyPr wrap="square" lIns="0" tIns="0" rIns="0" bIns="0" rtlCol="0" anchor="t"/>
-          <a:lstStyle/>
-          <a:p>
-            <a:pPr algn="ctr" indent="0" marL="0">
-              <a:buNone/>
-            </a:pPr>
-            <a:r>
-              <a:rPr lang="en-US" sz="750" i="1" dirty="0">
-                <a:solidFill>
-                  <a:srgbClr val="94A3B8"/>
-                </a:solidFill>
-                <a:latin typeface="Calibri" pitchFamily="34" charset="0"/>
-                <a:ea typeface="Calibri" pitchFamily="34" charset="-122"/>
-                <a:cs typeface="Calibri" pitchFamily="34" charset="-120"/>
-              </a:rPr>
-              <a:t>/ee/</a:t>
-            </a:r>
-            <a:endParaRPr lang="en-US" sz="750" dirty="0"/>
           </a:p>
         </p:txBody>
       </p:sp>
@@ -23419,7 +23065,7 @@
                 <a:ea typeface="Trebuchet MS" pitchFamily="34" charset="-122"/>
                 <a:cs typeface="Trebuchet MS" pitchFamily="34" charset="-120"/>
               </a:rPr>
-              <a:t>megastar</a:t>
+              <a:t>megabytes</a:t>
             </a:r>
             <a:endParaRPr lang="en-US" sz="2800" dirty="0"/>
           </a:p>
@@ -24246,7 +23892,7 @@
                 <a:ea typeface="Trebuchet MS" pitchFamily="34" charset="-122"/>
                 <a:cs typeface="Trebuchet MS" pitchFamily="34" charset="-120"/>
               </a:rPr>
-              <a:t>megastar</a:t>
+              <a:t>megabytes</a:t>
             </a:r>
             <a:endParaRPr lang="en-US" sz="2800" dirty="0"/>
           </a:p>
@@ -24326,7 +23972,7 @@
         </p:nvSpPr>
         <p:spPr>
           <a:xfrm>
-            <a:off x="2938272" y="2258568"/>
+            <a:off x="2221992" y="2258568"/>
             <a:ext cx="1828800" cy="292608"/>
           </a:xfrm>
           <a:prstGeom prst="rect">
@@ -24360,7 +24006,7 @@
         </p:nvSpPr>
         <p:spPr>
           <a:xfrm>
-            <a:off x="2938272" y="2258568"/>
+            <a:off x="2221992" y="2258568"/>
             <a:ext cx="1828800" cy="292608"/>
           </a:xfrm>
           <a:prstGeom prst="rect">
@@ -24399,7 +24045,7 @@
         </p:nvSpPr>
         <p:spPr>
           <a:xfrm>
-            <a:off x="2938272" y="2569464"/>
+            <a:off x="2221992" y="2569464"/>
             <a:ext cx="1828800" cy="201168"/>
           </a:xfrm>
           <a:prstGeom prst="rect">
@@ -24438,7 +24084,7 @@
         </p:nvSpPr>
         <p:spPr>
           <a:xfrm>
-            <a:off x="5803392" y="2258568"/>
+            <a:off x="4370832" y="2258568"/>
             <a:ext cx="1828800" cy="292608"/>
           </a:xfrm>
           <a:prstGeom prst="rect">
@@ -24472,7 +24118,7 @@
         </p:nvSpPr>
         <p:spPr>
           <a:xfrm>
-            <a:off x="5803392" y="2258568"/>
+            <a:off x="4370832" y="2258568"/>
             <a:ext cx="1828800" cy="292608"/>
           </a:xfrm>
           <a:prstGeom prst="rect">
@@ -24497,7 +24143,7 @@
                 <a:ea typeface="Trebuchet MS" pitchFamily="34" charset="-122"/>
                 <a:cs typeface="Trebuchet MS" pitchFamily="34" charset="-120"/>
               </a:rPr>
-              <a:t>star</a:t>
+              <a:t>byte</a:t>
             </a:r>
             <a:endParaRPr lang="en-US" sz="1300" dirty="0"/>
           </a:p>
@@ -24511,7 +24157,7 @@
         </p:nvSpPr>
         <p:spPr>
           <a:xfrm>
-            <a:off x="5803392" y="2569464"/>
+            <a:off x="4370832" y="2569464"/>
             <a:ext cx="1828800" cy="201168"/>
           </a:xfrm>
           <a:prstGeom prst="rect">
@@ -24536,7 +24182,7 @@
                 <a:ea typeface="Calibri" pitchFamily="34" charset="-122"/>
                 <a:cs typeface="Calibri" pitchFamily="34" charset="-120"/>
               </a:rPr>
-              <a:t>a famous person</a:t>
+              <a:t>unit of computer data</a:t>
             </a:r>
             <a:endParaRPr lang="en-US" sz="850" dirty="0"/>
           </a:p>
@@ -24545,6 +24191,118 @@
       <p:sp>
         <p:nvSpPr>
           <p:cNvPr id="22" name="Shape 20"/>
+          <p:cNvSpPr/>
+          <p:nvPr/>
+        </p:nvSpPr>
+        <p:spPr>
+          <a:xfrm>
+            <a:off x="6519672" y="2258568"/>
+            <a:ext cx="1828800" cy="292608"/>
+          </a:xfrm>
+          <a:prstGeom prst="rect">
+            <a:avLst>
+              <a:gd name="adj" fmla="val 25000"/>
+            </a:avLst>
+          </a:prstGeom>
+          <a:solidFill>
+            <a:srgbClr val="FCE7F3"/>
+          </a:solidFill>
+          <a:ln w="19050">
+            <a:solidFill>
+              <a:srgbClr val="DB2777"/>
+            </a:solidFill>
+            <a:prstDash val="solid"/>
+          </a:ln>
+          <a:effectLst>
+            <a:outerShdw sx="100000" sy="100000" kx="0" ky="0" algn="bl" rotWithShape="0" blurRad="101600" dist="38100" dir="8100000">
+              <a:srgbClr val="000000">
+                <a:alpha val="12000"/>
+              </a:srgbClr>
+            </a:outerShdw>
+          </a:effectLst>
+        </p:spPr>
+      </p:sp>
+      <p:sp>
+        <p:nvSpPr>
+          <p:cNvPr id="23" name="Text 21"/>
+          <p:cNvSpPr/>
+          <p:nvPr/>
+        </p:nvSpPr>
+        <p:spPr>
+          <a:xfrm>
+            <a:off x="6519672" y="2258568"/>
+            <a:ext cx="1828800" cy="292608"/>
+          </a:xfrm>
+          <a:prstGeom prst="rect">
+            <a:avLst/>
+          </a:prstGeom>
+          <a:noFill/>
+          <a:ln/>
+        </p:spPr>
+        <p:txBody>
+          <a:bodyPr wrap="square" lIns="0" tIns="0" rIns="0" bIns="0" rtlCol="0" anchor="ctr"/>
+          <a:lstStyle/>
+          <a:p>
+            <a:pPr algn="ctr" indent="0" marL="0">
+              <a:buNone/>
+            </a:pPr>
+            <a:r>
+              <a:rPr lang="en-US" sz="1300" b="1" dirty="0">
+                <a:solidFill>
+                  <a:srgbClr val="9D174D"/>
+                </a:solidFill>
+                <a:latin typeface="Trebuchet MS" pitchFamily="34" charset="0"/>
+                <a:ea typeface="Trebuchet MS" pitchFamily="34" charset="-122"/>
+                <a:cs typeface="Trebuchet MS" pitchFamily="34" charset="-120"/>
+              </a:rPr>
+              <a:t>s</a:t>
+            </a:r>
+            <a:endParaRPr lang="en-US" sz="1300" dirty="0"/>
+          </a:p>
+        </p:txBody>
+      </p:sp>
+      <p:sp>
+        <p:nvSpPr>
+          <p:cNvPr id="24" name="Text 22"/>
+          <p:cNvSpPr/>
+          <p:nvPr/>
+        </p:nvSpPr>
+        <p:spPr>
+          <a:xfrm>
+            <a:off x="6519672" y="2569464"/>
+            <a:ext cx="1828800" cy="201168"/>
+          </a:xfrm>
+          <a:prstGeom prst="rect">
+            <a:avLst/>
+          </a:prstGeom>
+          <a:noFill/>
+          <a:ln/>
+        </p:spPr>
+        <p:txBody>
+          <a:bodyPr wrap="square" lIns="0" tIns="0" rIns="0" bIns="0" rtlCol="0" anchor="t"/>
+          <a:lstStyle/>
+          <a:p>
+            <a:pPr algn="ctr" indent="0" marL="0">
+              <a:buNone/>
+            </a:pPr>
+            <a:r>
+              <a:rPr lang="en-US" sz="850" dirty="0">
+                <a:solidFill>
+                  <a:srgbClr val="475569"/>
+                </a:solidFill>
+                <a:latin typeface="Calibri" pitchFamily="34" charset="0"/>
+                <a:ea typeface="Calibri" pitchFamily="34" charset="-122"/>
+                <a:cs typeface="Calibri" pitchFamily="34" charset="-120"/>
+              </a:rPr>
+              <a:t>more than one</a:t>
+            </a:r>
+            <a:endParaRPr lang="en-US" sz="850" dirty="0"/>
+          </a:p>
+        </p:txBody>
+      </p:sp>
+      <p:sp>
+        <p:nvSpPr>
+          <p:cNvPr id="25" name="Shape 23"/>
           <p:cNvSpPr/>
           <p:nvPr/>
         </p:nvSpPr>
@@ -24571,7 +24329,7 @@
       </p:sp>
       <p:sp>
         <p:nvSpPr>
-          <p:cNvPr id="23" name="Text 21"/>
+          <p:cNvPr id="26" name="Text 24"/>
           <p:cNvSpPr/>
           <p:nvPr/>
         </p:nvSpPr>
@@ -24610,7 +24368,7 @@
       </p:sp>
       <p:sp>
         <p:nvSpPr>
-          <p:cNvPr id="24" name="Shape 22"/>
+          <p:cNvPr id="27" name="Shape 25"/>
           <p:cNvSpPr/>
           <p:nvPr/>
         </p:nvSpPr>
@@ -24637,7 +24395,7 @@
       </p:sp>
       <p:sp>
         <p:nvSpPr>
-          <p:cNvPr id="25" name="Text 23"/>
+          <p:cNvPr id="28" name="Text 26"/>
           <p:cNvSpPr/>
           <p:nvPr/>
         </p:nvSpPr>
@@ -24676,7 +24434,7 @@
       </p:sp>
       <p:sp>
         <p:nvSpPr>
-          <p:cNvPr id="26" name="Shape 24"/>
+          <p:cNvPr id="29" name="Shape 27"/>
           <p:cNvSpPr/>
           <p:nvPr/>
         </p:nvSpPr>
@@ -24703,7 +24461,7 @@
       </p:sp>
       <p:sp>
         <p:nvSpPr>
-          <p:cNvPr id="27" name="Text 25"/>
+          <p:cNvPr id="30" name="Text 28"/>
           <p:cNvSpPr/>
           <p:nvPr/>
         </p:nvSpPr>
@@ -24742,7 +24500,7 @@
       </p:sp>
       <p:sp>
         <p:nvSpPr>
-          <p:cNvPr id="28" name="Shape 26"/>
+          <p:cNvPr id="31" name="Shape 29"/>
           <p:cNvSpPr/>
           <p:nvPr/>
         </p:nvSpPr>
@@ -24769,7 +24527,7 @@
       </p:sp>
       <p:sp>
         <p:nvSpPr>
-          <p:cNvPr id="29" name="Text 27"/>
+          <p:cNvPr id="32" name="Text 30"/>
           <p:cNvSpPr/>
           <p:nvPr/>
         </p:nvSpPr>
@@ -25950,7 +25708,7 @@
                 <a:ea typeface="Trebuchet MS" pitchFamily="34" charset="-122"/>
                 <a:cs typeface="Trebuchet MS" pitchFamily="34" charset="-120"/>
               </a:rPr>
-              <a:t>megastar</a:t>
+              <a:t>megabytes</a:t>
             </a:r>
             <a:endParaRPr lang="en-US" sz="2800" dirty="0"/>
           </a:p>
@@ -26030,7 +25788,7 @@
         </p:nvSpPr>
         <p:spPr>
           <a:xfrm>
-            <a:off x="2938272" y="2258568"/>
+            <a:off x="2221992" y="2258568"/>
             <a:ext cx="1828800" cy="292608"/>
           </a:xfrm>
           <a:prstGeom prst="rect">
@@ -26064,7 +25822,7 @@
         </p:nvSpPr>
         <p:spPr>
           <a:xfrm>
-            <a:off x="2938272" y="2258568"/>
+            <a:off x="2221992" y="2258568"/>
             <a:ext cx="1828800" cy="292608"/>
           </a:xfrm>
           <a:prstGeom prst="rect">
@@ -26103,7 +25861,7 @@
         </p:nvSpPr>
         <p:spPr>
           <a:xfrm>
-            <a:off x="2938272" y="2569464"/>
+            <a:off x="2221992" y="2569464"/>
             <a:ext cx="1828800" cy="201168"/>
           </a:xfrm>
           <a:prstGeom prst="rect">
@@ -26142,7 +25900,7 @@
         </p:nvSpPr>
         <p:spPr>
           <a:xfrm>
-            <a:off x="5803392" y="2258568"/>
+            <a:off x="4370832" y="2258568"/>
             <a:ext cx="1828800" cy="292608"/>
           </a:xfrm>
           <a:prstGeom prst="rect">
@@ -26176,7 +25934,7 @@
         </p:nvSpPr>
         <p:spPr>
           <a:xfrm>
-            <a:off x="5803392" y="2258568"/>
+            <a:off x="4370832" y="2258568"/>
             <a:ext cx="1828800" cy="292608"/>
           </a:xfrm>
           <a:prstGeom prst="rect">
@@ -26201,7 +25959,7 @@
                 <a:ea typeface="Trebuchet MS" pitchFamily="34" charset="-122"/>
                 <a:cs typeface="Trebuchet MS" pitchFamily="34" charset="-120"/>
               </a:rPr>
-              <a:t>star</a:t>
+              <a:t>byte</a:t>
             </a:r>
             <a:endParaRPr lang="en-US" sz="1300" dirty="0"/>
           </a:p>
@@ -26215,7 +25973,7 @@
         </p:nvSpPr>
         <p:spPr>
           <a:xfrm>
-            <a:off x="5803392" y="2569464"/>
+            <a:off x="4370832" y="2569464"/>
             <a:ext cx="1828800" cy="201168"/>
           </a:xfrm>
           <a:prstGeom prst="rect">
@@ -26240,7 +25998,7 @@
                 <a:ea typeface="Calibri" pitchFamily="34" charset="-122"/>
                 <a:cs typeface="Calibri" pitchFamily="34" charset="-120"/>
               </a:rPr>
-              <a:t>a famous person</a:t>
+              <a:t>unit of computer data</a:t>
             </a:r>
             <a:endParaRPr lang="en-US" sz="850" dirty="0"/>
           </a:p>
@@ -26249,6 +26007,118 @@
       <p:sp>
         <p:nvSpPr>
           <p:cNvPr id="22" name="Shape 20"/>
+          <p:cNvSpPr/>
+          <p:nvPr/>
+        </p:nvSpPr>
+        <p:spPr>
+          <a:xfrm>
+            <a:off x="6519672" y="2258568"/>
+            <a:ext cx="1828800" cy="292608"/>
+          </a:xfrm>
+          <a:prstGeom prst="rect">
+            <a:avLst>
+              <a:gd name="adj" fmla="val 25000"/>
+            </a:avLst>
+          </a:prstGeom>
+          <a:solidFill>
+            <a:srgbClr val="FCE7F3"/>
+          </a:solidFill>
+          <a:ln w="19050">
+            <a:solidFill>
+              <a:srgbClr val="DB2777"/>
+            </a:solidFill>
+            <a:prstDash val="solid"/>
+          </a:ln>
+          <a:effectLst>
+            <a:outerShdw sx="100000" sy="100000" kx="0" ky="0" algn="bl" rotWithShape="0" blurRad="101600" dist="38100" dir="8100000">
+              <a:srgbClr val="000000">
+                <a:alpha val="12000"/>
+              </a:srgbClr>
+            </a:outerShdw>
+          </a:effectLst>
+        </p:spPr>
+      </p:sp>
+      <p:sp>
+        <p:nvSpPr>
+          <p:cNvPr id="23" name="Text 21"/>
+          <p:cNvSpPr/>
+          <p:nvPr/>
+        </p:nvSpPr>
+        <p:spPr>
+          <a:xfrm>
+            <a:off x="6519672" y="2258568"/>
+            <a:ext cx="1828800" cy="292608"/>
+          </a:xfrm>
+          <a:prstGeom prst="rect">
+            <a:avLst/>
+          </a:prstGeom>
+          <a:noFill/>
+          <a:ln/>
+        </p:spPr>
+        <p:txBody>
+          <a:bodyPr wrap="square" lIns="0" tIns="0" rIns="0" bIns="0" rtlCol="0" anchor="ctr"/>
+          <a:lstStyle/>
+          <a:p>
+            <a:pPr algn="ctr" indent="0" marL="0">
+              <a:buNone/>
+            </a:pPr>
+            <a:r>
+              <a:rPr lang="en-US" sz="1300" b="1" dirty="0">
+                <a:solidFill>
+                  <a:srgbClr val="9D174D"/>
+                </a:solidFill>
+                <a:latin typeface="Trebuchet MS" pitchFamily="34" charset="0"/>
+                <a:ea typeface="Trebuchet MS" pitchFamily="34" charset="-122"/>
+                <a:cs typeface="Trebuchet MS" pitchFamily="34" charset="-120"/>
+              </a:rPr>
+              <a:t>s</a:t>
+            </a:r>
+            <a:endParaRPr lang="en-US" sz="1300" dirty="0"/>
+          </a:p>
+        </p:txBody>
+      </p:sp>
+      <p:sp>
+        <p:nvSpPr>
+          <p:cNvPr id="24" name="Text 22"/>
+          <p:cNvSpPr/>
+          <p:nvPr/>
+        </p:nvSpPr>
+        <p:spPr>
+          <a:xfrm>
+            <a:off x="6519672" y="2569464"/>
+            <a:ext cx="1828800" cy="201168"/>
+          </a:xfrm>
+          <a:prstGeom prst="rect">
+            <a:avLst/>
+          </a:prstGeom>
+          <a:noFill/>
+          <a:ln/>
+        </p:spPr>
+        <p:txBody>
+          <a:bodyPr wrap="square" lIns="0" tIns="0" rIns="0" bIns="0" rtlCol="0" anchor="t"/>
+          <a:lstStyle/>
+          <a:p>
+            <a:pPr algn="ctr" indent="0" marL="0">
+              <a:buNone/>
+            </a:pPr>
+            <a:r>
+              <a:rPr lang="en-US" sz="850" dirty="0">
+                <a:solidFill>
+                  <a:srgbClr val="475569"/>
+                </a:solidFill>
+                <a:latin typeface="Calibri" pitchFamily="34" charset="0"/>
+                <a:ea typeface="Calibri" pitchFamily="34" charset="-122"/>
+                <a:cs typeface="Calibri" pitchFamily="34" charset="-120"/>
+              </a:rPr>
+              <a:t>more than one</a:t>
+            </a:r>
+            <a:endParaRPr lang="en-US" sz="850" dirty="0"/>
+          </a:p>
+        </p:txBody>
+      </p:sp>
+      <p:sp>
+        <p:nvSpPr>
+          <p:cNvPr id="25" name="Shape 23"/>
           <p:cNvSpPr/>
           <p:nvPr/>
         </p:nvSpPr>
@@ -26275,7 +26145,7 @@
       </p:sp>
       <p:sp>
         <p:nvSpPr>
-          <p:cNvPr id="23" name="Text 21"/>
+          <p:cNvPr id="26" name="Text 24"/>
           <p:cNvSpPr/>
           <p:nvPr/>
         </p:nvSpPr>
@@ -26314,7 +26184,7 @@
       </p:sp>
       <p:sp>
         <p:nvSpPr>
-          <p:cNvPr id="24" name="Shape 22"/>
+          <p:cNvPr id="27" name="Shape 25"/>
           <p:cNvSpPr/>
           <p:nvPr/>
         </p:nvSpPr>
@@ -26341,7 +26211,7 @@
       </p:sp>
       <p:sp>
         <p:nvSpPr>
-          <p:cNvPr id="25" name="Shape 23"/>
+          <p:cNvPr id="28" name="Shape 26"/>
           <p:cNvSpPr/>
           <p:nvPr/>
         </p:nvSpPr>
@@ -26368,7 +26238,7 @@
       </p:sp>
       <p:sp>
         <p:nvSpPr>
-          <p:cNvPr id="26" name="Text 24"/>
+          <p:cNvPr id="29" name="Text 27"/>
           <p:cNvSpPr/>
           <p:nvPr/>
         </p:nvSpPr>
@@ -26399,7 +26269,7 @@
                 <a:ea typeface="Trebuchet MS" pitchFamily="34" charset="-122"/>
                 <a:cs typeface="Trebuchet MS" pitchFamily="34" charset="-120"/>
               </a:rPr>
-              <a:t>meg</a:t>
+              <a:t>me</a:t>
             </a:r>
             <a:endParaRPr lang="en-US" sz="1400" dirty="0"/>
           </a:p>
@@ -26407,7 +26277,7 @@
       </p:sp>
       <p:sp>
         <p:nvSpPr>
-          <p:cNvPr id="27" name="Text 25"/>
+          <p:cNvPr id="30" name="Text 28"/>
           <p:cNvSpPr/>
           <p:nvPr/>
         </p:nvSpPr>
@@ -26446,7 +26316,7 @@
       </p:sp>
       <p:sp>
         <p:nvSpPr>
-          <p:cNvPr id="28" name="Shape 26"/>
+          <p:cNvPr id="31" name="Shape 29"/>
           <p:cNvSpPr/>
           <p:nvPr/>
         </p:nvSpPr>
@@ -26473,7 +26343,7 @@
       </p:sp>
       <p:sp>
         <p:nvSpPr>
-          <p:cNvPr id="29" name="Text 27"/>
+          <p:cNvPr id="32" name="Text 30"/>
           <p:cNvSpPr/>
           <p:nvPr/>
         </p:nvSpPr>
@@ -26504,7 +26374,7 @@
                 <a:ea typeface="Trebuchet MS" pitchFamily="34" charset="-122"/>
                 <a:cs typeface="Trebuchet MS" pitchFamily="34" charset="-120"/>
               </a:rPr>
-              <a:t>a</a:t>
+              <a:t>ga</a:t>
             </a:r>
             <a:endParaRPr lang="en-US" sz="1400" dirty="0"/>
           </a:p>
@@ -26512,7 +26382,7 @@
       </p:sp>
       <p:sp>
         <p:nvSpPr>
-          <p:cNvPr id="30" name="Text 28"/>
+          <p:cNvPr id="33" name="Text 31"/>
           <p:cNvSpPr/>
           <p:nvPr/>
         </p:nvSpPr>
@@ -26551,7 +26421,7 @@
       </p:sp>
       <p:sp>
         <p:nvSpPr>
-          <p:cNvPr id="31" name="Shape 29"/>
+          <p:cNvPr id="34" name="Shape 32"/>
           <p:cNvSpPr/>
           <p:nvPr/>
         </p:nvSpPr>
@@ -26578,7 +26448,7 @@
       </p:sp>
       <p:sp>
         <p:nvSpPr>
-          <p:cNvPr id="32" name="Text 30"/>
+          <p:cNvPr id="35" name="Text 33"/>
           <p:cNvSpPr/>
           <p:nvPr/>
         </p:nvSpPr>
@@ -26609,7 +26479,7 @@
                 <a:ea typeface="Trebuchet MS" pitchFamily="34" charset="-122"/>
                 <a:cs typeface="Trebuchet MS" pitchFamily="34" charset="-120"/>
               </a:rPr>
-              <a:t>star</a:t>
+              <a:t>bytes</a:t>
             </a:r>
             <a:endParaRPr lang="en-US" sz="1400" dirty="0"/>
           </a:p>
@@ -26617,7 +26487,7 @@
       </p:sp>
       <p:sp>
         <p:nvSpPr>
-          <p:cNvPr id="33" name="Shape 31"/>
+          <p:cNvPr id="36" name="Shape 34"/>
           <p:cNvSpPr/>
           <p:nvPr/>
         </p:nvSpPr>
@@ -26644,7 +26514,7 @@
       </p:sp>
       <p:sp>
         <p:nvSpPr>
-          <p:cNvPr id="34" name="Text 32"/>
+          <p:cNvPr id="37" name="Text 35"/>
           <p:cNvSpPr/>
           <p:nvPr/>
         </p:nvSpPr>
@@ -26683,7 +26553,7 @@
       </p:sp>
       <p:sp>
         <p:nvSpPr>
-          <p:cNvPr id="35" name="Shape 33"/>
+          <p:cNvPr id="38" name="Shape 36"/>
           <p:cNvSpPr/>
           <p:nvPr/>
         </p:nvSpPr>
@@ -26710,7 +26580,7 @@
       </p:sp>
       <p:sp>
         <p:nvSpPr>
-          <p:cNvPr id="36" name="Text 34"/>
+          <p:cNvPr id="39" name="Text 37"/>
           <p:cNvSpPr/>
           <p:nvPr/>
         </p:nvSpPr>
@@ -27172,7 +27042,7 @@
                 <a:ea typeface="Trebuchet MS" pitchFamily="34" charset="-122"/>
                 <a:cs typeface="Trebuchet MS" pitchFamily="34" charset="-120"/>
               </a:rPr>
-              <a:t>megastar</a:t>
+              <a:t>megabytes</a:t>
             </a:r>
             <a:endParaRPr lang="en-US" sz="2800" dirty="0"/>
           </a:p>
@@ -27252,7 +27122,7 @@
         </p:nvSpPr>
         <p:spPr>
           <a:xfrm>
-            <a:off x="2938272" y="2258568"/>
+            <a:off x="2221992" y="2258568"/>
             <a:ext cx="1828800" cy="292608"/>
           </a:xfrm>
           <a:prstGeom prst="rect">
@@ -27286,7 +27156,7 @@
         </p:nvSpPr>
         <p:spPr>
           <a:xfrm>
-            <a:off x="2938272" y="2258568"/>
+            <a:off x="2221992" y="2258568"/>
             <a:ext cx="1828800" cy="292608"/>
           </a:xfrm>
           <a:prstGeom prst="rect">
@@ -27325,7 +27195,7 @@
         </p:nvSpPr>
         <p:spPr>
           <a:xfrm>
-            <a:off x="2938272" y="2569464"/>
+            <a:off x="2221992" y="2569464"/>
             <a:ext cx="1828800" cy="201168"/>
           </a:xfrm>
           <a:prstGeom prst="rect">
@@ -27364,7 +27234,7 @@
         </p:nvSpPr>
         <p:spPr>
           <a:xfrm>
-            <a:off x="5803392" y="2258568"/>
+            <a:off x="4370832" y="2258568"/>
             <a:ext cx="1828800" cy="292608"/>
           </a:xfrm>
           <a:prstGeom prst="rect">
@@ -27398,7 +27268,7 @@
         </p:nvSpPr>
         <p:spPr>
           <a:xfrm>
-            <a:off x="5803392" y="2258568"/>
+            <a:off x="4370832" y="2258568"/>
             <a:ext cx="1828800" cy="292608"/>
           </a:xfrm>
           <a:prstGeom prst="rect">
@@ -27423,7 +27293,7 @@
                 <a:ea typeface="Trebuchet MS" pitchFamily="34" charset="-122"/>
                 <a:cs typeface="Trebuchet MS" pitchFamily="34" charset="-120"/>
               </a:rPr>
-              <a:t>star</a:t>
+              <a:t>byte</a:t>
             </a:r>
             <a:endParaRPr lang="en-US" sz="1300" dirty="0"/>
           </a:p>
@@ -27437,7 +27307,7 @@
         </p:nvSpPr>
         <p:spPr>
           <a:xfrm>
-            <a:off x="5803392" y="2569464"/>
+            <a:off x="4370832" y="2569464"/>
             <a:ext cx="1828800" cy="201168"/>
           </a:xfrm>
           <a:prstGeom prst="rect">
@@ -27462,7 +27332,7 @@
                 <a:ea typeface="Calibri" pitchFamily="34" charset="-122"/>
                 <a:cs typeface="Calibri" pitchFamily="34" charset="-120"/>
               </a:rPr>
-              <a:t>a famous person</a:t>
+              <a:t>unit of computer data</a:t>
             </a:r>
             <a:endParaRPr lang="en-US" sz="850" dirty="0"/>
           </a:p>
@@ -27471,6 +27341,118 @@
       <p:sp>
         <p:nvSpPr>
           <p:cNvPr id="22" name="Shape 20"/>
+          <p:cNvSpPr/>
+          <p:nvPr/>
+        </p:nvSpPr>
+        <p:spPr>
+          <a:xfrm>
+            <a:off x="6519672" y="2258568"/>
+            <a:ext cx="1828800" cy="292608"/>
+          </a:xfrm>
+          <a:prstGeom prst="rect">
+            <a:avLst>
+              <a:gd name="adj" fmla="val 25000"/>
+            </a:avLst>
+          </a:prstGeom>
+          <a:solidFill>
+            <a:srgbClr val="FCE7F3"/>
+          </a:solidFill>
+          <a:ln w="19050">
+            <a:solidFill>
+              <a:srgbClr val="DB2777"/>
+            </a:solidFill>
+            <a:prstDash val="solid"/>
+          </a:ln>
+          <a:effectLst>
+            <a:outerShdw sx="100000" sy="100000" kx="0" ky="0" algn="bl" rotWithShape="0" blurRad="101600" dist="38100" dir="8100000">
+              <a:srgbClr val="000000">
+                <a:alpha val="12000"/>
+              </a:srgbClr>
+            </a:outerShdw>
+          </a:effectLst>
+        </p:spPr>
+      </p:sp>
+      <p:sp>
+        <p:nvSpPr>
+          <p:cNvPr id="23" name="Text 21"/>
+          <p:cNvSpPr/>
+          <p:nvPr/>
+        </p:nvSpPr>
+        <p:spPr>
+          <a:xfrm>
+            <a:off x="6519672" y="2258568"/>
+            <a:ext cx="1828800" cy="292608"/>
+          </a:xfrm>
+          <a:prstGeom prst="rect">
+            <a:avLst/>
+          </a:prstGeom>
+          <a:noFill/>
+          <a:ln/>
+        </p:spPr>
+        <p:txBody>
+          <a:bodyPr wrap="square" lIns="0" tIns="0" rIns="0" bIns="0" rtlCol="0" anchor="ctr"/>
+          <a:lstStyle/>
+          <a:p>
+            <a:pPr algn="ctr" indent="0" marL="0">
+              <a:buNone/>
+            </a:pPr>
+            <a:r>
+              <a:rPr lang="en-US" sz="1300" b="1" dirty="0">
+                <a:solidFill>
+                  <a:srgbClr val="9D174D"/>
+                </a:solidFill>
+                <a:latin typeface="Trebuchet MS" pitchFamily="34" charset="0"/>
+                <a:ea typeface="Trebuchet MS" pitchFamily="34" charset="-122"/>
+                <a:cs typeface="Trebuchet MS" pitchFamily="34" charset="-120"/>
+              </a:rPr>
+              <a:t>s</a:t>
+            </a:r>
+            <a:endParaRPr lang="en-US" sz="1300" dirty="0"/>
+          </a:p>
+        </p:txBody>
+      </p:sp>
+      <p:sp>
+        <p:nvSpPr>
+          <p:cNvPr id="24" name="Text 22"/>
+          <p:cNvSpPr/>
+          <p:nvPr/>
+        </p:nvSpPr>
+        <p:spPr>
+          <a:xfrm>
+            <a:off x="6519672" y="2569464"/>
+            <a:ext cx="1828800" cy="201168"/>
+          </a:xfrm>
+          <a:prstGeom prst="rect">
+            <a:avLst/>
+          </a:prstGeom>
+          <a:noFill/>
+          <a:ln/>
+        </p:spPr>
+        <p:txBody>
+          <a:bodyPr wrap="square" lIns="0" tIns="0" rIns="0" bIns="0" rtlCol="0" anchor="t"/>
+          <a:lstStyle/>
+          <a:p>
+            <a:pPr algn="ctr" indent="0" marL="0">
+              <a:buNone/>
+            </a:pPr>
+            <a:r>
+              <a:rPr lang="en-US" sz="850" dirty="0">
+                <a:solidFill>
+                  <a:srgbClr val="475569"/>
+                </a:solidFill>
+                <a:latin typeface="Calibri" pitchFamily="34" charset="0"/>
+                <a:ea typeface="Calibri" pitchFamily="34" charset="-122"/>
+                <a:cs typeface="Calibri" pitchFamily="34" charset="-120"/>
+              </a:rPr>
+              <a:t>more than one</a:t>
+            </a:r>
+            <a:endParaRPr lang="en-US" sz="850" dirty="0"/>
+          </a:p>
+        </p:txBody>
+      </p:sp>
+      <p:sp>
+        <p:nvSpPr>
+          <p:cNvPr id="25" name="Shape 23"/>
           <p:cNvSpPr/>
           <p:nvPr/>
         </p:nvSpPr>
@@ -27497,7 +27479,7 @@
       </p:sp>
       <p:sp>
         <p:nvSpPr>
-          <p:cNvPr id="23" name="Text 21"/>
+          <p:cNvPr id="26" name="Text 24"/>
           <p:cNvSpPr/>
           <p:nvPr/>
         </p:nvSpPr>
@@ -27536,7 +27518,7 @@
       </p:sp>
       <p:sp>
         <p:nvSpPr>
-          <p:cNvPr id="24" name="Shape 22"/>
+          <p:cNvPr id="27" name="Shape 25"/>
           <p:cNvSpPr/>
           <p:nvPr/>
         </p:nvSpPr>
@@ -27563,7 +27545,7 @@
       </p:sp>
       <p:sp>
         <p:nvSpPr>
-          <p:cNvPr id="25" name="Shape 23"/>
+          <p:cNvPr id="28" name="Shape 26"/>
           <p:cNvSpPr/>
           <p:nvPr/>
         </p:nvSpPr>
@@ -27590,7 +27572,7 @@
       </p:sp>
       <p:sp>
         <p:nvSpPr>
-          <p:cNvPr id="26" name="Text 24"/>
+          <p:cNvPr id="29" name="Text 27"/>
           <p:cNvSpPr/>
           <p:nvPr/>
         </p:nvSpPr>
@@ -27621,7 +27603,7 @@
                 <a:ea typeface="Trebuchet MS" pitchFamily="34" charset="-122"/>
                 <a:cs typeface="Trebuchet MS" pitchFamily="34" charset="-120"/>
               </a:rPr>
-              <a:t>meg</a:t>
+              <a:t>me</a:t>
             </a:r>
             <a:endParaRPr lang="en-US" sz="1400" dirty="0"/>
           </a:p>
@@ -27629,7 +27611,7 @@
       </p:sp>
       <p:sp>
         <p:nvSpPr>
-          <p:cNvPr id="27" name="Text 25"/>
+          <p:cNvPr id="30" name="Text 28"/>
           <p:cNvSpPr/>
           <p:nvPr/>
         </p:nvSpPr>
@@ -27668,7 +27650,7 @@
       </p:sp>
       <p:sp>
         <p:nvSpPr>
-          <p:cNvPr id="28" name="Shape 26"/>
+          <p:cNvPr id="31" name="Shape 29"/>
           <p:cNvSpPr/>
           <p:nvPr/>
         </p:nvSpPr>
@@ -27695,7 +27677,7 @@
       </p:sp>
       <p:sp>
         <p:nvSpPr>
-          <p:cNvPr id="29" name="Text 27"/>
+          <p:cNvPr id="32" name="Text 30"/>
           <p:cNvSpPr/>
           <p:nvPr/>
         </p:nvSpPr>
@@ -27726,7 +27708,7 @@
                 <a:ea typeface="Trebuchet MS" pitchFamily="34" charset="-122"/>
                 <a:cs typeface="Trebuchet MS" pitchFamily="34" charset="-120"/>
               </a:rPr>
-              <a:t>a</a:t>
+              <a:t>ga</a:t>
             </a:r>
             <a:endParaRPr lang="en-US" sz="1400" dirty="0"/>
           </a:p>
@@ -27734,7 +27716,7 @@
       </p:sp>
       <p:sp>
         <p:nvSpPr>
-          <p:cNvPr id="30" name="Text 28"/>
+          <p:cNvPr id="33" name="Text 31"/>
           <p:cNvSpPr/>
           <p:nvPr/>
         </p:nvSpPr>
@@ -27773,7 +27755,7 @@
       </p:sp>
       <p:sp>
         <p:nvSpPr>
-          <p:cNvPr id="31" name="Shape 29"/>
+          <p:cNvPr id="34" name="Shape 32"/>
           <p:cNvSpPr/>
           <p:nvPr/>
         </p:nvSpPr>
@@ -27800,7 +27782,7 @@
       </p:sp>
       <p:sp>
         <p:nvSpPr>
-          <p:cNvPr id="32" name="Text 30"/>
+          <p:cNvPr id="35" name="Text 33"/>
           <p:cNvSpPr/>
           <p:nvPr/>
         </p:nvSpPr>
@@ -27831,7 +27813,7 @@
                 <a:ea typeface="Trebuchet MS" pitchFamily="34" charset="-122"/>
                 <a:cs typeface="Trebuchet MS" pitchFamily="34" charset="-120"/>
               </a:rPr>
-              <a:t>star</a:t>
+              <a:t>bytes</a:t>
             </a:r>
             <a:endParaRPr lang="en-US" sz="1400" dirty="0"/>
           </a:p>
@@ -27839,7 +27821,7 @@
       </p:sp>
       <p:sp>
         <p:nvSpPr>
-          <p:cNvPr id="33" name="Shape 31"/>
+          <p:cNvPr id="36" name="Shape 34"/>
           <p:cNvSpPr/>
           <p:nvPr/>
         </p:nvSpPr>
@@ -27866,7 +27848,7 @@
       </p:sp>
       <p:sp>
         <p:nvSpPr>
-          <p:cNvPr id="34" name="Text 32"/>
+          <p:cNvPr id="37" name="Text 35"/>
           <p:cNvSpPr/>
           <p:nvPr/>
         </p:nvSpPr>
@@ -27905,7 +27887,7 @@
       </p:sp>
       <p:sp>
         <p:nvSpPr>
-          <p:cNvPr id="35" name="Shape 33"/>
+          <p:cNvPr id="38" name="Shape 36"/>
           <p:cNvSpPr/>
           <p:nvPr/>
         </p:nvSpPr>
@@ -27932,14 +27914,14 @@
       </p:sp>
       <p:sp>
         <p:nvSpPr>
-          <p:cNvPr id="36" name="Shape 34"/>
-          <p:cNvSpPr/>
-          <p:nvPr/>
-        </p:nvSpPr>
-        <p:spPr>
-          <a:xfrm>
-            <a:off x="2124837" y="4169664"/>
-            <a:ext cx="685800" cy="475488"/>
+          <p:cNvPr id="39" name="Shape 37"/>
+          <p:cNvSpPr/>
+          <p:nvPr/>
+        </p:nvSpPr>
+        <p:spPr>
+          <a:xfrm>
+            <a:off x="1951330" y="4169664"/>
+            <a:ext cx="676656" cy="475488"/>
           </a:xfrm>
           <a:prstGeom prst="rect">
             <a:avLst>
@@ -27959,14 +27941,14 @@
       </p:sp>
       <p:sp>
         <p:nvSpPr>
-          <p:cNvPr id="37" name="Text 35"/>
-          <p:cNvSpPr/>
-          <p:nvPr/>
-        </p:nvSpPr>
-        <p:spPr>
-          <a:xfrm>
-            <a:off x="2124837" y="4169664"/>
-            <a:ext cx="685800" cy="475488"/>
+          <p:cNvPr id="40" name="Text 38"/>
+          <p:cNvSpPr/>
+          <p:nvPr/>
+        </p:nvSpPr>
+        <p:spPr>
+          <a:xfrm>
+            <a:off x="1951330" y="4169664"/>
+            <a:ext cx="676656" cy="475488"/>
           </a:xfrm>
           <a:prstGeom prst="rect">
             <a:avLst/>
@@ -27998,14 +27980,14 @@
       </p:sp>
       <p:sp>
         <p:nvSpPr>
-          <p:cNvPr id="38" name="Shape 36"/>
-          <p:cNvSpPr/>
-          <p:nvPr/>
-        </p:nvSpPr>
-        <p:spPr>
-          <a:xfrm>
-            <a:off x="3033522" y="4169664"/>
-            <a:ext cx="685800" cy="475488"/>
+          <p:cNvPr id="41" name="Shape 39"/>
+          <p:cNvSpPr/>
+          <p:nvPr/>
+        </p:nvSpPr>
+        <p:spPr>
+          <a:xfrm>
+            <a:off x="2677363" y="4169664"/>
+            <a:ext cx="676656" cy="475488"/>
           </a:xfrm>
           <a:prstGeom prst="rect">
             <a:avLst>
@@ -28025,14 +28007,14 @@
       </p:sp>
       <p:sp>
         <p:nvSpPr>
-          <p:cNvPr id="39" name="Text 37"/>
-          <p:cNvSpPr/>
-          <p:nvPr/>
-        </p:nvSpPr>
-        <p:spPr>
-          <a:xfrm>
-            <a:off x="3033522" y="4169664"/>
-            <a:ext cx="685800" cy="475488"/>
+          <p:cNvPr id="42" name="Text 40"/>
+          <p:cNvSpPr/>
+          <p:nvPr/>
+        </p:nvSpPr>
+        <p:spPr>
+          <a:xfrm>
+            <a:off x="2677363" y="4169664"/>
+            <a:ext cx="676656" cy="475488"/>
           </a:xfrm>
           <a:prstGeom prst="rect">
             <a:avLst/>
@@ -28064,14 +28046,14 @@
       </p:sp>
       <p:sp>
         <p:nvSpPr>
-          <p:cNvPr id="40" name="Shape 38"/>
-          <p:cNvSpPr/>
-          <p:nvPr/>
-        </p:nvSpPr>
-        <p:spPr>
-          <a:xfrm>
-            <a:off x="3942207" y="4169664"/>
-            <a:ext cx="685800" cy="475488"/>
+          <p:cNvPr id="43" name="Shape 41"/>
+          <p:cNvSpPr/>
+          <p:nvPr/>
+        </p:nvSpPr>
+        <p:spPr>
+          <a:xfrm>
+            <a:off x="3403397" y="4169664"/>
+            <a:ext cx="676656" cy="475488"/>
           </a:xfrm>
           <a:prstGeom prst="rect">
             <a:avLst>
@@ -28091,14 +28073,14 @@
       </p:sp>
       <p:sp>
         <p:nvSpPr>
-          <p:cNvPr id="41" name="Text 39"/>
-          <p:cNvSpPr/>
-          <p:nvPr/>
-        </p:nvSpPr>
-        <p:spPr>
-          <a:xfrm>
-            <a:off x="3942207" y="4169664"/>
-            <a:ext cx="685800" cy="475488"/>
+          <p:cNvPr id="44" name="Text 42"/>
+          <p:cNvSpPr/>
+          <p:nvPr/>
+        </p:nvSpPr>
+        <p:spPr>
+          <a:xfrm>
+            <a:off x="3403397" y="4169664"/>
+            <a:ext cx="676656" cy="475488"/>
           </a:xfrm>
           <a:prstGeom prst="rect">
             <a:avLst/>
@@ -28130,14 +28112,14 @@
       </p:sp>
       <p:sp>
         <p:nvSpPr>
-          <p:cNvPr id="42" name="Shape 40"/>
-          <p:cNvSpPr/>
-          <p:nvPr/>
-        </p:nvSpPr>
-        <p:spPr>
-          <a:xfrm>
-            <a:off x="4850892" y="4169664"/>
-            <a:ext cx="685800" cy="475488"/>
+          <p:cNvPr id="45" name="Shape 43"/>
+          <p:cNvSpPr/>
+          <p:nvPr/>
+        </p:nvSpPr>
+        <p:spPr>
+          <a:xfrm>
+            <a:off x="4129430" y="4169664"/>
+            <a:ext cx="676656" cy="475488"/>
           </a:xfrm>
           <a:prstGeom prst="rect">
             <a:avLst>
@@ -28157,14 +28139,14 @@
       </p:sp>
       <p:sp>
         <p:nvSpPr>
-          <p:cNvPr id="43" name="Text 41"/>
-          <p:cNvSpPr/>
-          <p:nvPr/>
-        </p:nvSpPr>
-        <p:spPr>
-          <a:xfrm>
-            <a:off x="4850892" y="4169664"/>
-            <a:ext cx="685800" cy="475488"/>
+          <p:cNvPr id="46" name="Text 44"/>
+          <p:cNvSpPr/>
+          <p:nvPr/>
+        </p:nvSpPr>
+        <p:spPr>
+          <a:xfrm>
+            <a:off x="4129430" y="4169664"/>
+            <a:ext cx="676656" cy="475488"/>
           </a:xfrm>
           <a:prstGeom prst="rect">
             <a:avLst/>
@@ -28196,14 +28178,14 @@
       </p:sp>
       <p:sp>
         <p:nvSpPr>
-          <p:cNvPr id="44" name="Shape 42"/>
-          <p:cNvSpPr/>
-          <p:nvPr/>
-        </p:nvSpPr>
-        <p:spPr>
-          <a:xfrm>
-            <a:off x="5759577" y="4169664"/>
-            <a:ext cx="685800" cy="475488"/>
+          <p:cNvPr id="47" name="Shape 45"/>
+          <p:cNvSpPr/>
+          <p:nvPr/>
+        </p:nvSpPr>
+        <p:spPr>
+          <a:xfrm>
+            <a:off x="4855464" y="4169664"/>
+            <a:ext cx="676656" cy="475488"/>
           </a:xfrm>
           <a:prstGeom prst="rect">
             <a:avLst>
@@ -28223,14 +28205,14 @@
       </p:sp>
       <p:sp>
         <p:nvSpPr>
-          <p:cNvPr id="45" name="Text 43"/>
-          <p:cNvSpPr/>
-          <p:nvPr/>
-        </p:nvSpPr>
-        <p:spPr>
-          <a:xfrm>
-            <a:off x="5759577" y="4169664"/>
-            <a:ext cx="685800" cy="475488"/>
+          <p:cNvPr id="48" name="Text 46"/>
+          <p:cNvSpPr/>
+          <p:nvPr/>
+        </p:nvSpPr>
+        <p:spPr>
+          <a:xfrm>
+            <a:off x="4855464" y="4169664"/>
+            <a:ext cx="676656" cy="475488"/>
           </a:xfrm>
           <a:prstGeom prst="rect">
             <a:avLst/>
@@ -28254,7 +28236,7 @@
                 <a:ea typeface="Trebuchet MS" pitchFamily="34" charset="-122"/>
                 <a:cs typeface="Trebuchet MS" pitchFamily="34" charset="-120"/>
               </a:rPr>
-              <a:t>s</a:t>
+              <a:t>b</a:t>
             </a:r>
             <a:endParaRPr lang="en-US" sz="900" dirty="0"/>
           </a:p>
@@ -28262,14 +28244,14 @@
       </p:sp>
       <p:sp>
         <p:nvSpPr>
-          <p:cNvPr id="46" name="Shape 44"/>
-          <p:cNvSpPr/>
-          <p:nvPr/>
-        </p:nvSpPr>
-        <p:spPr>
-          <a:xfrm>
-            <a:off x="6668262" y="4169664"/>
-            <a:ext cx="685800" cy="475488"/>
+          <p:cNvPr id="49" name="Shape 47"/>
+          <p:cNvSpPr/>
+          <p:nvPr/>
+        </p:nvSpPr>
+        <p:spPr>
+          <a:xfrm>
+            <a:off x="5581498" y="4169664"/>
+            <a:ext cx="676656" cy="475488"/>
           </a:xfrm>
           <a:prstGeom prst="rect">
             <a:avLst>
@@ -28289,14 +28271,14 @@
       </p:sp>
       <p:sp>
         <p:nvSpPr>
-          <p:cNvPr id="47" name="Text 45"/>
-          <p:cNvSpPr/>
-          <p:nvPr/>
-        </p:nvSpPr>
-        <p:spPr>
-          <a:xfrm>
-            <a:off x="6668262" y="4169664"/>
-            <a:ext cx="685800" cy="475488"/>
+          <p:cNvPr id="50" name="Text 48"/>
+          <p:cNvSpPr/>
+          <p:nvPr/>
+        </p:nvSpPr>
+        <p:spPr>
+          <a:xfrm>
+            <a:off x="5581498" y="4169664"/>
+            <a:ext cx="676656" cy="475488"/>
           </a:xfrm>
           <a:prstGeom prst="rect">
             <a:avLst/>
@@ -28320,7 +28302,7 @@
                 <a:ea typeface="Trebuchet MS" pitchFamily="34" charset="-122"/>
                 <a:cs typeface="Trebuchet MS" pitchFamily="34" charset="-120"/>
               </a:rPr>
-              <a:t>t</a:t>
+              <a:t>y</a:t>
             </a:r>
             <a:endParaRPr lang="en-US" sz="900" dirty="0"/>
           </a:p>
@@ -28328,14 +28310,14 @@
       </p:sp>
       <p:sp>
         <p:nvSpPr>
-          <p:cNvPr id="48" name="Shape 46"/>
-          <p:cNvSpPr/>
-          <p:nvPr/>
-        </p:nvSpPr>
-        <p:spPr>
-          <a:xfrm>
-            <a:off x="7576947" y="4169664"/>
-            <a:ext cx="685800" cy="475488"/>
+          <p:cNvPr id="51" name="Shape 49"/>
+          <p:cNvSpPr/>
+          <p:nvPr/>
+        </p:nvSpPr>
+        <p:spPr>
+          <a:xfrm>
+            <a:off x="6307531" y="4169664"/>
+            <a:ext cx="676656" cy="475488"/>
           </a:xfrm>
           <a:prstGeom prst="rect">
             <a:avLst>
@@ -28355,14 +28337,14 @@
       </p:sp>
       <p:sp>
         <p:nvSpPr>
-          <p:cNvPr id="49" name="Text 47"/>
-          <p:cNvSpPr/>
-          <p:nvPr/>
-        </p:nvSpPr>
-        <p:spPr>
-          <a:xfrm>
-            <a:off x="7576947" y="4169664"/>
-            <a:ext cx="685800" cy="475488"/>
+          <p:cNvPr id="52" name="Text 50"/>
+          <p:cNvSpPr/>
+          <p:nvPr/>
+        </p:nvSpPr>
+        <p:spPr>
+          <a:xfrm>
+            <a:off x="6307531" y="4169664"/>
+            <a:ext cx="676656" cy="475488"/>
           </a:xfrm>
           <a:prstGeom prst="rect">
             <a:avLst/>
@@ -28386,7 +28368,139 @@
                 <a:ea typeface="Trebuchet MS" pitchFamily="34" charset="-122"/>
                 <a:cs typeface="Trebuchet MS" pitchFamily="34" charset="-120"/>
               </a:rPr>
-              <a:t>ar</a:t>
+              <a:t>t</a:t>
+            </a:r>
+            <a:endParaRPr lang="en-US" sz="900" dirty="0"/>
+          </a:p>
+        </p:txBody>
+      </p:sp>
+      <p:sp>
+        <p:nvSpPr>
+          <p:cNvPr id="53" name="Shape 51"/>
+          <p:cNvSpPr/>
+          <p:nvPr/>
+        </p:nvSpPr>
+        <p:spPr>
+          <a:xfrm>
+            <a:off x="7033565" y="4169664"/>
+            <a:ext cx="676656" cy="475488"/>
+          </a:xfrm>
+          <a:prstGeom prst="rect">
+            <a:avLst>
+              <a:gd name="adj" fmla="val 7692"/>
+            </a:avLst>
+          </a:prstGeom>
+          <a:solidFill>
+            <a:srgbClr val="FFFFFF"/>
+          </a:solidFill>
+          <a:ln w="12700">
+            <a:solidFill>
+              <a:srgbClr val="DB2777"/>
+            </a:solidFill>
+            <a:prstDash val="solid"/>
+          </a:ln>
+        </p:spPr>
+      </p:sp>
+      <p:sp>
+        <p:nvSpPr>
+          <p:cNvPr id="54" name="Text 52"/>
+          <p:cNvSpPr/>
+          <p:nvPr/>
+        </p:nvSpPr>
+        <p:spPr>
+          <a:xfrm>
+            <a:off x="7033565" y="4169664"/>
+            <a:ext cx="676656" cy="475488"/>
+          </a:xfrm>
+          <a:prstGeom prst="rect">
+            <a:avLst/>
+          </a:prstGeom>
+          <a:noFill/>
+          <a:ln/>
+        </p:spPr>
+        <p:txBody>
+          <a:bodyPr wrap="square" lIns="0" tIns="0" rIns="0" bIns="0" rtlCol="0" anchor="ctr"/>
+          <a:lstStyle/>
+          <a:p>
+            <a:pPr algn="ctr" indent="0" marL="0">
+              <a:buNone/>
+            </a:pPr>
+            <a:r>
+              <a:rPr lang="en-US" sz="900" b="1" dirty="0">
+                <a:solidFill>
+                  <a:srgbClr val="9D174D"/>
+                </a:solidFill>
+                <a:latin typeface="Trebuchet MS" pitchFamily="34" charset="0"/>
+                <a:ea typeface="Trebuchet MS" pitchFamily="34" charset="-122"/>
+                <a:cs typeface="Trebuchet MS" pitchFamily="34" charset="-120"/>
+              </a:rPr>
+              <a:t>e</a:t>
+            </a:r>
+            <a:endParaRPr lang="en-US" sz="900" dirty="0"/>
+          </a:p>
+        </p:txBody>
+      </p:sp>
+      <p:sp>
+        <p:nvSpPr>
+          <p:cNvPr id="55" name="Shape 53"/>
+          <p:cNvSpPr/>
+          <p:nvPr/>
+        </p:nvSpPr>
+        <p:spPr>
+          <a:xfrm>
+            <a:off x="7759598" y="4169664"/>
+            <a:ext cx="676656" cy="475488"/>
+          </a:xfrm>
+          <a:prstGeom prst="rect">
+            <a:avLst>
+              <a:gd name="adj" fmla="val 7692"/>
+            </a:avLst>
+          </a:prstGeom>
+          <a:solidFill>
+            <a:srgbClr val="FFFFFF"/>
+          </a:solidFill>
+          <a:ln w="12700">
+            <a:solidFill>
+              <a:srgbClr val="DB2777"/>
+            </a:solidFill>
+            <a:prstDash val="solid"/>
+          </a:ln>
+        </p:spPr>
+      </p:sp>
+      <p:sp>
+        <p:nvSpPr>
+          <p:cNvPr id="56" name="Text 54"/>
+          <p:cNvSpPr/>
+          <p:nvPr/>
+        </p:nvSpPr>
+        <p:spPr>
+          <a:xfrm>
+            <a:off x="7759598" y="4169664"/>
+            <a:ext cx="676656" cy="475488"/>
+          </a:xfrm>
+          <a:prstGeom prst="rect">
+            <a:avLst/>
+          </a:prstGeom>
+          <a:noFill/>
+          <a:ln/>
+        </p:spPr>
+        <p:txBody>
+          <a:bodyPr wrap="square" lIns="0" tIns="0" rIns="0" bIns="0" rtlCol="0" anchor="ctr"/>
+          <a:lstStyle/>
+          <a:p>
+            <a:pPr algn="ctr" indent="0" marL="0">
+              <a:buNone/>
+            </a:pPr>
+            <a:r>
+              <a:rPr lang="en-US" sz="900" b="1" dirty="0">
+                <a:solidFill>
+                  <a:srgbClr val="9D174D"/>
+                </a:solidFill>
+                <a:latin typeface="Trebuchet MS" pitchFamily="34" charset="0"/>
+                <a:ea typeface="Trebuchet MS" pitchFamily="34" charset="-122"/>
+                <a:cs typeface="Trebuchet MS" pitchFamily="34" charset="-120"/>
+              </a:rPr>
+              <a:t>s</a:t>
             </a:r>
             <a:endParaRPr lang="en-US" sz="900" dirty="0"/>
           </a:p>
@@ -28817,7 +28931,7 @@
                 <a:ea typeface="Trebuchet MS" pitchFamily="34" charset="-122"/>
                 <a:cs typeface="Trebuchet MS" pitchFamily="34" charset="-120"/>
               </a:rPr>
-              <a:t>megaconcert</a:t>
+              <a:t>megacities</a:t>
             </a:r>
             <a:endParaRPr lang="en-US" sz="2800" dirty="0"/>
           </a:p>
@@ -29644,7 +29758,7 @@
                 <a:ea typeface="Trebuchet MS" pitchFamily="34" charset="-122"/>
                 <a:cs typeface="Trebuchet MS" pitchFamily="34" charset="-120"/>
               </a:rPr>
-              <a:t>megaconcert</a:t>
+              <a:t>megacities</a:t>
             </a:r>
             <a:endParaRPr lang="en-US" sz="2800" dirty="0"/>
           </a:p>
@@ -29724,8 +29838,8 @@
         </p:nvSpPr>
         <p:spPr>
           <a:xfrm>
-            <a:off x="2938272" y="2258568"/>
-            <a:ext cx="1828800" cy="292608"/>
+            <a:off x="1989734" y="2258568"/>
+            <a:ext cx="1581912" cy="292608"/>
           </a:xfrm>
           <a:prstGeom prst="rect">
             <a:avLst>
@@ -29758,8 +29872,8 @@
         </p:nvSpPr>
         <p:spPr>
           <a:xfrm>
-            <a:off x="2938272" y="2258568"/>
-            <a:ext cx="1828800" cy="292608"/>
+            <a:off x="1989734" y="2258568"/>
+            <a:ext cx="1581912" cy="292608"/>
           </a:xfrm>
           <a:prstGeom prst="rect">
             <a:avLst/>
@@ -29797,8 +29911,8 @@
         </p:nvSpPr>
         <p:spPr>
           <a:xfrm>
-            <a:off x="2938272" y="2569464"/>
-            <a:ext cx="1828800" cy="201168"/>
+            <a:off x="1989734" y="2569464"/>
+            <a:ext cx="1581912" cy="201168"/>
           </a:xfrm>
           <a:prstGeom prst="rect">
             <a:avLst/>
@@ -29836,8 +29950,8 @@
         </p:nvSpPr>
         <p:spPr>
           <a:xfrm>
-            <a:off x="5803392" y="2258568"/>
-            <a:ext cx="1828800" cy="292608"/>
+            <a:off x="3659429" y="2258568"/>
+            <a:ext cx="1581912" cy="292608"/>
           </a:xfrm>
           <a:prstGeom prst="rect">
             <a:avLst>
@@ -29870,8 +29984,8 @@
         </p:nvSpPr>
         <p:spPr>
           <a:xfrm>
-            <a:off x="5803392" y="2258568"/>
-            <a:ext cx="1828800" cy="292608"/>
+            <a:off x="3659429" y="2258568"/>
+            <a:ext cx="1581912" cy="292608"/>
           </a:xfrm>
           <a:prstGeom prst="rect">
             <a:avLst/>
@@ -29895,7 +30009,7 @@
                 <a:ea typeface="Trebuchet MS" pitchFamily="34" charset="-122"/>
                 <a:cs typeface="Trebuchet MS" pitchFamily="34" charset="-120"/>
               </a:rPr>
-              <a:t>concert</a:t>
+              <a:t>cit</a:t>
             </a:r>
             <a:endParaRPr lang="en-US" sz="1300" dirty="0"/>
           </a:p>
@@ -29909,8 +30023,8 @@
         </p:nvSpPr>
         <p:spPr>
           <a:xfrm>
-            <a:off x="5803392" y="2569464"/>
-            <a:ext cx="1828800" cy="201168"/>
+            <a:off x="3659429" y="2569464"/>
+            <a:ext cx="1581912" cy="201168"/>
           </a:xfrm>
           <a:prstGeom prst="rect">
             <a:avLst/>
@@ -29934,7 +30048,7 @@
                 <a:ea typeface="Calibri" pitchFamily="34" charset="-122"/>
                 <a:cs typeface="Calibri" pitchFamily="34" charset="-120"/>
               </a:rPr>
-              <a:t>a live music performance</a:t>
+              <a:t>city, settlement</a:t>
             </a:r>
             <a:endParaRPr lang="en-US" sz="850" dirty="0"/>
           </a:p>
@@ -29943,6 +30057,269 @@
       <p:sp>
         <p:nvSpPr>
           <p:cNvPr id="22" name="Shape 20"/>
+          <p:cNvSpPr/>
+          <p:nvPr/>
+        </p:nvSpPr>
+        <p:spPr>
+          <a:xfrm>
+            <a:off x="5329123" y="2258568"/>
+            <a:ext cx="1581912" cy="292608"/>
+          </a:xfrm>
+          <a:prstGeom prst="rect">
+            <a:avLst>
+              <a:gd name="adj" fmla="val 25000"/>
+            </a:avLst>
+          </a:prstGeom>
+          <a:solidFill>
+            <a:srgbClr val="FCE7F3"/>
+          </a:solidFill>
+          <a:ln w="19050">
+            <a:solidFill>
+              <a:srgbClr val="DB2777"/>
+            </a:solidFill>
+            <a:prstDash val="solid"/>
+          </a:ln>
+          <a:effectLst>
+            <a:outerShdw sx="100000" sy="100000" kx="0" ky="0" algn="bl" rotWithShape="0" blurRad="101600" dist="38100" dir="8100000">
+              <a:srgbClr val="000000">
+                <a:alpha val="12000"/>
+              </a:srgbClr>
+            </a:outerShdw>
+          </a:effectLst>
+        </p:spPr>
+      </p:sp>
+      <p:sp>
+        <p:nvSpPr>
+          <p:cNvPr id="23" name="Text 21"/>
+          <p:cNvSpPr/>
+          <p:nvPr/>
+        </p:nvSpPr>
+        <p:spPr>
+          <a:xfrm>
+            <a:off x="5329123" y="2258568"/>
+            <a:ext cx="1581912" cy="292608"/>
+          </a:xfrm>
+          <a:prstGeom prst="rect">
+            <a:avLst/>
+          </a:prstGeom>
+          <a:noFill/>
+          <a:ln/>
+        </p:spPr>
+        <p:txBody>
+          <a:bodyPr wrap="square" lIns="0" tIns="0" rIns="0" bIns="0" rtlCol="0" anchor="ctr"/>
+          <a:lstStyle/>
+          <a:p>
+            <a:pPr algn="ctr" indent="0" marL="0">
+              <a:buNone/>
+            </a:pPr>
+            <a:r>
+              <a:rPr lang="en-US" sz="1300" b="1" dirty="0">
+                <a:solidFill>
+                  <a:srgbClr val="9D174D"/>
+                </a:solidFill>
+                <a:latin typeface="Trebuchet MS" pitchFamily="34" charset="0"/>
+                <a:ea typeface="Trebuchet MS" pitchFamily="34" charset="-122"/>
+                <a:cs typeface="Trebuchet MS" pitchFamily="34" charset="-120"/>
+              </a:rPr>
+              <a:t>i</a:t>
+            </a:r>
+            <a:endParaRPr lang="en-US" sz="1300" dirty="0"/>
+          </a:p>
+        </p:txBody>
+      </p:sp>
+      <p:sp>
+        <p:nvSpPr>
+          <p:cNvPr id="24" name="Text 22"/>
+          <p:cNvSpPr/>
+          <p:nvPr/>
+        </p:nvSpPr>
+        <p:spPr>
+          <a:xfrm>
+            <a:off x="5329123" y="2569464"/>
+            <a:ext cx="1581912" cy="201168"/>
+          </a:xfrm>
+          <a:prstGeom prst="rect">
+            <a:avLst/>
+          </a:prstGeom>
+          <a:noFill/>
+          <a:ln/>
+        </p:spPr>
+        <p:txBody>
+          <a:bodyPr wrap="square" lIns="0" tIns="0" rIns="0" bIns="0" rtlCol="0" anchor="t"/>
+          <a:lstStyle/>
+          <a:p>
+            <a:pPr algn="ctr" indent="0" marL="0">
+              <a:buNone/>
+            </a:pPr>
+            <a:r>
+              <a:rPr lang="en-US" sz="850" dirty="0">
+                <a:solidFill>
+                  <a:srgbClr val="475569"/>
+                </a:solidFill>
+                <a:latin typeface="Calibri" pitchFamily="34" charset="0"/>
+                <a:ea typeface="Calibri" pitchFamily="34" charset="-122"/>
+                <a:cs typeface="Calibri" pitchFamily="34" charset="-120"/>
+              </a:rPr>
+              <a:t>connecting vowel</a:t>
+            </a:r>
+            <a:endParaRPr lang="en-US" sz="850" dirty="0"/>
+          </a:p>
+        </p:txBody>
+      </p:sp>
+      <p:sp>
+        <p:nvSpPr>
+          <p:cNvPr id="25" name="Text 23"/>
+          <p:cNvSpPr/>
+          <p:nvPr/>
+        </p:nvSpPr>
+        <p:spPr>
+          <a:xfrm>
+            <a:off x="5329123" y="2752344"/>
+            <a:ext cx="1581912" cy="182880"/>
+          </a:xfrm>
+          <a:prstGeom prst="rect">
+            <a:avLst/>
+          </a:prstGeom>
+          <a:noFill/>
+          <a:ln/>
+        </p:spPr>
+        <p:txBody>
+          <a:bodyPr wrap="square" lIns="0" tIns="0" rIns="0" bIns="0" rtlCol="0" anchor="t"/>
+          <a:lstStyle/>
+          <a:p>
+            <a:pPr algn="ctr" indent="0" marL="0">
+              <a:buNone/>
+            </a:pPr>
+            <a:r>
+              <a:rPr lang="en-US" sz="700" i="1" dirty="0">
+                <a:solidFill>
+                  <a:srgbClr val="94A3B8"/>
+                </a:solidFill>
+                <a:latin typeface="Calibri" pitchFamily="34" charset="0"/>
+                <a:ea typeface="Calibri" pitchFamily="34" charset="-122"/>
+                <a:cs typeface="Calibri" pitchFamily="34" charset="-120"/>
+              </a:rPr>
+              <a:t>'y' changes to 'i' before suffix</a:t>
+            </a:r>
+            <a:endParaRPr lang="en-US" sz="700" dirty="0"/>
+          </a:p>
+        </p:txBody>
+      </p:sp>
+      <p:sp>
+        <p:nvSpPr>
+          <p:cNvPr id="26" name="Shape 24"/>
+          <p:cNvSpPr/>
+          <p:nvPr/>
+        </p:nvSpPr>
+        <p:spPr>
+          <a:xfrm>
+            <a:off x="6998818" y="2258568"/>
+            <a:ext cx="1581912" cy="292608"/>
+          </a:xfrm>
+          <a:prstGeom prst="rect">
+            <a:avLst>
+              <a:gd name="adj" fmla="val 25000"/>
+            </a:avLst>
+          </a:prstGeom>
+          <a:solidFill>
+            <a:srgbClr val="FCE7F3"/>
+          </a:solidFill>
+          <a:ln w="19050">
+            <a:solidFill>
+              <a:srgbClr val="DB2777"/>
+            </a:solidFill>
+            <a:prstDash val="solid"/>
+          </a:ln>
+          <a:effectLst>
+            <a:outerShdw sx="100000" sy="100000" kx="0" ky="0" algn="bl" rotWithShape="0" blurRad="101600" dist="38100" dir="8100000">
+              <a:srgbClr val="000000">
+                <a:alpha val="12000"/>
+              </a:srgbClr>
+            </a:outerShdw>
+          </a:effectLst>
+        </p:spPr>
+      </p:sp>
+      <p:sp>
+        <p:nvSpPr>
+          <p:cNvPr id="27" name="Text 25"/>
+          <p:cNvSpPr/>
+          <p:nvPr/>
+        </p:nvSpPr>
+        <p:spPr>
+          <a:xfrm>
+            <a:off x="6998818" y="2258568"/>
+            <a:ext cx="1581912" cy="292608"/>
+          </a:xfrm>
+          <a:prstGeom prst="rect">
+            <a:avLst/>
+          </a:prstGeom>
+          <a:noFill/>
+          <a:ln/>
+        </p:spPr>
+        <p:txBody>
+          <a:bodyPr wrap="square" lIns="0" tIns="0" rIns="0" bIns="0" rtlCol="0" anchor="ctr"/>
+          <a:lstStyle/>
+          <a:p>
+            <a:pPr algn="ctr" indent="0" marL="0">
+              <a:buNone/>
+            </a:pPr>
+            <a:r>
+              <a:rPr lang="en-US" sz="1300" b="1" dirty="0">
+                <a:solidFill>
+                  <a:srgbClr val="9D174D"/>
+                </a:solidFill>
+                <a:latin typeface="Trebuchet MS" pitchFamily="34" charset="0"/>
+                <a:ea typeface="Trebuchet MS" pitchFamily="34" charset="-122"/>
+                <a:cs typeface="Trebuchet MS" pitchFamily="34" charset="-120"/>
+              </a:rPr>
+              <a:t>es</a:t>
+            </a:r>
+            <a:endParaRPr lang="en-US" sz="1300" dirty="0"/>
+          </a:p>
+        </p:txBody>
+      </p:sp>
+      <p:sp>
+        <p:nvSpPr>
+          <p:cNvPr id="28" name="Text 26"/>
+          <p:cNvSpPr/>
+          <p:nvPr/>
+        </p:nvSpPr>
+        <p:spPr>
+          <a:xfrm>
+            <a:off x="6998818" y="2569464"/>
+            <a:ext cx="1581912" cy="201168"/>
+          </a:xfrm>
+          <a:prstGeom prst="rect">
+            <a:avLst/>
+          </a:prstGeom>
+          <a:noFill/>
+          <a:ln/>
+        </p:spPr>
+        <p:txBody>
+          <a:bodyPr wrap="square" lIns="0" tIns="0" rIns="0" bIns="0" rtlCol="0" anchor="t"/>
+          <a:lstStyle/>
+          <a:p>
+            <a:pPr algn="ctr" indent="0" marL="0">
+              <a:buNone/>
+            </a:pPr>
+            <a:r>
+              <a:rPr lang="en-US" sz="850" dirty="0">
+                <a:solidFill>
+                  <a:srgbClr val="475569"/>
+                </a:solidFill>
+                <a:latin typeface="Calibri" pitchFamily="34" charset="0"/>
+                <a:ea typeface="Calibri" pitchFamily="34" charset="-122"/>
+                <a:cs typeface="Calibri" pitchFamily="34" charset="-120"/>
+              </a:rPr>
+              <a:t>more than one</a:t>
+            </a:r>
+            <a:endParaRPr lang="en-US" sz="850" dirty="0"/>
+          </a:p>
+        </p:txBody>
+      </p:sp>
+      <p:sp>
+        <p:nvSpPr>
+          <p:cNvPr id="29" name="Shape 27"/>
           <p:cNvSpPr/>
           <p:nvPr/>
         </p:nvSpPr>
@@ -29969,7 +30346,7 @@
       </p:sp>
       <p:sp>
         <p:nvSpPr>
-          <p:cNvPr id="23" name="Text 21"/>
+          <p:cNvPr id="30" name="Text 28"/>
           <p:cNvSpPr/>
           <p:nvPr/>
         </p:nvSpPr>
@@ -30008,7 +30385,7 @@
       </p:sp>
       <p:sp>
         <p:nvSpPr>
-          <p:cNvPr id="24" name="Shape 22"/>
+          <p:cNvPr id="31" name="Shape 29"/>
           <p:cNvSpPr/>
           <p:nvPr/>
         </p:nvSpPr>
@@ -30035,7 +30412,7 @@
       </p:sp>
       <p:sp>
         <p:nvSpPr>
-          <p:cNvPr id="25" name="Text 23"/>
+          <p:cNvPr id="32" name="Text 30"/>
           <p:cNvSpPr/>
           <p:nvPr/>
         </p:nvSpPr>
@@ -30074,7 +30451,7 @@
       </p:sp>
       <p:sp>
         <p:nvSpPr>
-          <p:cNvPr id="26" name="Shape 24"/>
+          <p:cNvPr id="33" name="Shape 31"/>
           <p:cNvSpPr/>
           <p:nvPr/>
         </p:nvSpPr>
@@ -30101,7 +30478,7 @@
       </p:sp>
       <p:sp>
         <p:nvSpPr>
-          <p:cNvPr id="27" name="Text 25"/>
+          <p:cNvPr id="34" name="Text 32"/>
           <p:cNvSpPr/>
           <p:nvPr/>
         </p:nvSpPr>
@@ -30140,7 +30517,7 @@
       </p:sp>
       <p:sp>
         <p:nvSpPr>
-          <p:cNvPr id="28" name="Shape 26"/>
+          <p:cNvPr id="35" name="Shape 33"/>
           <p:cNvSpPr/>
           <p:nvPr/>
         </p:nvSpPr>
@@ -30167,7 +30544,7 @@
       </p:sp>
       <p:sp>
         <p:nvSpPr>
-          <p:cNvPr id="29" name="Text 27"/>
+          <p:cNvPr id="36" name="Text 34"/>
           <p:cNvSpPr/>
           <p:nvPr/>
         </p:nvSpPr>
@@ -30629,7 +31006,7 @@
                 <a:ea typeface="Trebuchet MS" pitchFamily="34" charset="-122"/>
                 <a:cs typeface="Trebuchet MS" pitchFamily="34" charset="-120"/>
               </a:rPr>
-              <a:t>megaconcert</a:t>
+              <a:t>megacities</a:t>
             </a:r>
             <a:endParaRPr lang="en-US" sz="2800" dirty="0"/>
           </a:p>
@@ -30709,8 +31086,8 @@
         </p:nvSpPr>
         <p:spPr>
           <a:xfrm>
-            <a:off x="2938272" y="2258568"/>
-            <a:ext cx="1828800" cy="292608"/>
+            <a:off x="1989734" y="2258568"/>
+            <a:ext cx="1581912" cy="292608"/>
           </a:xfrm>
           <a:prstGeom prst="rect">
             <a:avLst>
@@ -30743,8 +31120,8 @@
         </p:nvSpPr>
         <p:spPr>
           <a:xfrm>
-            <a:off x="2938272" y="2258568"/>
-            <a:ext cx="1828800" cy="292608"/>
+            <a:off x="1989734" y="2258568"/>
+            <a:ext cx="1581912" cy="292608"/>
           </a:xfrm>
           <a:prstGeom prst="rect">
             <a:avLst/>
@@ -30782,8 +31159,8 @@
         </p:nvSpPr>
         <p:spPr>
           <a:xfrm>
-            <a:off x="2938272" y="2569464"/>
-            <a:ext cx="1828800" cy="201168"/>
+            <a:off x="1989734" y="2569464"/>
+            <a:ext cx="1581912" cy="201168"/>
           </a:xfrm>
           <a:prstGeom prst="rect">
             <a:avLst/>
@@ -30821,8 +31198,8 @@
         </p:nvSpPr>
         <p:spPr>
           <a:xfrm>
-            <a:off x="5803392" y="2258568"/>
-            <a:ext cx="1828800" cy="292608"/>
+            <a:off x="3659429" y="2258568"/>
+            <a:ext cx="1581912" cy="292608"/>
           </a:xfrm>
           <a:prstGeom prst="rect">
             <a:avLst>
@@ -30855,8 +31232,8 @@
         </p:nvSpPr>
         <p:spPr>
           <a:xfrm>
-            <a:off x="5803392" y="2258568"/>
-            <a:ext cx="1828800" cy="292608"/>
+            <a:off x="3659429" y="2258568"/>
+            <a:ext cx="1581912" cy="292608"/>
           </a:xfrm>
           <a:prstGeom prst="rect">
             <a:avLst/>
@@ -30880,7 +31257,7 @@
                 <a:ea typeface="Trebuchet MS" pitchFamily="34" charset="-122"/>
                 <a:cs typeface="Trebuchet MS" pitchFamily="34" charset="-120"/>
               </a:rPr>
-              <a:t>concert</a:t>
+              <a:t>cit</a:t>
             </a:r>
             <a:endParaRPr lang="en-US" sz="1300" dirty="0"/>
           </a:p>
@@ -30894,8 +31271,8 @@
         </p:nvSpPr>
         <p:spPr>
           <a:xfrm>
-            <a:off x="5803392" y="2569464"/>
-            <a:ext cx="1828800" cy="201168"/>
+            <a:off x="3659429" y="2569464"/>
+            <a:ext cx="1581912" cy="201168"/>
           </a:xfrm>
           <a:prstGeom prst="rect">
             <a:avLst/>
@@ -30919,7 +31296,7 @@
                 <a:ea typeface="Calibri" pitchFamily="34" charset="-122"/>
                 <a:cs typeface="Calibri" pitchFamily="34" charset="-120"/>
               </a:rPr>
-              <a:t>a live music performance</a:t>
+              <a:t>city, settlement</a:t>
             </a:r>
             <a:endParaRPr lang="en-US" sz="850" dirty="0"/>
           </a:p>
@@ -30928,6 +31305,269 @@
       <p:sp>
         <p:nvSpPr>
           <p:cNvPr id="22" name="Shape 20"/>
+          <p:cNvSpPr/>
+          <p:nvPr/>
+        </p:nvSpPr>
+        <p:spPr>
+          <a:xfrm>
+            <a:off x="5329123" y="2258568"/>
+            <a:ext cx="1581912" cy="292608"/>
+          </a:xfrm>
+          <a:prstGeom prst="rect">
+            <a:avLst>
+              <a:gd name="adj" fmla="val 25000"/>
+            </a:avLst>
+          </a:prstGeom>
+          <a:solidFill>
+            <a:srgbClr val="FCE7F3"/>
+          </a:solidFill>
+          <a:ln w="19050">
+            <a:solidFill>
+              <a:srgbClr val="DB2777"/>
+            </a:solidFill>
+            <a:prstDash val="solid"/>
+          </a:ln>
+          <a:effectLst>
+            <a:outerShdw sx="100000" sy="100000" kx="0" ky="0" algn="bl" rotWithShape="0" blurRad="101600" dist="38100" dir="8100000">
+              <a:srgbClr val="000000">
+                <a:alpha val="12000"/>
+              </a:srgbClr>
+            </a:outerShdw>
+          </a:effectLst>
+        </p:spPr>
+      </p:sp>
+      <p:sp>
+        <p:nvSpPr>
+          <p:cNvPr id="23" name="Text 21"/>
+          <p:cNvSpPr/>
+          <p:nvPr/>
+        </p:nvSpPr>
+        <p:spPr>
+          <a:xfrm>
+            <a:off x="5329123" y="2258568"/>
+            <a:ext cx="1581912" cy="292608"/>
+          </a:xfrm>
+          <a:prstGeom prst="rect">
+            <a:avLst/>
+          </a:prstGeom>
+          <a:noFill/>
+          <a:ln/>
+        </p:spPr>
+        <p:txBody>
+          <a:bodyPr wrap="square" lIns="0" tIns="0" rIns="0" bIns="0" rtlCol="0" anchor="ctr"/>
+          <a:lstStyle/>
+          <a:p>
+            <a:pPr algn="ctr" indent="0" marL="0">
+              <a:buNone/>
+            </a:pPr>
+            <a:r>
+              <a:rPr lang="en-US" sz="1300" b="1" dirty="0">
+                <a:solidFill>
+                  <a:srgbClr val="9D174D"/>
+                </a:solidFill>
+                <a:latin typeface="Trebuchet MS" pitchFamily="34" charset="0"/>
+                <a:ea typeface="Trebuchet MS" pitchFamily="34" charset="-122"/>
+                <a:cs typeface="Trebuchet MS" pitchFamily="34" charset="-120"/>
+              </a:rPr>
+              <a:t>i</a:t>
+            </a:r>
+            <a:endParaRPr lang="en-US" sz="1300" dirty="0"/>
+          </a:p>
+        </p:txBody>
+      </p:sp>
+      <p:sp>
+        <p:nvSpPr>
+          <p:cNvPr id="24" name="Text 22"/>
+          <p:cNvSpPr/>
+          <p:nvPr/>
+        </p:nvSpPr>
+        <p:spPr>
+          <a:xfrm>
+            <a:off x="5329123" y="2569464"/>
+            <a:ext cx="1581912" cy="201168"/>
+          </a:xfrm>
+          <a:prstGeom prst="rect">
+            <a:avLst/>
+          </a:prstGeom>
+          <a:noFill/>
+          <a:ln/>
+        </p:spPr>
+        <p:txBody>
+          <a:bodyPr wrap="square" lIns="0" tIns="0" rIns="0" bIns="0" rtlCol="0" anchor="t"/>
+          <a:lstStyle/>
+          <a:p>
+            <a:pPr algn="ctr" indent="0" marL="0">
+              <a:buNone/>
+            </a:pPr>
+            <a:r>
+              <a:rPr lang="en-US" sz="850" dirty="0">
+                <a:solidFill>
+                  <a:srgbClr val="475569"/>
+                </a:solidFill>
+                <a:latin typeface="Calibri" pitchFamily="34" charset="0"/>
+                <a:ea typeface="Calibri" pitchFamily="34" charset="-122"/>
+                <a:cs typeface="Calibri" pitchFamily="34" charset="-120"/>
+              </a:rPr>
+              <a:t>connecting vowel</a:t>
+            </a:r>
+            <a:endParaRPr lang="en-US" sz="850" dirty="0"/>
+          </a:p>
+        </p:txBody>
+      </p:sp>
+      <p:sp>
+        <p:nvSpPr>
+          <p:cNvPr id="25" name="Text 23"/>
+          <p:cNvSpPr/>
+          <p:nvPr/>
+        </p:nvSpPr>
+        <p:spPr>
+          <a:xfrm>
+            <a:off x="5329123" y="2752344"/>
+            <a:ext cx="1581912" cy="182880"/>
+          </a:xfrm>
+          <a:prstGeom prst="rect">
+            <a:avLst/>
+          </a:prstGeom>
+          <a:noFill/>
+          <a:ln/>
+        </p:spPr>
+        <p:txBody>
+          <a:bodyPr wrap="square" lIns="0" tIns="0" rIns="0" bIns="0" rtlCol="0" anchor="t"/>
+          <a:lstStyle/>
+          <a:p>
+            <a:pPr algn="ctr" indent="0" marL="0">
+              <a:buNone/>
+            </a:pPr>
+            <a:r>
+              <a:rPr lang="en-US" sz="700" i="1" dirty="0">
+                <a:solidFill>
+                  <a:srgbClr val="94A3B8"/>
+                </a:solidFill>
+                <a:latin typeface="Calibri" pitchFamily="34" charset="0"/>
+                <a:ea typeface="Calibri" pitchFamily="34" charset="-122"/>
+                <a:cs typeface="Calibri" pitchFamily="34" charset="-120"/>
+              </a:rPr>
+              <a:t>'y' changes to 'i' before suffix</a:t>
+            </a:r>
+            <a:endParaRPr lang="en-US" sz="700" dirty="0"/>
+          </a:p>
+        </p:txBody>
+      </p:sp>
+      <p:sp>
+        <p:nvSpPr>
+          <p:cNvPr id="26" name="Shape 24"/>
+          <p:cNvSpPr/>
+          <p:nvPr/>
+        </p:nvSpPr>
+        <p:spPr>
+          <a:xfrm>
+            <a:off x="6998818" y="2258568"/>
+            <a:ext cx="1581912" cy="292608"/>
+          </a:xfrm>
+          <a:prstGeom prst="rect">
+            <a:avLst>
+              <a:gd name="adj" fmla="val 25000"/>
+            </a:avLst>
+          </a:prstGeom>
+          <a:solidFill>
+            <a:srgbClr val="FCE7F3"/>
+          </a:solidFill>
+          <a:ln w="19050">
+            <a:solidFill>
+              <a:srgbClr val="DB2777"/>
+            </a:solidFill>
+            <a:prstDash val="solid"/>
+          </a:ln>
+          <a:effectLst>
+            <a:outerShdw sx="100000" sy="100000" kx="0" ky="0" algn="bl" rotWithShape="0" blurRad="101600" dist="38100" dir="8100000">
+              <a:srgbClr val="000000">
+                <a:alpha val="12000"/>
+              </a:srgbClr>
+            </a:outerShdw>
+          </a:effectLst>
+        </p:spPr>
+      </p:sp>
+      <p:sp>
+        <p:nvSpPr>
+          <p:cNvPr id="27" name="Text 25"/>
+          <p:cNvSpPr/>
+          <p:nvPr/>
+        </p:nvSpPr>
+        <p:spPr>
+          <a:xfrm>
+            <a:off x="6998818" y="2258568"/>
+            <a:ext cx="1581912" cy="292608"/>
+          </a:xfrm>
+          <a:prstGeom prst="rect">
+            <a:avLst/>
+          </a:prstGeom>
+          <a:noFill/>
+          <a:ln/>
+        </p:spPr>
+        <p:txBody>
+          <a:bodyPr wrap="square" lIns="0" tIns="0" rIns="0" bIns="0" rtlCol="0" anchor="ctr"/>
+          <a:lstStyle/>
+          <a:p>
+            <a:pPr algn="ctr" indent="0" marL="0">
+              <a:buNone/>
+            </a:pPr>
+            <a:r>
+              <a:rPr lang="en-US" sz="1300" b="1" dirty="0">
+                <a:solidFill>
+                  <a:srgbClr val="9D174D"/>
+                </a:solidFill>
+                <a:latin typeface="Trebuchet MS" pitchFamily="34" charset="0"/>
+                <a:ea typeface="Trebuchet MS" pitchFamily="34" charset="-122"/>
+                <a:cs typeface="Trebuchet MS" pitchFamily="34" charset="-120"/>
+              </a:rPr>
+              <a:t>es</a:t>
+            </a:r>
+            <a:endParaRPr lang="en-US" sz="1300" dirty="0"/>
+          </a:p>
+        </p:txBody>
+      </p:sp>
+      <p:sp>
+        <p:nvSpPr>
+          <p:cNvPr id="28" name="Text 26"/>
+          <p:cNvSpPr/>
+          <p:nvPr/>
+        </p:nvSpPr>
+        <p:spPr>
+          <a:xfrm>
+            <a:off x="6998818" y="2569464"/>
+            <a:ext cx="1581912" cy="201168"/>
+          </a:xfrm>
+          <a:prstGeom prst="rect">
+            <a:avLst/>
+          </a:prstGeom>
+          <a:noFill/>
+          <a:ln/>
+        </p:spPr>
+        <p:txBody>
+          <a:bodyPr wrap="square" lIns="0" tIns="0" rIns="0" bIns="0" rtlCol="0" anchor="t"/>
+          <a:lstStyle/>
+          <a:p>
+            <a:pPr algn="ctr" indent="0" marL="0">
+              <a:buNone/>
+            </a:pPr>
+            <a:r>
+              <a:rPr lang="en-US" sz="850" dirty="0">
+                <a:solidFill>
+                  <a:srgbClr val="475569"/>
+                </a:solidFill>
+                <a:latin typeface="Calibri" pitchFamily="34" charset="0"/>
+                <a:ea typeface="Calibri" pitchFamily="34" charset="-122"/>
+                <a:cs typeface="Calibri" pitchFamily="34" charset="-120"/>
+              </a:rPr>
+              <a:t>more than one</a:t>
+            </a:r>
+            <a:endParaRPr lang="en-US" sz="850" dirty="0"/>
+          </a:p>
+        </p:txBody>
+      </p:sp>
+      <p:sp>
+        <p:nvSpPr>
+          <p:cNvPr id="29" name="Shape 27"/>
           <p:cNvSpPr/>
           <p:nvPr/>
         </p:nvSpPr>
@@ -30954,7 +31594,7 @@
       </p:sp>
       <p:sp>
         <p:nvSpPr>
-          <p:cNvPr id="23" name="Text 21"/>
+          <p:cNvPr id="30" name="Text 28"/>
           <p:cNvSpPr/>
           <p:nvPr/>
         </p:nvSpPr>
@@ -30993,7 +31633,7 @@
       </p:sp>
       <p:sp>
         <p:nvSpPr>
-          <p:cNvPr id="24" name="Shape 22"/>
+          <p:cNvPr id="31" name="Shape 29"/>
           <p:cNvSpPr/>
           <p:nvPr/>
         </p:nvSpPr>
@@ -31020,7 +31660,7 @@
       </p:sp>
       <p:sp>
         <p:nvSpPr>
-          <p:cNvPr id="25" name="Shape 23"/>
+          <p:cNvPr id="32" name="Shape 30"/>
           <p:cNvSpPr/>
           <p:nvPr/>
         </p:nvSpPr>
@@ -31047,7 +31687,7 @@
       </p:sp>
       <p:sp>
         <p:nvSpPr>
-          <p:cNvPr id="26" name="Text 24"/>
+          <p:cNvPr id="33" name="Text 31"/>
           <p:cNvSpPr/>
           <p:nvPr/>
         </p:nvSpPr>
@@ -31078,7 +31718,7 @@
                 <a:ea typeface="Trebuchet MS" pitchFamily="34" charset="-122"/>
                 <a:cs typeface="Trebuchet MS" pitchFamily="34" charset="-120"/>
               </a:rPr>
-              <a:t>meg</a:t>
+              <a:t>me</a:t>
             </a:r>
             <a:endParaRPr lang="en-US" sz="1400" dirty="0"/>
           </a:p>
@@ -31086,7 +31726,7 @@
       </p:sp>
       <p:sp>
         <p:nvSpPr>
-          <p:cNvPr id="27" name="Text 25"/>
+          <p:cNvPr id="34" name="Text 32"/>
           <p:cNvSpPr/>
           <p:nvPr/>
         </p:nvSpPr>
@@ -31125,7 +31765,7 @@
       </p:sp>
       <p:sp>
         <p:nvSpPr>
-          <p:cNvPr id="28" name="Shape 26"/>
+          <p:cNvPr id="35" name="Shape 33"/>
           <p:cNvSpPr/>
           <p:nvPr/>
         </p:nvSpPr>
@@ -31152,7 +31792,7 @@
       </p:sp>
       <p:sp>
         <p:nvSpPr>
-          <p:cNvPr id="29" name="Text 27"/>
+          <p:cNvPr id="36" name="Text 34"/>
           <p:cNvSpPr/>
           <p:nvPr/>
         </p:nvSpPr>
@@ -31183,7 +31823,7 @@
                 <a:ea typeface="Trebuchet MS" pitchFamily="34" charset="-122"/>
                 <a:cs typeface="Trebuchet MS" pitchFamily="34" charset="-120"/>
               </a:rPr>
-              <a:t>a</a:t>
+              <a:t>ga</a:t>
             </a:r>
             <a:endParaRPr lang="en-US" sz="1400" dirty="0"/>
           </a:p>
@@ -31191,7 +31831,7 @@
       </p:sp>
       <p:sp>
         <p:nvSpPr>
-          <p:cNvPr id="30" name="Text 28"/>
+          <p:cNvPr id="37" name="Text 35"/>
           <p:cNvSpPr/>
           <p:nvPr/>
         </p:nvSpPr>
@@ -31230,7 +31870,7 @@
       </p:sp>
       <p:sp>
         <p:nvSpPr>
-          <p:cNvPr id="31" name="Shape 29"/>
+          <p:cNvPr id="38" name="Shape 36"/>
           <p:cNvSpPr/>
           <p:nvPr/>
         </p:nvSpPr>
@@ -31257,7 +31897,7 @@
       </p:sp>
       <p:sp>
         <p:nvSpPr>
-          <p:cNvPr id="32" name="Text 30"/>
+          <p:cNvPr id="39" name="Text 37"/>
           <p:cNvSpPr/>
           <p:nvPr/>
         </p:nvSpPr>
@@ -31288,7 +31928,7 @@
                 <a:ea typeface="Trebuchet MS" pitchFamily="34" charset="-122"/>
                 <a:cs typeface="Trebuchet MS" pitchFamily="34" charset="-120"/>
               </a:rPr>
-              <a:t>con</a:t>
+              <a:t>ci</a:t>
             </a:r>
             <a:endParaRPr lang="en-US" sz="1400" dirty="0"/>
           </a:p>
@@ -31296,7 +31936,7 @@
       </p:sp>
       <p:sp>
         <p:nvSpPr>
-          <p:cNvPr id="33" name="Text 31"/>
+          <p:cNvPr id="40" name="Text 38"/>
           <p:cNvSpPr/>
           <p:nvPr/>
         </p:nvSpPr>
@@ -31335,7 +31975,7 @@
       </p:sp>
       <p:sp>
         <p:nvSpPr>
-          <p:cNvPr id="34" name="Shape 32"/>
+          <p:cNvPr id="41" name="Shape 39"/>
           <p:cNvSpPr/>
           <p:nvPr/>
         </p:nvSpPr>
@@ -31362,7 +32002,7 @@
       </p:sp>
       <p:sp>
         <p:nvSpPr>
-          <p:cNvPr id="35" name="Text 33"/>
+          <p:cNvPr id="42" name="Text 40"/>
           <p:cNvSpPr/>
           <p:nvPr/>
         </p:nvSpPr>
@@ -31393,7 +32033,7 @@
                 <a:ea typeface="Trebuchet MS" pitchFamily="34" charset="-122"/>
                 <a:cs typeface="Trebuchet MS" pitchFamily="34" charset="-120"/>
               </a:rPr>
-              <a:t>cert</a:t>
+              <a:t>ties</a:t>
             </a:r>
             <a:endParaRPr lang="en-US" sz="1400" dirty="0"/>
           </a:p>
@@ -31401,7 +32041,7 @@
       </p:sp>
       <p:sp>
         <p:nvSpPr>
-          <p:cNvPr id="36" name="Shape 34"/>
+          <p:cNvPr id="43" name="Shape 41"/>
           <p:cNvSpPr/>
           <p:nvPr/>
         </p:nvSpPr>
@@ -31428,7 +32068,7 @@
       </p:sp>
       <p:sp>
         <p:nvSpPr>
-          <p:cNvPr id="37" name="Text 35"/>
+          <p:cNvPr id="44" name="Text 42"/>
           <p:cNvSpPr/>
           <p:nvPr/>
         </p:nvSpPr>
@@ -31467,7 +32107,7 @@
       </p:sp>
       <p:sp>
         <p:nvSpPr>
-          <p:cNvPr id="38" name="Shape 36"/>
+          <p:cNvPr id="45" name="Shape 43"/>
           <p:cNvSpPr/>
           <p:nvPr/>
         </p:nvSpPr>
@@ -31494,7 +32134,7 @@
       </p:sp>
       <p:sp>
         <p:nvSpPr>
-          <p:cNvPr id="39" name="Text 37"/>
+          <p:cNvPr id="46" name="Text 44"/>
           <p:cNvSpPr/>
           <p:nvPr/>
         </p:nvSpPr>
@@ -31956,7 +32596,7 @@
                 <a:ea typeface="Trebuchet MS" pitchFamily="34" charset="-122"/>
                 <a:cs typeface="Trebuchet MS" pitchFamily="34" charset="-120"/>
               </a:rPr>
-              <a:t>megaconcert</a:t>
+              <a:t>megacities</a:t>
             </a:r>
             <a:endParaRPr lang="en-US" sz="2800" dirty="0"/>
           </a:p>
@@ -32036,8 +32676,8 @@
         </p:nvSpPr>
         <p:spPr>
           <a:xfrm>
-            <a:off x="2938272" y="2258568"/>
-            <a:ext cx="1828800" cy="292608"/>
+            <a:off x="1989734" y="2258568"/>
+            <a:ext cx="1581912" cy="292608"/>
           </a:xfrm>
           <a:prstGeom prst="rect">
             <a:avLst>
@@ -32070,8 +32710,8 @@
         </p:nvSpPr>
         <p:spPr>
           <a:xfrm>
-            <a:off x="2938272" y="2258568"/>
-            <a:ext cx="1828800" cy="292608"/>
+            <a:off x="1989734" y="2258568"/>
+            <a:ext cx="1581912" cy="292608"/>
           </a:xfrm>
           <a:prstGeom prst="rect">
             <a:avLst/>
@@ -32109,8 +32749,8 @@
         </p:nvSpPr>
         <p:spPr>
           <a:xfrm>
-            <a:off x="2938272" y="2569464"/>
-            <a:ext cx="1828800" cy="201168"/>
+            <a:off x="1989734" y="2569464"/>
+            <a:ext cx="1581912" cy="201168"/>
           </a:xfrm>
           <a:prstGeom prst="rect">
             <a:avLst/>
@@ -32148,8 +32788,8 @@
         </p:nvSpPr>
         <p:spPr>
           <a:xfrm>
-            <a:off x="5803392" y="2258568"/>
-            <a:ext cx="1828800" cy="292608"/>
+            <a:off x="3659429" y="2258568"/>
+            <a:ext cx="1581912" cy="292608"/>
           </a:xfrm>
           <a:prstGeom prst="rect">
             <a:avLst>
@@ -32182,8 +32822,8 @@
         </p:nvSpPr>
         <p:spPr>
           <a:xfrm>
-            <a:off x="5803392" y="2258568"/>
-            <a:ext cx="1828800" cy="292608"/>
+            <a:off x="3659429" y="2258568"/>
+            <a:ext cx="1581912" cy="292608"/>
           </a:xfrm>
           <a:prstGeom prst="rect">
             <a:avLst/>
@@ -32207,7 +32847,7 @@
                 <a:ea typeface="Trebuchet MS" pitchFamily="34" charset="-122"/>
                 <a:cs typeface="Trebuchet MS" pitchFamily="34" charset="-120"/>
               </a:rPr>
-              <a:t>concert</a:t>
+              <a:t>cit</a:t>
             </a:r>
             <a:endParaRPr lang="en-US" sz="1300" dirty="0"/>
           </a:p>
@@ -32221,8 +32861,8 @@
         </p:nvSpPr>
         <p:spPr>
           <a:xfrm>
-            <a:off x="5803392" y="2569464"/>
-            <a:ext cx="1828800" cy="201168"/>
+            <a:off x="3659429" y="2569464"/>
+            <a:ext cx="1581912" cy="201168"/>
           </a:xfrm>
           <a:prstGeom prst="rect">
             <a:avLst/>
@@ -32246,7 +32886,7 @@
                 <a:ea typeface="Calibri" pitchFamily="34" charset="-122"/>
                 <a:cs typeface="Calibri" pitchFamily="34" charset="-120"/>
               </a:rPr>
-              <a:t>a live music performance</a:t>
+              <a:t>city, settlement</a:t>
             </a:r>
             <a:endParaRPr lang="en-US" sz="850" dirty="0"/>
           </a:p>
@@ -32255,6 +32895,269 @@
       <p:sp>
         <p:nvSpPr>
           <p:cNvPr id="22" name="Shape 20"/>
+          <p:cNvSpPr/>
+          <p:nvPr/>
+        </p:nvSpPr>
+        <p:spPr>
+          <a:xfrm>
+            <a:off x="5329123" y="2258568"/>
+            <a:ext cx="1581912" cy="292608"/>
+          </a:xfrm>
+          <a:prstGeom prst="rect">
+            <a:avLst>
+              <a:gd name="adj" fmla="val 25000"/>
+            </a:avLst>
+          </a:prstGeom>
+          <a:solidFill>
+            <a:srgbClr val="FCE7F3"/>
+          </a:solidFill>
+          <a:ln w="19050">
+            <a:solidFill>
+              <a:srgbClr val="DB2777"/>
+            </a:solidFill>
+            <a:prstDash val="solid"/>
+          </a:ln>
+          <a:effectLst>
+            <a:outerShdw sx="100000" sy="100000" kx="0" ky="0" algn="bl" rotWithShape="0" blurRad="101600" dist="38100" dir="8100000">
+              <a:srgbClr val="000000">
+                <a:alpha val="12000"/>
+              </a:srgbClr>
+            </a:outerShdw>
+          </a:effectLst>
+        </p:spPr>
+      </p:sp>
+      <p:sp>
+        <p:nvSpPr>
+          <p:cNvPr id="23" name="Text 21"/>
+          <p:cNvSpPr/>
+          <p:nvPr/>
+        </p:nvSpPr>
+        <p:spPr>
+          <a:xfrm>
+            <a:off x="5329123" y="2258568"/>
+            <a:ext cx="1581912" cy="292608"/>
+          </a:xfrm>
+          <a:prstGeom prst="rect">
+            <a:avLst/>
+          </a:prstGeom>
+          <a:noFill/>
+          <a:ln/>
+        </p:spPr>
+        <p:txBody>
+          <a:bodyPr wrap="square" lIns="0" tIns="0" rIns="0" bIns="0" rtlCol="0" anchor="ctr"/>
+          <a:lstStyle/>
+          <a:p>
+            <a:pPr algn="ctr" indent="0" marL="0">
+              <a:buNone/>
+            </a:pPr>
+            <a:r>
+              <a:rPr lang="en-US" sz="1300" b="1" dirty="0">
+                <a:solidFill>
+                  <a:srgbClr val="9D174D"/>
+                </a:solidFill>
+                <a:latin typeface="Trebuchet MS" pitchFamily="34" charset="0"/>
+                <a:ea typeface="Trebuchet MS" pitchFamily="34" charset="-122"/>
+                <a:cs typeface="Trebuchet MS" pitchFamily="34" charset="-120"/>
+              </a:rPr>
+              <a:t>i</a:t>
+            </a:r>
+            <a:endParaRPr lang="en-US" sz="1300" dirty="0"/>
+          </a:p>
+        </p:txBody>
+      </p:sp>
+      <p:sp>
+        <p:nvSpPr>
+          <p:cNvPr id="24" name="Text 22"/>
+          <p:cNvSpPr/>
+          <p:nvPr/>
+        </p:nvSpPr>
+        <p:spPr>
+          <a:xfrm>
+            <a:off x="5329123" y="2569464"/>
+            <a:ext cx="1581912" cy="201168"/>
+          </a:xfrm>
+          <a:prstGeom prst="rect">
+            <a:avLst/>
+          </a:prstGeom>
+          <a:noFill/>
+          <a:ln/>
+        </p:spPr>
+        <p:txBody>
+          <a:bodyPr wrap="square" lIns="0" tIns="0" rIns="0" bIns="0" rtlCol="0" anchor="t"/>
+          <a:lstStyle/>
+          <a:p>
+            <a:pPr algn="ctr" indent="0" marL="0">
+              <a:buNone/>
+            </a:pPr>
+            <a:r>
+              <a:rPr lang="en-US" sz="850" dirty="0">
+                <a:solidFill>
+                  <a:srgbClr val="475569"/>
+                </a:solidFill>
+                <a:latin typeface="Calibri" pitchFamily="34" charset="0"/>
+                <a:ea typeface="Calibri" pitchFamily="34" charset="-122"/>
+                <a:cs typeface="Calibri" pitchFamily="34" charset="-120"/>
+              </a:rPr>
+              <a:t>connecting vowel</a:t>
+            </a:r>
+            <a:endParaRPr lang="en-US" sz="850" dirty="0"/>
+          </a:p>
+        </p:txBody>
+      </p:sp>
+      <p:sp>
+        <p:nvSpPr>
+          <p:cNvPr id="25" name="Text 23"/>
+          <p:cNvSpPr/>
+          <p:nvPr/>
+        </p:nvSpPr>
+        <p:spPr>
+          <a:xfrm>
+            <a:off x="5329123" y="2752344"/>
+            <a:ext cx="1581912" cy="182880"/>
+          </a:xfrm>
+          <a:prstGeom prst="rect">
+            <a:avLst/>
+          </a:prstGeom>
+          <a:noFill/>
+          <a:ln/>
+        </p:spPr>
+        <p:txBody>
+          <a:bodyPr wrap="square" lIns="0" tIns="0" rIns="0" bIns="0" rtlCol="0" anchor="t"/>
+          <a:lstStyle/>
+          <a:p>
+            <a:pPr algn="ctr" indent="0" marL="0">
+              <a:buNone/>
+            </a:pPr>
+            <a:r>
+              <a:rPr lang="en-US" sz="700" i="1" dirty="0">
+                <a:solidFill>
+                  <a:srgbClr val="94A3B8"/>
+                </a:solidFill>
+                <a:latin typeface="Calibri" pitchFamily="34" charset="0"/>
+                <a:ea typeface="Calibri" pitchFamily="34" charset="-122"/>
+                <a:cs typeface="Calibri" pitchFamily="34" charset="-120"/>
+              </a:rPr>
+              <a:t>'y' changes to 'i' before suffix</a:t>
+            </a:r>
+            <a:endParaRPr lang="en-US" sz="700" dirty="0"/>
+          </a:p>
+        </p:txBody>
+      </p:sp>
+      <p:sp>
+        <p:nvSpPr>
+          <p:cNvPr id="26" name="Shape 24"/>
+          <p:cNvSpPr/>
+          <p:nvPr/>
+        </p:nvSpPr>
+        <p:spPr>
+          <a:xfrm>
+            <a:off x="6998818" y="2258568"/>
+            <a:ext cx="1581912" cy="292608"/>
+          </a:xfrm>
+          <a:prstGeom prst="rect">
+            <a:avLst>
+              <a:gd name="adj" fmla="val 25000"/>
+            </a:avLst>
+          </a:prstGeom>
+          <a:solidFill>
+            <a:srgbClr val="FCE7F3"/>
+          </a:solidFill>
+          <a:ln w="19050">
+            <a:solidFill>
+              <a:srgbClr val="DB2777"/>
+            </a:solidFill>
+            <a:prstDash val="solid"/>
+          </a:ln>
+          <a:effectLst>
+            <a:outerShdw sx="100000" sy="100000" kx="0" ky="0" algn="bl" rotWithShape="0" blurRad="101600" dist="38100" dir="8100000">
+              <a:srgbClr val="000000">
+                <a:alpha val="12000"/>
+              </a:srgbClr>
+            </a:outerShdw>
+          </a:effectLst>
+        </p:spPr>
+      </p:sp>
+      <p:sp>
+        <p:nvSpPr>
+          <p:cNvPr id="27" name="Text 25"/>
+          <p:cNvSpPr/>
+          <p:nvPr/>
+        </p:nvSpPr>
+        <p:spPr>
+          <a:xfrm>
+            <a:off x="6998818" y="2258568"/>
+            <a:ext cx="1581912" cy="292608"/>
+          </a:xfrm>
+          <a:prstGeom prst="rect">
+            <a:avLst/>
+          </a:prstGeom>
+          <a:noFill/>
+          <a:ln/>
+        </p:spPr>
+        <p:txBody>
+          <a:bodyPr wrap="square" lIns="0" tIns="0" rIns="0" bIns="0" rtlCol="0" anchor="ctr"/>
+          <a:lstStyle/>
+          <a:p>
+            <a:pPr algn="ctr" indent="0" marL="0">
+              <a:buNone/>
+            </a:pPr>
+            <a:r>
+              <a:rPr lang="en-US" sz="1300" b="1" dirty="0">
+                <a:solidFill>
+                  <a:srgbClr val="9D174D"/>
+                </a:solidFill>
+                <a:latin typeface="Trebuchet MS" pitchFamily="34" charset="0"/>
+                <a:ea typeface="Trebuchet MS" pitchFamily="34" charset="-122"/>
+                <a:cs typeface="Trebuchet MS" pitchFamily="34" charset="-120"/>
+              </a:rPr>
+              <a:t>es</a:t>
+            </a:r>
+            <a:endParaRPr lang="en-US" sz="1300" dirty="0"/>
+          </a:p>
+        </p:txBody>
+      </p:sp>
+      <p:sp>
+        <p:nvSpPr>
+          <p:cNvPr id="28" name="Text 26"/>
+          <p:cNvSpPr/>
+          <p:nvPr/>
+        </p:nvSpPr>
+        <p:spPr>
+          <a:xfrm>
+            <a:off x="6998818" y="2569464"/>
+            <a:ext cx="1581912" cy="201168"/>
+          </a:xfrm>
+          <a:prstGeom prst="rect">
+            <a:avLst/>
+          </a:prstGeom>
+          <a:noFill/>
+          <a:ln/>
+        </p:spPr>
+        <p:txBody>
+          <a:bodyPr wrap="square" lIns="0" tIns="0" rIns="0" bIns="0" rtlCol="0" anchor="t"/>
+          <a:lstStyle/>
+          <a:p>
+            <a:pPr algn="ctr" indent="0" marL="0">
+              <a:buNone/>
+            </a:pPr>
+            <a:r>
+              <a:rPr lang="en-US" sz="850" dirty="0">
+                <a:solidFill>
+                  <a:srgbClr val="475569"/>
+                </a:solidFill>
+                <a:latin typeface="Calibri" pitchFamily="34" charset="0"/>
+                <a:ea typeface="Calibri" pitchFamily="34" charset="-122"/>
+                <a:cs typeface="Calibri" pitchFamily="34" charset="-120"/>
+              </a:rPr>
+              <a:t>more than one</a:t>
+            </a:r>
+            <a:endParaRPr lang="en-US" sz="850" dirty="0"/>
+          </a:p>
+        </p:txBody>
+      </p:sp>
+      <p:sp>
+        <p:nvSpPr>
+          <p:cNvPr id="29" name="Shape 27"/>
           <p:cNvSpPr/>
           <p:nvPr/>
         </p:nvSpPr>
@@ -32281,7 +33184,7 @@
       </p:sp>
       <p:sp>
         <p:nvSpPr>
-          <p:cNvPr id="23" name="Text 21"/>
+          <p:cNvPr id="30" name="Text 28"/>
           <p:cNvSpPr/>
           <p:nvPr/>
         </p:nvSpPr>
@@ -32320,7 +33223,7 @@
       </p:sp>
       <p:sp>
         <p:nvSpPr>
-          <p:cNvPr id="24" name="Shape 22"/>
+          <p:cNvPr id="31" name="Shape 29"/>
           <p:cNvSpPr/>
           <p:nvPr/>
         </p:nvSpPr>
@@ -32347,7 +33250,7 @@
       </p:sp>
       <p:sp>
         <p:nvSpPr>
-          <p:cNvPr id="25" name="Shape 23"/>
+          <p:cNvPr id="32" name="Shape 30"/>
           <p:cNvSpPr/>
           <p:nvPr/>
         </p:nvSpPr>
@@ -32374,7 +33277,7 @@
       </p:sp>
       <p:sp>
         <p:nvSpPr>
-          <p:cNvPr id="26" name="Text 24"/>
+          <p:cNvPr id="33" name="Text 31"/>
           <p:cNvSpPr/>
           <p:nvPr/>
         </p:nvSpPr>
@@ -32405,7 +33308,7 @@
                 <a:ea typeface="Trebuchet MS" pitchFamily="34" charset="-122"/>
                 <a:cs typeface="Trebuchet MS" pitchFamily="34" charset="-120"/>
               </a:rPr>
-              <a:t>meg</a:t>
+              <a:t>me</a:t>
             </a:r>
             <a:endParaRPr lang="en-US" sz="1400" dirty="0"/>
           </a:p>
@@ -32413,7 +33316,7 @@
       </p:sp>
       <p:sp>
         <p:nvSpPr>
-          <p:cNvPr id="27" name="Text 25"/>
+          <p:cNvPr id="34" name="Text 32"/>
           <p:cNvSpPr/>
           <p:nvPr/>
         </p:nvSpPr>
@@ -32452,7 +33355,7 @@
       </p:sp>
       <p:sp>
         <p:nvSpPr>
-          <p:cNvPr id="28" name="Shape 26"/>
+          <p:cNvPr id="35" name="Shape 33"/>
           <p:cNvSpPr/>
           <p:nvPr/>
         </p:nvSpPr>
@@ -32479,7 +33382,7 @@
       </p:sp>
       <p:sp>
         <p:nvSpPr>
-          <p:cNvPr id="29" name="Text 27"/>
+          <p:cNvPr id="36" name="Text 34"/>
           <p:cNvSpPr/>
           <p:nvPr/>
         </p:nvSpPr>
@@ -32510,7 +33413,7 @@
                 <a:ea typeface="Trebuchet MS" pitchFamily="34" charset="-122"/>
                 <a:cs typeface="Trebuchet MS" pitchFamily="34" charset="-120"/>
               </a:rPr>
-              <a:t>a</a:t>
+              <a:t>ga</a:t>
             </a:r>
             <a:endParaRPr lang="en-US" sz="1400" dirty="0"/>
           </a:p>
@@ -32518,7 +33421,7 @@
       </p:sp>
       <p:sp>
         <p:nvSpPr>
-          <p:cNvPr id="30" name="Text 28"/>
+          <p:cNvPr id="37" name="Text 35"/>
           <p:cNvSpPr/>
           <p:nvPr/>
         </p:nvSpPr>
@@ -32557,7 +33460,7 @@
       </p:sp>
       <p:sp>
         <p:nvSpPr>
-          <p:cNvPr id="31" name="Shape 29"/>
+          <p:cNvPr id="38" name="Shape 36"/>
           <p:cNvSpPr/>
           <p:nvPr/>
         </p:nvSpPr>
@@ -32584,7 +33487,7 @@
       </p:sp>
       <p:sp>
         <p:nvSpPr>
-          <p:cNvPr id="32" name="Text 30"/>
+          <p:cNvPr id="39" name="Text 37"/>
           <p:cNvSpPr/>
           <p:nvPr/>
         </p:nvSpPr>
@@ -32615,7 +33518,7 @@
                 <a:ea typeface="Trebuchet MS" pitchFamily="34" charset="-122"/>
                 <a:cs typeface="Trebuchet MS" pitchFamily="34" charset="-120"/>
               </a:rPr>
-              <a:t>con</a:t>
+              <a:t>ci</a:t>
             </a:r>
             <a:endParaRPr lang="en-US" sz="1400" dirty="0"/>
           </a:p>
@@ -32623,7 +33526,7 @@
       </p:sp>
       <p:sp>
         <p:nvSpPr>
-          <p:cNvPr id="33" name="Text 31"/>
+          <p:cNvPr id="40" name="Text 38"/>
           <p:cNvSpPr/>
           <p:nvPr/>
         </p:nvSpPr>
@@ -32662,7 +33565,7 @@
       </p:sp>
       <p:sp>
         <p:nvSpPr>
-          <p:cNvPr id="34" name="Shape 32"/>
+          <p:cNvPr id="41" name="Shape 39"/>
           <p:cNvSpPr/>
           <p:nvPr/>
         </p:nvSpPr>
@@ -32689,7 +33592,7 @@
       </p:sp>
       <p:sp>
         <p:nvSpPr>
-          <p:cNvPr id="35" name="Text 33"/>
+          <p:cNvPr id="42" name="Text 40"/>
           <p:cNvSpPr/>
           <p:nvPr/>
         </p:nvSpPr>
@@ -32720,7 +33623,7 @@
                 <a:ea typeface="Trebuchet MS" pitchFamily="34" charset="-122"/>
                 <a:cs typeface="Trebuchet MS" pitchFamily="34" charset="-120"/>
               </a:rPr>
-              <a:t>cert</a:t>
+              <a:t>ties</a:t>
             </a:r>
             <a:endParaRPr lang="en-US" sz="1400" dirty="0"/>
           </a:p>
@@ -32728,7 +33631,7 @@
       </p:sp>
       <p:sp>
         <p:nvSpPr>
-          <p:cNvPr id="36" name="Shape 34"/>
+          <p:cNvPr id="43" name="Shape 41"/>
           <p:cNvSpPr/>
           <p:nvPr/>
         </p:nvSpPr>
@@ -32755,7 +33658,7 @@
       </p:sp>
       <p:sp>
         <p:nvSpPr>
-          <p:cNvPr id="37" name="Text 35"/>
+          <p:cNvPr id="44" name="Text 42"/>
           <p:cNvSpPr/>
           <p:nvPr/>
         </p:nvSpPr>
@@ -32794,18 +33697,18 @@
       </p:sp>
       <p:sp>
         <p:nvSpPr>
-          <p:cNvPr id="38" name="Shape 36"/>
+          <p:cNvPr id="45" name="Shape 43"/>
           <p:cNvSpPr/>
           <p:nvPr/>
         </p:nvSpPr>
         <p:spPr>
           <a:xfrm>
             <a:off x="1874520" y="4096512"/>
-            <a:ext cx="6903720" cy="658368"/>
+            <a:ext cx="6903720" cy="804672"/>
           </a:xfrm>
           <a:prstGeom prst="rect">
             <a:avLst>
-              <a:gd name="adj" fmla="val 8333"/>
+              <a:gd name="adj" fmla="val 6818"/>
             </a:avLst>
           </a:prstGeom>
           <a:solidFill>
@@ -32821,18 +33724,18 @@
       </p:sp>
       <p:sp>
         <p:nvSpPr>
-          <p:cNvPr id="39" name="Shape 37"/>
-          <p:cNvSpPr/>
-          <p:nvPr/>
-        </p:nvSpPr>
-        <p:spPr>
-          <a:xfrm>
-            <a:off x="1951828" y="4169664"/>
-            <a:ext cx="603504" cy="475488"/>
+          <p:cNvPr id="46" name="Shape 44"/>
+          <p:cNvSpPr/>
+          <p:nvPr/>
+        </p:nvSpPr>
+        <p:spPr>
+          <a:xfrm>
+            <a:off x="1951330" y="4169664"/>
+            <a:ext cx="676656" cy="384048"/>
           </a:xfrm>
           <a:prstGeom prst="rect">
             <a:avLst>
-              <a:gd name="adj" fmla="val 7692"/>
+              <a:gd name="adj" fmla="val 9524"/>
             </a:avLst>
           </a:prstGeom>
           <a:solidFill>
@@ -32848,14 +33751,14 @@
       </p:sp>
       <p:sp>
         <p:nvSpPr>
-          <p:cNvPr id="40" name="Text 38"/>
-          <p:cNvSpPr/>
-          <p:nvPr/>
-        </p:nvSpPr>
-        <p:spPr>
-          <a:xfrm>
-            <a:off x="1951828" y="4169664"/>
-            <a:ext cx="603504" cy="475488"/>
+          <p:cNvPr id="47" name="Text 45"/>
+          <p:cNvSpPr/>
+          <p:nvPr/>
+        </p:nvSpPr>
+        <p:spPr>
+          <a:xfrm>
+            <a:off x="1951330" y="4169664"/>
+            <a:ext cx="676656" cy="384048"/>
           </a:xfrm>
           <a:prstGeom prst="rect">
             <a:avLst/>
@@ -32887,18 +33790,18 @@
       </p:sp>
       <p:sp>
         <p:nvSpPr>
-          <p:cNvPr id="41" name="Shape 39"/>
-          <p:cNvSpPr/>
-          <p:nvPr/>
-        </p:nvSpPr>
-        <p:spPr>
-          <a:xfrm>
-            <a:off x="2605209" y="4169664"/>
-            <a:ext cx="603504" cy="475488"/>
+          <p:cNvPr id="48" name="Shape 46"/>
+          <p:cNvSpPr/>
+          <p:nvPr/>
+        </p:nvSpPr>
+        <p:spPr>
+          <a:xfrm>
+            <a:off x="2677363" y="4169664"/>
+            <a:ext cx="676656" cy="384048"/>
           </a:xfrm>
           <a:prstGeom prst="rect">
             <a:avLst>
-              <a:gd name="adj" fmla="val 7692"/>
+              <a:gd name="adj" fmla="val 9524"/>
             </a:avLst>
           </a:prstGeom>
           <a:solidFill>
@@ -32914,14 +33817,14 @@
       </p:sp>
       <p:sp>
         <p:nvSpPr>
-          <p:cNvPr id="42" name="Text 40"/>
-          <p:cNvSpPr/>
-          <p:nvPr/>
-        </p:nvSpPr>
-        <p:spPr>
-          <a:xfrm>
-            <a:off x="2605209" y="4169664"/>
-            <a:ext cx="603504" cy="475488"/>
+          <p:cNvPr id="49" name="Text 47"/>
+          <p:cNvSpPr/>
+          <p:nvPr/>
+        </p:nvSpPr>
+        <p:spPr>
+          <a:xfrm>
+            <a:off x="2677363" y="4169664"/>
+            <a:ext cx="676656" cy="384048"/>
           </a:xfrm>
           <a:prstGeom prst="rect">
             <a:avLst/>
@@ -32953,18 +33856,18 @@
       </p:sp>
       <p:sp>
         <p:nvSpPr>
-          <p:cNvPr id="43" name="Shape 41"/>
-          <p:cNvSpPr/>
-          <p:nvPr/>
-        </p:nvSpPr>
-        <p:spPr>
-          <a:xfrm>
-            <a:off x="3258589" y="4169664"/>
-            <a:ext cx="603504" cy="475488"/>
+          <p:cNvPr id="50" name="Shape 48"/>
+          <p:cNvSpPr/>
+          <p:nvPr/>
+        </p:nvSpPr>
+        <p:spPr>
+          <a:xfrm>
+            <a:off x="3403397" y="4169664"/>
+            <a:ext cx="676656" cy="384048"/>
           </a:xfrm>
           <a:prstGeom prst="rect">
             <a:avLst>
-              <a:gd name="adj" fmla="val 7692"/>
+              <a:gd name="adj" fmla="val 9524"/>
             </a:avLst>
           </a:prstGeom>
           <a:solidFill>
@@ -32980,14 +33883,14 @@
       </p:sp>
       <p:sp>
         <p:nvSpPr>
-          <p:cNvPr id="44" name="Text 42"/>
-          <p:cNvSpPr/>
-          <p:nvPr/>
-        </p:nvSpPr>
-        <p:spPr>
-          <a:xfrm>
-            <a:off x="3258589" y="4169664"/>
-            <a:ext cx="603504" cy="475488"/>
+          <p:cNvPr id="51" name="Text 49"/>
+          <p:cNvSpPr/>
+          <p:nvPr/>
+        </p:nvSpPr>
+        <p:spPr>
+          <a:xfrm>
+            <a:off x="3403397" y="4169664"/>
+            <a:ext cx="676656" cy="384048"/>
           </a:xfrm>
           <a:prstGeom prst="rect">
             <a:avLst/>
@@ -33019,18 +33922,18 @@
       </p:sp>
       <p:sp>
         <p:nvSpPr>
-          <p:cNvPr id="45" name="Shape 43"/>
-          <p:cNvSpPr/>
-          <p:nvPr/>
-        </p:nvSpPr>
-        <p:spPr>
-          <a:xfrm>
-            <a:off x="3911969" y="4169664"/>
-            <a:ext cx="603504" cy="475488"/>
+          <p:cNvPr id="52" name="Shape 50"/>
+          <p:cNvSpPr/>
+          <p:nvPr/>
+        </p:nvSpPr>
+        <p:spPr>
+          <a:xfrm>
+            <a:off x="4129430" y="4169664"/>
+            <a:ext cx="676656" cy="384048"/>
           </a:xfrm>
           <a:prstGeom prst="rect">
             <a:avLst>
-              <a:gd name="adj" fmla="val 7692"/>
+              <a:gd name="adj" fmla="val 9524"/>
             </a:avLst>
           </a:prstGeom>
           <a:solidFill>
@@ -33046,14 +33949,14 @@
       </p:sp>
       <p:sp>
         <p:nvSpPr>
-          <p:cNvPr id="46" name="Text 44"/>
-          <p:cNvSpPr/>
-          <p:nvPr/>
-        </p:nvSpPr>
-        <p:spPr>
-          <a:xfrm>
-            <a:off x="3911969" y="4169664"/>
-            <a:ext cx="603504" cy="475488"/>
+          <p:cNvPr id="53" name="Text 51"/>
+          <p:cNvSpPr/>
+          <p:nvPr/>
+        </p:nvSpPr>
+        <p:spPr>
+          <a:xfrm>
+            <a:off x="4129430" y="4169664"/>
+            <a:ext cx="676656" cy="384048"/>
           </a:xfrm>
           <a:prstGeom prst="rect">
             <a:avLst/>
@@ -33085,18 +33988,18 @@
       </p:sp>
       <p:sp>
         <p:nvSpPr>
-          <p:cNvPr id="47" name="Shape 45"/>
-          <p:cNvSpPr/>
-          <p:nvPr/>
-        </p:nvSpPr>
-        <p:spPr>
-          <a:xfrm>
-            <a:off x="4565350" y="4169664"/>
-            <a:ext cx="603504" cy="475488"/>
+          <p:cNvPr id="54" name="Shape 52"/>
+          <p:cNvSpPr/>
+          <p:nvPr/>
+        </p:nvSpPr>
+        <p:spPr>
+          <a:xfrm>
+            <a:off x="4855464" y="4169664"/>
+            <a:ext cx="676656" cy="384048"/>
           </a:xfrm>
           <a:prstGeom prst="rect">
             <a:avLst>
-              <a:gd name="adj" fmla="val 7692"/>
+              <a:gd name="adj" fmla="val 9524"/>
             </a:avLst>
           </a:prstGeom>
           <a:solidFill>
@@ -33112,14 +34015,14 @@
       </p:sp>
       <p:sp>
         <p:nvSpPr>
-          <p:cNvPr id="48" name="Text 46"/>
-          <p:cNvSpPr/>
-          <p:nvPr/>
-        </p:nvSpPr>
-        <p:spPr>
-          <a:xfrm>
-            <a:off x="4565350" y="4169664"/>
-            <a:ext cx="603504" cy="475488"/>
+          <p:cNvPr id="55" name="Text 53"/>
+          <p:cNvSpPr/>
+          <p:nvPr/>
+        </p:nvSpPr>
+        <p:spPr>
+          <a:xfrm>
+            <a:off x="4855464" y="4169664"/>
+            <a:ext cx="676656" cy="384048"/>
           </a:xfrm>
           <a:prstGeom prst="rect">
             <a:avLst/>
@@ -33151,18 +34054,57 @@
       </p:sp>
       <p:sp>
         <p:nvSpPr>
-          <p:cNvPr id="49" name="Shape 47"/>
-          <p:cNvSpPr/>
-          <p:nvPr/>
-        </p:nvSpPr>
-        <p:spPr>
-          <a:xfrm>
-            <a:off x="5218730" y="4169664"/>
-            <a:ext cx="603504" cy="475488"/>
+          <p:cNvPr id="56" name="Text 54"/>
+          <p:cNvSpPr/>
+          <p:nvPr/>
+        </p:nvSpPr>
+        <p:spPr>
+          <a:xfrm>
+            <a:off x="4855464" y="4572000"/>
+            <a:ext cx="676656" cy="219456"/>
+          </a:xfrm>
+          <a:prstGeom prst="rect">
+            <a:avLst/>
+          </a:prstGeom>
+          <a:noFill/>
+          <a:ln/>
+        </p:spPr>
+        <p:txBody>
+          <a:bodyPr wrap="square" lIns="0" tIns="0" rIns="0" bIns="0" rtlCol="0" anchor="t"/>
+          <a:lstStyle/>
+          <a:p>
+            <a:pPr algn="ctr" indent="0" marL="0">
+              <a:buNone/>
+            </a:pPr>
+            <a:r>
+              <a:rPr lang="en-US" sz="750" i="1" dirty="0">
+                <a:solidFill>
+                  <a:srgbClr val="94A3B8"/>
+                </a:solidFill>
+                <a:latin typeface="Calibri" pitchFamily="34" charset="0"/>
+                <a:ea typeface="Calibri" pitchFamily="34" charset="-122"/>
+                <a:cs typeface="Calibri" pitchFamily="34" charset="-120"/>
+              </a:rPr>
+              <a:t>/s/</a:t>
+            </a:r>
+            <a:endParaRPr lang="en-US" sz="750" dirty="0"/>
+          </a:p>
+        </p:txBody>
+      </p:sp>
+      <p:sp>
+        <p:nvSpPr>
+          <p:cNvPr id="57" name="Shape 55"/>
+          <p:cNvSpPr/>
+          <p:nvPr/>
+        </p:nvSpPr>
+        <p:spPr>
+          <a:xfrm>
+            <a:off x="5581498" y="4169664"/>
+            <a:ext cx="676656" cy="384048"/>
           </a:xfrm>
           <a:prstGeom prst="rect">
             <a:avLst>
-              <a:gd name="adj" fmla="val 7692"/>
+              <a:gd name="adj" fmla="val 9524"/>
             </a:avLst>
           </a:prstGeom>
           <a:solidFill>
@@ -33178,14 +34120,14 @@
       </p:sp>
       <p:sp>
         <p:nvSpPr>
-          <p:cNvPr id="50" name="Text 48"/>
-          <p:cNvSpPr/>
-          <p:nvPr/>
-        </p:nvSpPr>
-        <p:spPr>
-          <a:xfrm>
-            <a:off x="5218730" y="4169664"/>
-            <a:ext cx="603504" cy="475488"/>
+          <p:cNvPr id="58" name="Text 56"/>
+          <p:cNvSpPr/>
+          <p:nvPr/>
+        </p:nvSpPr>
+        <p:spPr>
+          <a:xfrm>
+            <a:off x="5581498" y="4169664"/>
+            <a:ext cx="676656" cy="384048"/>
           </a:xfrm>
           <a:prstGeom prst="rect">
             <a:avLst/>
@@ -33209,7 +34151,7 @@
                 <a:ea typeface="Trebuchet MS" pitchFamily="34" charset="-122"/>
                 <a:cs typeface="Trebuchet MS" pitchFamily="34" charset="-120"/>
               </a:rPr>
-              <a:t>o</a:t>
+              <a:t>i</a:t>
             </a:r>
             <a:endParaRPr lang="en-US" sz="900" dirty="0"/>
           </a:p>
@@ -33217,18 +34159,18 @@
       </p:sp>
       <p:sp>
         <p:nvSpPr>
-          <p:cNvPr id="51" name="Shape 49"/>
-          <p:cNvSpPr/>
-          <p:nvPr/>
-        </p:nvSpPr>
-        <p:spPr>
-          <a:xfrm>
-            <a:off x="5872111" y="4169664"/>
-            <a:ext cx="603504" cy="475488"/>
+          <p:cNvPr id="59" name="Shape 57"/>
+          <p:cNvSpPr/>
+          <p:nvPr/>
+        </p:nvSpPr>
+        <p:spPr>
+          <a:xfrm>
+            <a:off x="6307531" y="4169664"/>
+            <a:ext cx="676656" cy="384048"/>
           </a:xfrm>
           <a:prstGeom prst="rect">
             <a:avLst>
-              <a:gd name="adj" fmla="val 7692"/>
+              <a:gd name="adj" fmla="val 9524"/>
             </a:avLst>
           </a:prstGeom>
           <a:solidFill>
@@ -33244,14 +34186,14 @@
       </p:sp>
       <p:sp>
         <p:nvSpPr>
-          <p:cNvPr id="52" name="Text 50"/>
-          <p:cNvSpPr/>
-          <p:nvPr/>
-        </p:nvSpPr>
-        <p:spPr>
-          <a:xfrm>
-            <a:off x="5872111" y="4169664"/>
-            <a:ext cx="603504" cy="475488"/>
+          <p:cNvPr id="60" name="Text 58"/>
+          <p:cNvSpPr/>
+          <p:nvPr/>
+        </p:nvSpPr>
+        <p:spPr>
+          <a:xfrm>
+            <a:off x="6307531" y="4169664"/>
+            <a:ext cx="676656" cy="384048"/>
           </a:xfrm>
           <a:prstGeom prst="rect">
             <a:avLst/>
@@ -33275,7 +34217,7 @@
                 <a:ea typeface="Trebuchet MS" pitchFamily="34" charset="-122"/>
                 <a:cs typeface="Trebuchet MS" pitchFamily="34" charset="-120"/>
               </a:rPr>
-              <a:t>n</a:t>
+              <a:t>t</a:t>
             </a:r>
             <a:endParaRPr lang="en-US" sz="900" dirty="0"/>
           </a:p>
@@ -33283,18 +34225,18 @@
       </p:sp>
       <p:sp>
         <p:nvSpPr>
-          <p:cNvPr id="53" name="Shape 51"/>
-          <p:cNvSpPr/>
-          <p:nvPr/>
-        </p:nvSpPr>
-        <p:spPr>
-          <a:xfrm>
-            <a:off x="6525491" y="4169664"/>
-            <a:ext cx="603504" cy="475488"/>
+          <p:cNvPr id="61" name="Shape 59"/>
+          <p:cNvSpPr/>
+          <p:nvPr/>
+        </p:nvSpPr>
+        <p:spPr>
+          <a:xfrm>
+            <a:off x="7033565" y="4169664"/>
+            <a:ext cx="676656" cy="384048"/>
           </a:xfrm>
           <a:prstGeom prst="rect">
             <a:avLst>
-              <a:gd name="adj" fmla="val 7692"/>
+              <a:gd name="adj" fmla="val 9524"/>
             </a:avLst>
           </a:prstGeom>
           <a:solidFill>
@@ -33310,14 +34252,14 @@
       </p:sp>
       <p:sp>
         <p:nvSpPr>
-          <p:cNvPr id="54" name="Text 52"/>
-          <p:cNvSpPr/>
-          <p:nvPr/>
-        </p:nvSpPr>
-        <p:spPr>
-          <a:xfrm>
-            <a:off x="6525491" y="4169664"/>
-            <a:ext cx="603504" cy="475488"/>
+          <p:cNvPr id="62" name="Text 60"/>
+          <p:cNvSpPr/>
+          <p:nvPr/>
+        </p:nvSpPr>
+        <p:spPr>
+          <a:xfrm>
+            <a:off x="7033565" y="4169664"/>
+            <a:ext cx="676656" cy="384048"/>
           </a:xfrm>
           <a:prstGeom prst="rect">
             <a:avLst/>
@@ -33341,7 +34283,7 @@
                 <a:ea typeface="Trebuchet MS" pitchFamily="34" charset="-122"/>
                 <a:cs typeface="Trebuchet MS" pitchFamily="34" charset="-120"/>
               </a:rPr>
-              <a:t>c</a:t>
+              <a:t>ie</a:t>
             </a:r>
             <a:endParaRPr lang="en-US" sz="900" dirty="0"/>
           </a:p>
@@ -33349,18 +34291,18 @@
       </p:sp>
       <p:sp>
         <p:nvSpPr>
-          <p:cNvPr id="55" name="Shape 53"/>
-          <p:cNvSpPr/>
-          <p:nvPr/>
-        </p:nvSpPr>
-        <p:spPr>
-          <a:xfrm>
-            <a:off x="7178871" y="4169664"/>
-            <a:ext cx="603504" cy="475488"/>
+          <p:cNvPr id="63" name="Shape 61"/>
+          <p:cNvSpPr/>
+          <p:nvPr/>
+        </p:nvSpPr>
+        <p:spPr>
+          <a:xfrm>
+            <a:off x="7759598" y="4169664"/>
+            <a:ext cx="676656" cy="384048"/>
           </a:xfrm>
           <a:prstGeom prst="rect">
             <a:avLst>
-              <a:gd name="adj" fmla="val 7692"/>
+              <a:gd name="adj" fmla="val 9524"/>
             </a:avLst>
           </a:prstGeom>
           <a:solidFill>
@@ -33376,14 +34318,14 @@
       </p:sp>
       <p:sp>
         <p:nvSpPr>
-          <p:cNvPr id="56" name="Text 54"/>
-          <p:cNvSpPr/>
-          <p:nvPr/>
-        </p:nvSpPr>
-        <p:spPr>
-          <a:xfrm>
-            <a:off x="7178871" y="4169664"/>
-            <a:ext cx="603504" cy="475488"/>
+          <p:cNvPr id="64" name="Text 62"/>
+          <p:cNvSpPr/>
+          <p:nvPr/>
+        </p:nvSpPr>
+        <p:spPr>
+          <a:xfrm>
+            <a:off x="7759598" y="4169664"/>
+            <a:ext cx="676656" cy="384048"/>
           </a:xfrm>
           <a:prstGeom prst="rect">
             <a:avLst/>
@@ -33407,73 +34349,7 @@
                 <a:ea typeface="Trebuchet MS" pitchFamily="34" charset="-122"/>
                 <a:cs typeface="Trebuchet MS" pitchFamily="34" charset="-120"/>
               </a:rPr>
-              <a:t>er</a:t>
-            </a:r>
-            <a:endParaRPr lang="en-US" sz="900" dirty="0"/>
-          </a:p>
-        </p:txBody>
-      </p:sp>
-      <p:sp>
-        <p:nvSpPr>
-          <p:cNvPr id="57" name="Shape 55"/>
-          <p:cNvSpPr/>
-          <p:nvPr/>
-        </p:nvSpPr>
-        <p:spPr>
-          <a:xfrm>
-            <a:off x="7832252" y="4169664"/>
-            <a:ext cx="603504" cy="475488"/>
-          </a:xfrm>
-          <a:prstGeom prst="rect">
-            <a:avLst>
-              <a:gd name="adj" fmla="val 7692"/>
-            </a:avLst>
-          </a:prstGeom>
-          <a:solidFill>
-            <a:srgbClr val="FFFFFF"/>
-          </a:solidFill>
-          <a:ln w="12700">
-            <a:solidFill>
-              <a:srgbClr val="DB2777"/>
-            </a:solidFill>
-            <a:prstDash val="solid"/>
-          </a:ln>
-        </p:spPr>
-      </p:sp>
-      <p:sp>
-        <p:nvSpPr>
-          <p:cNvPr id="58" name="Text 56"/>
-          <p:cNvSpPr/>
-          <p:nvPr/>
-        </p:nvSpPr>
-        <p:spPr>
-          <a:xfrm>
-            <a:off x="7832252" y="4169664"/>
-            <a:ext cx="603504" cy="475488"/>
-          </a:xfrm>
-          <a:prstGeom prst="rect">
-            <a:avLst/>
-          </a:prstGeom>
-          <a:noFill/>
-          <a:ln/>
-        </p:spPr>
-        <p:txBody>
-          <a:bodyPr wrap="square" lIns="0" tIns="0" rIns="0" bIns="0" rtlCol="0" anchor="ctr"/>
-          <a:lstStyle/>
-          <a:p>
-            <a:pPr algn="ctr" indent="0" marL="0">
-              <a:buNone/>
-            </a:pPr>
-            <a:r>
-              <a:rPr lang="en-US" sz="900" b="1" dirty="0">
-                <a:solidFill>
-                  <a:srgbClr val="9D174D"/>
-                </a:solidFill>
-                <a:latin typeface="Trebuchet MS" pitchFamily="34" charset="0"/>
-                <a:ea typeface="Trebuchet MS" pitchFamily="34" charset="-122"/>
-                <a:cs typeface="Trebuchet MS" pitchFamily="34" charset="-120"/>
-              </a:rPr>
-              <a:t>t</a:t>
+              <a:t>s</a:t>
             </a:r>
             <a:endParaRPr lang="en-US" sz="900" dirty="0"/>
           </a:p>
@@ -35516,7 +36392,7 @@
                 <a:ea typeface="Trebuchet MS" pitchFamily="34" charset="-122"/>
                 <a:cs typeface="Trebuchet MS" pitchFamily="34" charset="-120"/>
               </a:rPr>
-              <a:t>-ed</a:t>
+              <a:t>-ic</a:t>
             </a:r>
             <a:endParaRPr lang="en-US" sz="1300" dirty="0"/>
           </a:p>
@@ -35669,7 +36545,7 @@
                 <a:ea typeface="Trebuchet MS" pitchFamily="34" charset="-122"/>
                 <a:cs typeface="Trebuchet MS" pitchFamily="34" charset="-120"/>
               </a:rPr>
-              <a:t>-ing</a:t>
+              <a:t>-a</a:t>
             </a:r>
             <a:endParaRPr lang="en-US" sz="1300" dirty="0"/>
           </a:p>
@@ -35911,7 +36787,7 @@
                 <a:ea typeface="Trebuchet MS" pitchFamily="34" charset="-122"/>
                 <a:cs typeface="Trebuchet MS" pitchFamily="34" charset="-120"/>
               </a:rPr>
-              <a:t>city</a:t>
+              <a:t>ton</a:t>
             </a:r>
             <a:endParaRPr lang="en-US" sz="1300" dirty="0"/>
           </a:p>
@@ -35975,7 +36851,7 @@
                 <a:ea typeface="Trebuchet MS" pitchFamily="34" charset="-122"/>
                 <a:cs typeface="Trebuchet MS" pitchFamily="34" charset="-120"/>
               </a:rPr>
-              <a:t>-ton</a:t>
+              <a:t>-bytes</a:t>
             </a:r>
             <a:endParaRPr lang="en-US" sz="1300" dirty="0"/>
           </a:p>
@@ -36212,7 +37088,7 @@
                 <a:ea typeface="Trebuchet MS" pitchFamily="34" charset="-122"/>
                 <a:cs typeface="Trebuchet MS" pitchFamily="34" charset="-120"/>
               </a:rPr>
-              <a:t>megalith</a:t>
+              <a:t>megastar</a:t>
             </a:r>
             <a:endParaRPr lang="en-US" sz="1200" dirty="0"/>
           </a:p>
@@ -36278,7 +37154,7 @@
                 <a:ea typeface="Trebuchet MS" pitchFamily="34" charset="-122"/>
                 <a:cs typeface="Trebuchet MS" pitchFamily="34" charset="-120"/>
               </a:rPr>
-              <a:t>megacity</a:t>
+              <a:t>megalith</a:t>
             </a:r>
             <a:endParaRPr lang="en-US" sz="1200" dirty="0"/>
           </a:p>
@@ -36344,7 +37220,7 @@
                 <a:ea typeface="Trebuchet MS" pitchFamily="34" charset="-122"/>
                 <a:cs typeface="Trebuchet MS" pitchFamily="34" charset="-120"/>
               </a:rPr>
-              <a:t>megastar</a:t>
+              <a:t>megacity</a:t>
             </a:r>
             <a:endParaRPr lang="en-US" sz="1200" dirty="0"/>
           </a:p>
@@ -36410,7 +37286,7 @@
                 <a:ea typeface="Trebuchet MS" pitchFamily="34" charset="-122"/>
                 <a:cs typeface="Trebuchet MS" pitchFamily="34" charset="-120"/>
               </a:rPr>
-              <a:t>megapixel</a:t>
+              <a:t>megaton</a:t>
             </a:r>
             <a:endParaRPr lang="en-US" sz="1200" dirty="0"/>
           </a:p>
@@ -36476,7 +37352,7 @@
                 <a:ea typeface="Trebuchet MS" pitchFamily="34" charset="-122"/>
                 <a:cs typeface="Trebuchet MS" pitchFamily="34" charset="-120"/>
               </a:rPr>
-              <a:t>megaton</a:t>
+              <a:t>megalithic</a:t>
             </a:r>
             <a:endParaRPr lang="en-US" sz="1200" dirty="0"/>
           </a:p>
@@ -36542,7 +37418,7 @@
                 <a:ea typeface="Trebuchet MS" pitchFamily="34" charset="-122"/>
                 <a:cs typeface="Trebuchet MS" pitchFamily="34" charset="-120"/>
               </a:rPr>
-              <a:t>megalopolis</a:t>
+              <a:t>megapixel</a:t>
             </a:r>
             <a:endParaRPr lang="en-US" sz="1200" dirty="0"/>
           </a:p>
@@ -37869,7 +38745,7 @@
                 <a:ea typeface="Calibri" pitchFamily="34" charset="-122"/>
                 <a:cs typeface="Calibri" pitchFamily="34" charset="-120"/>
               </a:rPr>
-              <a:t>2.  A megaphone makes your voice quieter and softer.</a:t>
+              <a:t>2.  A megapixel is a unit that measures one million picture dots in a camera image.</a:t>
             </a:r>
             <a:endParaRPr lang="en-US" sz="1300" dirty="0"/>
           </a:p>
@@ -37892,11 +38768,11 @@
             </a:avLst>
           </a:prstGeom>
           <a:solidFill>
-            <a:srgbClr val="FEE2E2"/>
-          </a:solidFill>
-          <a:ln w="12700">
-            <a:solidFill>
-              <a:srgbClr val="DC2626"/>
+            <a:srgbClr val="DCFCE7"/>
+          </a:solidFill>
+          <a:ln w="12700">
+            <a:solidFill>
+              <a:srgbClr val="16A34A"/>
             </a:solidFill>
             <a:prstDash val="solid"/>
           </a:ln>
@@ -37929,13 +38805,13 @@
             <a:r>
               <a:rPr lang="en-US" sz="1100" b="1" dirty="0">
                 <a:solidFill>
-                  <a:srgbClr val="DC2626"/>
+                  <a:srgbClr val="16A34A"/>
                 </a:solidFill>
                 <a:latin typeface="Trebuchet MS" pitchFamily="34" charset="0"/>
                 <a:ea typeface="Trebuchet MS" pitchFamily="34" charset="-122"/>
                 <a:cs typeface="Trebuchet MS" pitchFamily="34" charset="-120"/>
               </a:rPr>
-              <a:t>FALSE</a:t>
+              <a:t>TRUE</a:t>
             </a:r>
             <a:endParaRPr lang="en-US" sz="1100" dirty="0"/>
           </a:p>
@@ -38008,7 +38884,7 @@
                 <a:ea typeface="Calibri" pitchFamily="34" charset="-122"/>
                 <a:cs typeface="Calibri" pitchFamily="34" charset="-120"/>
               </a:rPr>
-              <a:t>3.  The prefix 'mega-' can be used to describe something very big or powerful.</a:t>
+              <a:t>3.  The prefix 'mega-' means tiny or very small.</a:t>
             </a:r>
             <a:endParaRPr lang="en-US" sz="1300" dirty="0"/>
           </a:p>
@@ -38031,11 +38907,11 @@
             </a:avLst>
           </a:prstGeom>
           <a:solidFill>
-            <a:srgbClr val="DCFCE7"/>
-          </a:solidFill>
-          <a:ln w="12700">
-            <a:solidFill>
-              <a:srgbClr val="16A34A"/>
+            <a:srgbClr val="FEE2E2"/>
+          </a:solidFill>
+          <a:ln w="12700">
+            <a:solidFill>
+              <a:srgbClr val="DC2626"/>
             </a:solidFill>
             <a:prstDash val="solid"/>
           </a:ln>
@@ -38068,13 +38944,13 @@
             <a:r>
               <a:rPr lang="en-US" sz="1100" b="1" dirty="0">
                 <a:solidFill>
-                  <a:srgbClr val="16A34A"/>
+                  <a:srgbClr val="DC2626"/>
                 </a:solidFill>
                 <a:latin typeface="Trebuchet MS" pitchFamily="34" charset="0"/>
                 <a:ea typeface="Trebuchet MS" pitchFamily="34" charset="-122"/>
                 <a:cs typeface="Trebuchet MS" pitchFamily="34" charset="-120"/>
               </a:rPr>
-              <a:t>TRUE</a:t>
+              <a:t>FALSE</a:t>
             </a:r>
             <a:endParaRPr lang="en-US" sz="1100" dirty="0"/>
           </a:p>
@@ -38147,7 +39023,7 @@
                 <a:ea typeface="Calibri" pitchFamily="34" charset="-122"/>
                 <a:cs typeface="Calibri" pitchFamily="34" charset="-120"/>
               </a:rPr>
-              <a:t>4.  A megacity is a city with more than ten million people.</a:t>
+              <a:t>4.  A megaphone makes sounds louder and easier to hear from a distance.</a:t>
             </a:r>
             <a:endParaRPr lang="en-US" sz="1300" dirty="0"/>
           </a:p>
@@ -38286,7 +39162,7 @@
                 <a:ea typeface="Calibri" pitchFamily="34" charset="-122"/>
                 <a:cs typeface="Calibri" pitchFamily="34" charset="-120"/>
               </a:rPr>
-              <a:t>5.  The prefix 'mega-' means small or tiny.</a:t>
+              <a:t>5.  A megacity is a very small town with only a few hundred people.</a:t>
             </a:r>
             <a:endParaRPr lang="en-US" sz="1300" dirty="0"/>
           </a:p>
@@ -39057,7 +39933,7 @@
                 <a:ea typeface="Trebuchet MS" pitchFamily="34" charset="-122"/>
                 <a:cs typeface="Trebuchet MS" pitchFamily="34" charset="-120"/>
               </a:rPr>
-              <a:t>megalith</a:t>
+              <a:t>megastar</a:t>
             </a:r>
             <a:endParaRPr lang="en-US" sz="1300" dirty="0"/>
           </a:p>
@@ -39123,7 +39999,7 @@
                 <a:ea typeface="Trebuchet MS" pitchFamily="34" charset="-122"/>
                 <a:cs typeface="Trebuchet MS" pitchFamily="34" charset="-120"/>
               </a:rPr>
-              <a:t>megacity</a:t>
+              <a:t>megalith</a:t>
             </a:r>
             <a:endParaRPr lang="en-US" sz="1300" dirty="0"/>
           </a:p>
@@ -39189,7 +40065,7 @@
                 <a:ea typeface="Trebuchet MS" pitchFamily="34" charset="-122"/>
                 <a:cs typeface="Trebuchet MS" pitchFamily="34" charset="-120"/>
               </a:rPr>
-              <a:t>megastar</a:t>
+              <a:t>megacity</a:t>
             </a:r>
             <a:endParaRPr lang="en-US" sz="1300" dirty="0"/>
           </a:p>
@@ -39255,7 +40131,7 @@
                 <a:ea typeface="Trebuchet MS" pitchFamily="34" charset="-122"/>
                 <a:cs typeface="Trebuchet MS" pitchFamily="34" charset="-120"/>
               </a:rPr>
-              <a:t>megapixel</a:t>
+              <a:t>megaton</a:t>
             </a:r>
             <a:endParaRPr lang="en-US" sz="1300" dirty="0"/>
           </a:p>
@@ -39321,7 +40197,7 @@
                 <a:ea typeface="Trebuchet MS" pitchFamily="34" charset="-122"/>
                 <a:cs typeface="Trebuchet MS" pitchFamily="34" charset="-120"/>
               </a:rPr>
-              <a:t>megaton</a:t>
+              <a:t>megalithic</a:t>
             </a:r>
             <a:endParaRPr lang="en-US" sz="1300" dirty="0"/>
           </a:p>
@@ -40195,7 +41071,7 @@
                 <a:ea typeface="Trebuchet MS" pitchFamily="34" charset="-122"/>
                 <a:cs typeface="Trebuchet MS" pitchFamily="34" charset="-120"/>
               </a:rPr>
-              <a:t>-ed</a:t>
+              <a:t>-ic</a:t>
             </a:r>
             <a:endParaRPr lang="en-US" sz="1300" dirty="0"/>
           </a:p>
@@ -40348,7 +41224,7 @@
                 <a:ea typeface="Trebuchet MS" pitchFamily="34" charset="-122"/>
                 <a:cs typeface="Trebuchet MS" pitchFamily="34" charset="-120"/>
               </a:rPr>
-              <a:t>-ing</a:t>
+              <a:t>-a</a:t>
             </a:r>
             <a:endParaRPr lang="en-US" sz="1300" dirty="0"/>
           </a:p>
@@ -40590,7 +41466,7 @@
                 <a:ea typeface="Trebuchet MS" pitchFamily="34" charset="-122"/>
                 <a:cs typeface="Trebuchet MS" pitchFamily="34" charset="-120"/>
               </a:rPr>
-              <a:t>city</a:t>
+              <a:t>ton</a:t>
             </a:r>
             <a:endParaRPr lang="en-US" sz="1300" dirty="0"/>
           </a:p>
@@ -40654,7 +41530,7 @@
                 <a:ea typeface="Trebuchet MS" pitchFamily="34" charset="-122"/>
                 <a:cs typeface="Trebuchet MS" pitchFamily="34" charset="-120"/>
               </a:rPr>
-              <a:t>-ton</a:t>
+              <a:t>-bytes</a:t>
             </a:r>
             <a:endParaRPr lang="en-US" sz="1300" dirty="0"/>
           </a:p>
@@ -41565,7 +42441,7 @@
                 <a:ea typeface="Calibri" pitchFamily="34" charset="-122"/>
                 <a:cs typeface="Calibri" pitchFamily="34" charset="-120"/>
               </a:rPr>
-              <a:t>A unit used to measure huge amounts of energy, equal to one million tonnes of TNT.</a:t>
+              <a:t>Relating to structures built from huge ancient stones by prehistoric people.</a:t>
             </a:r>
             <a:endParaRPr lang="en-US" sz="1200" dirty="0"/>
           </a:p>
@@ -41704,7 +42580,7 @@
                 <a:ea typeface="Calibri" pitchFamily="34" charset="-122"/>
                 <a:cs typeface="Calibri" pitchFamily="34" charset="-120"/>
               </a:rPr>
-              <a:t>An enormous city with a population of more than ten million people.</a:t>
+              <a:t>A very large ancient stone used to build prehistoric monuments like Stonehenge.</a:t>
             </a:r>
             <a:endParaRPr lang="en-US" sz="1200" dirty="0"/>
           </a:p>
@@ -41777,7 +42653,7 @@
                 <a:ea typeface="Trebuchet MS" pitchFamily="34" charset="-122"/>
                 <a:cs typeface="Trebuchet MS" pitchFamily="34" charset="-120"/>
               </a:rPr>
-              <a:t>megalith</a:t>
+              <a:t>megastar</a:t>
             </a:r>
             <a:endParaRPr lang="en-US" sz="1200" dirty="0"/>
           </a:p>
@@ -41843,7 +42719,7 @@
                 <a:ea typeface="Calibri" pitchFamily="34" charset="-122"/>
                 <a:cs typeface="Calibri" pitchFamily="34" charset="-120"/>
               </a:rPr>
-              <a:t>An extremely famous and successful performer, such as a singer or actor.</a:t>
+              <a:t>An enormous city with a population of more than ten million people.</a:t>
             </a:r>
             <a:endParaRPr lang="en-US" sz="1200" dirty="0"/>
           </a:p>
@@ -41916,7 +42792,7 @@
                 <a:ea typeface="Trebuchet MS" pitchFamily="34" charset="-122"/>
                 <a:cs typeface="Trebuchet MS" pitchFamily="34" charset="-120"/>
               </a:rPr>
-              <a:t>megacity</a:t>
+              <a:t>megalith</a:t>
             </a:r>
             <a:endParaRPr lang="en-US" sz="1200" dirty="0"/>
           </a:p>
@@ -41982,7 +42858,7 @@
                 <a:ea typeface="Calibri" pitchFamily="34" charset="-122"/>
                 <a:cs typeface="Calibri" pitchFamily="34" charset="-120"/>
               </a:rPr>
-              <a:t>A very large stone used to build ancient monuments, like Stonehenge.</a:t>
+              <a:t>An extremely famous and popular celebrity, such as a top singer or actor.</a:t>
             </a:r>
             <a:endParaRPr lang="en-US" sz="1200" dirty="0"/>
           </a:p>
@@ -42055,7 +42931,7 @@
                 <a:ea typeface="Trebuchet MS" pitchFamily="34" charset="-122"/>
                 <a:cs typeface="Trebuchet MS" pitchFamily="34" charset="-120"/>
               </a:rPr>
-              <a:t>megastar</a:t>
+              <a:t>megacity</a:t>
             </a:r>
             <a:endParaRPr lang="en-US" sz="1200" dirty="0"/>
           </a:p>
@@ -42121,7 +42997,7 @@
                 <a:ea typeface="Calibri" pitchFamily="34" charset="-122"/>
                 <a:cs typeface="Calibri" pitchFamily="34" charset="-120"/>
               </a:rPr>
-              <a:t>One million pixels — used to measure how sharp and detailed a camera's photos are.</a:t>
+              <a:t>A unit of explosive power equal to one million tonnes of TNT — used to measure very powerful blasts.</a:t>
             </a:r>
             <a:endParaRPr lang="en-US" sz="1200" dirty="0"/>
           </a:p>
@@ -42194,7 +43070,7 @@
                 <a:ea typeface="Trebuchet MS" pitchFamily="34" charset="-122"/>
                 <a:cs typeface="Trebuchet MS" pitchFamily="34" charset="-120"/>
               </a:rPr>
-              <a:t>megapixel</a:t>
+              <a:t>megaton</a:t>
             </a:r>
             <a:endParaRPr lang="en-US" sz="1200" dirty="0"/>
           </a:p>
@@ -42333,7 +43209,7 @@
                 <a:ea typeface="Trebuchet MS" pitchFamily="34" charset="-122"/>
                 <a:cs typeface="Trebuchet MS" pitchFamily="34" charset="-120"/>
               </a:rPr>
-              <a:t>megaton</a:t>
+              <a:t>megalithic</a:t>
             </a:r>
             <a:endParaRPr lang="en-US" sz="1200" dirty="0"/>
           </a:p>
@@ -42399,7 +43275,7 @@
                 <a:ea typeface="Calibri" pitchFamily="34" charset="-122"/>
                 <a:cs typeface="Calibri" pitchFamily="34" charset="-120"/>
               </a:rPr>
-              <a:t>A unit for measuring computer data — about one million bytes of information.</a:t>
+              <a:t>A large unit used to measure computer data — about one million bytes of information.</a:t>
             </a:r>
             <a:endParaRPr lang="en-US" sz="1200" dirty="0"/>
           </a:p>
@@ -42894,7 +43770,7 @@
                 <a:ea typeface="Calibri" pitchFamily="34" charset="-122"/>
                 <a:cs typeface="Calibri" pitchFamily="34" charset="-120"/>
               </a:rPr>
-              <a:t>The coach used a megaphone to give instructions to all the students on the oval.</a:t>
+              <a:t>The coach used a megaphone to call all the players back to the oval.</a:t>
             </a:r>
             <a:endParaRPr lang="en-US" sz="1500" dirty="0"/>
           </a:p>
@@ -43058,7 +43934,7 @@
                 <a:ea typeface="Calibri" pitchFamily="34" charset="-122"/>
                 <a:cs typeface="Calibri" pitchFamily="34" charset="-120"/>
               </a:rPr>
-              <a:t>My new tablet can store thousands of photos because it has so many megabytes of memory.</a:t>
+              <a:t>The new camera has twelve megapixels, so the photos look incredibly clear and sharp.</a:t>
             </a:r>
             <a:endParaRPr lang="en-US" sz="1500" dirty="0"/>
           </a:p>
@@ -43222,7 +44098,7 @@
                 <a:ea typeface="Calibri" pitchFamily="34" charset="-122"/>
                 <a:cs typeface="Calibri" pitchFamily="34" charset="-120"/>
               </a:rPr>
-              <a:t>The pop megastar walked onto the stage and the crowd went absolutely wild.</a:t>
+              <a:t>Sydney is not quite a megacity yet, but it is one of Australia's largest and busiest places.</a:t>
             </a:r>
             <a:endParaRPr lang="en-US" sz="1500" dirty="0"/>
           </a:p>
